--- a/Microservices/01.1. Introduction To Microservices.pptx
+++ b/Microservices/01.1. Introduction To Microservices.pptx
@@ -5,7 +5,7 @@
     <p:sldMasterId id="2147483708" r:id="rId1"/>
   </p:sldMasterIdLst>
   <p:notesMasterIdLst>
-    <p:notesMasterId r:id="rId38"/>
+    <p:notesMasterId r:id="rId48"/>
   </p:notesMasterIdLst>
   <p:sldIdLst>
     <p:sldId id="658" r:id="rId2"/>
@@ -21,29 +21,39 @@
     <p:sldId id="626" r:id="rId12"/>
     <p:sldId id="662" r:id="rId13"/>
     <p:sldId id="628" r:id="rId14"/>
-    <p:sldId id="612" r:id="rId15"/>
-    <p:sldId id="665" r:id="rId16"/>
-    <p:sldId id="585" r:id="rId17"/>
-    <p:sldId id="668" r:id="rId18"/>
-    <p:sldId id="681" r:id="rId19"/>
-    <p:sldId id="682" r:id="rId20"/>
-    <p:sldId id="666" r:id="rId21"/>
-    <p:sldId id="669" r:id="rId22"/>
-    <p:sldId id="595" r:id="rId23"/>
-    <p:sldId id="679" r:id="rId24"/>
-    <p:sldId id="602" r:id="rId25"/>
-    <p:sldId id="603" r:id="rId26"/>
-    <p:sldId id="604" r:id="rId27"/>
-    <p:sldId id="670" r:id="rId28"/>
-    <p:sldId id="671" r:id="rId29"/>
-    <p:sldId id="672" r:id="rId30"/>
-    <p:sldId id="673" r:id="rId31"/>
-    <p:sldId id="674" r:id="rId32"/>
-    <p:sldId id="675" r:id="rId33"/>
-    <p:sldId id="676" r:id="rId34"/>
-    <p:sldId id="677" r:id="rId35"/>
-    <p:sldId id="678" r:id="rId36"/>
-    <p:sldId id="516" r:id="rId37"/>
+    <p:sldId id="683" r:id="rId15"/>
+    <p:sldId id="612" r:id="rId16"/>
+    <p:sldId id="665" r:id="rId17"/>
+    <p:sldId id="585" r:id="rId18"/>
+    <p:sldId id="668" r:id="rId19"/>
+    <p:sldId id="681" r:id="rId20"/>
+    <p:sldId id="682" r:id="rId21"/>
+    <p:sldId id="666" r:id="rId22"/>
+    <p:sldId id="669" r:id="rId23"/>
+    <p:sldId id="595" r:id="rId24"/>
+    <p:sldId id="679" r:id="rId25"/>
+    <p:sldId id="602" r:id="rId26"/>
+    <p:sldId id="603" r:id="rId27"/>
+    <p:sldId id="604" r:id="rId28"/>
+    <p:sldId id="670" r:id="rId29"/>
+    <p:sldId id="671" r:id="rId30"/>
+    <p:sldId id="672" r:id="rId31"/>
+    <p:sldId id="673" r:id="rId32"/>
+    <p:sldId id="674" r:id="rId33"/>
+    <p:sldId id="675" r:id="rId34"/>
+    <p:sldId id="676" r:id="rId35"/>
+    <p:sldId id="677" r:id="rId36"/>
+    <p:sldId id="678" r:id="rId37"/>
+    <p:sldId id="684" r:id="rId38"/>
+    <p:sldId id="685" r:id="rId39"/>
+    <p:sldId id="686" r:id="rId40"/>
+    <p:sldId id="688" r:id="rId41"/>
+    <p:sldId id="689" r:id="rId42"/>
+    <p:sldId id="690" r:id="rId43"/>
+    <p:sldId id="691" r:id="rId44"/>
+    <p:sldId id="692" r:id="rId45"/>
+    <p:sldId id="693" r:id="rId46"/>
+    <p:sldId id="516" r:id="rId47"/>
   </p:sldIdLst>
   <p:sldSz cx="9144000" cy="6858000" type="screen4x3"/>
   <p:notesSz cx="6858000" cy="9144000"/>
@@ -258,7 +268,7 @@
             <a:fld id="{2F0940CE-BE1D-4C40-AF8B-3898A4D1F5EC}" type="datetimeFigureOut">
               <a:rPr lang="en-US" smtClean="0"/>
               <a:pPr/>
-              <a:t>3/4/2024</a:t>
+              <a:t>7/1/2026</a:t>
             </a:fld>
             <a:endParaRPr lang="en-US"/>
           </a:p>
@@ -674,7 +684,7 @@
             <a:fld id="{7570CC96-DB61-4850-AF79-05CA5E4B3D0A}" type="slidenum">
               <a:rPr lang="en-US" smtClean="0"/>
               <a:pPr/>
-              <a:t>16</a:t>
+              <a:t>17</a:t>
             </a:fld>
             <a:endParaRPr lang="en-US"/>
           </a:p>
@@ -879,7 +889,7 @@
               <a:pPr>
                 <a:defRPr/>
               </a:pPr>
-              <a:t>3/4/2024</a:t>
+              <a:t>7/1/2026</a:t>
             </a:fld>
             <a:endParaRPr lang="en-US"/>
           </a:p>
@@ -1071,7 +1081,7 @@
               <a:pPr>
                 <a:defRPr/>
               </a:pPr>
-              <a:t>3/4/2024</a:t>
+              <a:t>7/1/2026</a:t>
             </a:fld>
             <a:endParaRPr lang="en-US"/>
           </a:p>
@@ -1273,7 +1283,7 @@
               <a:pPr>
                 <a:defRPr/>
               </a:pPr>
-              <a:t>3/4/2024</a:t>
+              <a:t>7/1/2026</a:t>
             </a:fld>
             <a:endParaRPr lang="en-US"/>
           </a:p>
@@ -1465,7 +1475,7 @@
               <a:pPr>
                 <a:defRPr/>
               </a:pPr>
-              <a:t>3/4/2024</a:t>
+              <a:t>7/1/2026</a:t>
             </a:fld>
             <a:endParaRPr lang="en-US"/>
           </a:p>
@@ -1733,7 +1743,7 @@
               <a:pPr>
                 <a:defRPr/>
               </a:pPr>
-              <a:t>3/4/2024</a:t>
+              <a:t>7/1/2026</a:t>
             </a:fld>
             <a:endParaRPr lang="en-US"/>
           </a:p>
@@ -2043,7 +2053,7 @@
               <a:pPr>
                 <a:defRPr/>
               </a:pPr>
-              <a:t>3/4/2024</a:t>
+              <a:t>7/1/2026</a:t>
             </a:fld>
             <a:endParaRPr lang="en-US"/>
           </a:p>
@@ -2487,7 +2497,7 @@
               <a:pPr>
                 <a:defRPr/>
               </a:pPr>
-              <a:t>3/4/2024</a:t>
+              <a:t>7/1/2026</a:t>
             </a:fld>
             <a:endParaRPr lang="en-US"/>
           </a:p>
@@ -2627,7 +2637,7 @@
               <a:pPr>
                 <a:defRPr/>
               </a:pPr>
-              <a:t>3/4/2024</a:t>
+              <a:t>7/1/2026</a:t>
             </a:fld>
             <a:endParaRPr lang="en-US"/>
           </a:p>
@@ -2744,7 +2754,7 @@
               <a:pPr>
                 <a:defRPr/>
               </a:pPr>
-              <a:t>3/4/2024</a:t>
+              <a:t>7/1/2026</a:t>
             </a:fld>
             <a:endParaRPr lang="en-US"/>
           </a:p>
@@ -3043,7 +3053,7 @@
               <a:pPr>
                 <a:defRPr/>
               </a:pPr>
-              <a:t>3/4/2024</a:t>
+              <a:t>7/1/2026</a:t>
             </a:fld>
             <a:endParaRPr lang="en-US"/>
           </a:p>
@@ -3321,7 +3331,7 @@
               <a:pPr>
                 <a:defRPr/>
               </a:pPr>
-              <a:t>3/4/2024</a:t>
+              <a:t>7/1/2026</a:t>
             </a:fld>
             <a:endParaRPr lang="en-US"/>
           </a:p>
@@ -3569,7 +3579,7 @@
               <a:pPr>
                 <a:defRPr/>
               </a:pPr>
-              <a:t>3/4/2024</a:t>
+              <a:t>7/1/2026</a:t>
             </a:fld>
             <a:endParaRPr lang="en-US"/>
           </a:p>
@@ -4771,146 +4781,32 @@
           <a:chExt cx="0" cy="0"/>
         </a:xfrm>
       </p:grpSpPr>
-      <p:sp>
-        <p:nvSpPr>
-          <p:cNvPr id="2" name="Title 1"/>
-          <p:cNvSpPr>
-            <a:spLocks noGrp="1"/>
-          </p:cNvSpPr>
-          <p:nvPr>
-            <p:ph type="title"/>
-          </p:nvPr>
-        </p:nvSpPr>
-        <p:spPr/>
-        <p:txBody>
-          <a:bodyPr/>
-          <a:lstStyle/>
-          <a:p>
-            <a:r>
-              <a:rPr lang="en-US" dirty="0" smtClean="0"/>
-              <a:t>What are </a:t>
-            </a:r>
-            <a:r>
-              <a:rPr lang="en-US" dirty="0" err="1" smtClean="0"/>
-              <a:t>Microservices</a:t>
-            </a:r>
-            <a:r>
-              <a:rPr lang="en-US" dirty="0" smtClean="0"/>
-              <a:t> [1]</a:t>
-            </a:r>
-            <a:endParaRPr lang="en-US" dirty="0"/>
-          </a:p>
-        </p:txBody>
-      </p:sp>
-      <p:sp>
-        <p:nvSpPr>
-          <p:cNvPr id="3" name="Content Placeholder 2"/>
-          <p:cNvSpPr>
-            <a:spLocks noGrp="1"/>
-          </p:cNvSpPr>
-          <p:nvPr>
-            <p:ph idx="1"/>
-          </p:nvPr>
-        </p:nvSpPr>
-        <p:spPr/>
-        <p:txBody>
-          <a:bodyPr/>
-          <a:lstStyle/>
-          <a:p>
-            <a:r>
-              <a:rPr lang="en-US" sz="2400" dirty="0" smtClean="0"/>
-              <a:t>an </a:t>
-            </a:r>
-            <a:r>
-              <a:rPr lang="en-US" sz="2400" i="1" dirty="0" smtClean="0">
-                <a:solidFill>
-                  <a:srgbClr val="C00000"/>
-                </a:solidFill>
-              </a:rPr>
-              <a:t>architectural style</a:t>
-            </a:r>
-            <a:r>
-              <a:rPr lang="en-US" sz="2400" dirty="0" smtClean="0"/>
-              <a:t> that</a:t>
-            </a:r>
-          </a:p>
-          <a:p>
-            <a:r>
-              <a:rPr lang="en-US" sz="2400" i="1" dirty="0" smtClean="0"/>
-              <a:t>"… is an approach to developing a single application as </a:t>
-            </a:r>
-            <a:r>
-              <a:rPr lang="en-US" sz="2400" i="1" u="sng" dirty="0" smtClean="0"/>
-              <a:t>a suite of small services</a:t>
-            </a:r>
-            <a:r>
-              <a:rPr lang="en-US" sz="2400" i="1" dirty="0" smtClean="0"/>
-              <a:t>, each running in </a:t>
-            </a:r>
-            <a:r>
-              <a:rPr lang="en-US" sz="2400" i="1" u="sng" dirty="0" smtClean="0"/>
-              <a:t>its own process</a:t>
-            </a:r>
-            <a:r>
-              <a:rPr lang="en-US" sz="2400" i="1" dirty="0" smtClean="0"/>
-              <a:t> and communicating with </a:t>
-            </a:r>
-            <a:r>
-              <a:rPr lang="en-US" sz="2400" i="1" u="sng" dirty="0" smtClean="0"/>
-              <a:t>lightweight mechanisms</a:t>
-            </a:r>
-            <a:r>
-              <a:rPr lang="en-US" sz="2400" i="1" dirty="0" smtClean="0"/>
-              <a:t>, often an HTTP resource API.</a:t>
-            </a:r>
-          </a:p>
-          <a:p>
-            <a:r>
-              <a:rPr lang="en-US" sz="2400" i="1" dirty="0" smtClean="0"/>
-              <a:t>These services are built around </a:t>
-            </a:r>
-            <a:r>
-              <a:rPr lang="en-US" sz="2400" i="1" u="sng" dirty="0" smtClean="0"/>
-              <a:t>business capabilities</a:t>
-            </a:r>
-            <a:r>
-              <a:rPr lang="en-US" sz="2400" i="1" dirty="0" smtClean="0"/>
-              <a:t> and </a:t>
-            </a:r>
-            <a:r>
-              <a:rPr lang="en-US" sz="2400" i="1" u="sng" dirty="0" smtClean="0"/>
-              <a:t>independently deployable</a:t>
-            </a:r>
-            <a:r>
-              <a:rPr lang="en-US" sz="2400" i="1" dirty="0" smtClean="0"/>
-              <a:t> by fully automated deployment machinery.</a:t>
-            </a:r>
-          </a:p>
-          <a:p>
-            <a:r>
-              <a:rPr lang="en-US" sz="2400" i="1" dirty="0" smtClean="0"/>
-              <a:t>There is a bare minimum of centralized management of these services, which may be written in </a:t>
-            </a:r>
-            <a:r>
-              <a:rPr lang="en-US" sz="2400" i="1" u="sng" dirty="0" smtClean="0"/>
-              <a:t>different programming languages</a:t>
-            </a:r>
-            <a:r>
-              <a:rPr lang="en-US" sz="2400" i="1" dirty="0" smtClean="0"/>
-              <a:t> and use </a:t>
-            </a:r>
-            <a:r>
-              <a:rPr lang="en-US" sz="2400" i="1" u="sng" dirty="0" smtClean="0"/>
-              <a:t>different data storage technologies</a:t>
-            </a:r>
-            <a:r>
-              <a:rPr lang="en-US" sz="2400" i="1" dirty="0" smtClean="0"/>
-              <a:t>."</a:t>
-            </a:r>
-            <a:endParaRPr lang="en-US" sz="2400" i="1" dirty="0"/>
-          </a:p>
-        </p:txBody>
-      </p:sp>
+      <p:pic>
+        <p:nvPicPr>
+          <p:cNvPr id="4" name="Picture 2" descr="https://lh3.ggpht.com/1IfZLL2QDSjZ0wS7sUhaMlsAOS8BBzdR3wZ1WawgRn7KZAM8nEVZYMOUM-lqQb0ikIzp=w300"/>
+          <p:cNvPicPr>
+            <a:picLocks noChangeAspect="1" noChangeArrowheads="1"/>
+          </p:cNvPicPr>
+          <p:nvPr/>
+        </p:nvPicPr>
+        <p:blipFill>
+          <a:blip r:embed="rId2" cstate="print"/>
+          <a:srcRect/>
+          <a:stretch>
+            <a:fillRect/>
+          </a:stretch>
+        </p:blipFill>
+        <p:spPr bwMode="auto">
+          <a:xfrm>
+            <a:off x="3276600" y="1905000"/>
+            <a:ext cx="2857500" cy="2857500"/>
+          </a:xfrm>
+          <a:prstGeom prst="rect">
+            <a:avLst/>
+          </a:prstGeom>
+          <a:noFill/>
+        </p:spPr>
+      </p:pic>
     </p:spTree>
   </p:cSld>
   <p:clrMapOvr>
@@ -4920,6 +4816,171 @@
 </file>
 
 <file path=ppt/slides/slide15.xml><?xml version="1.0" encoding="utf-8"?>
+<p:sld xmlns:a="http://schemas.openxmlformats.org/drawingml/2006/main" xmlns:r="http://schemas.openxmlformats.org/officeDocument/2006/relationships" xmlns:p="http://schemas.openxmlformats.org/presentationml/2006/main">
+  <p:cSld>
+    <p:spTree>
+      <p:nvGrpSpPr>
+        <p:cNvPr id="1" name=""/>
+        <p:cNvGrpSpPr/>
+        <p:nvPr/>
+      </p:nvGrpSpPr>
+      <p:grpSpPr>
+        <a:xfrm>
+          <a:off x="0" y="0"/>
+          <a:ext cx="0" cy="0"/>
+          <a:chOff x="0" y="0"/>
+          <a:chExt cx="0" cy="0"/>
+        </a:xfrm>
+      </p:grpSpPr>
+      <p:sp>
+        <p:nvSpPr>
+          <p:cNvPr id="2" name="Title 1"/>
+          <p:cNvSpPr>
+            <a:spLocks noGrp="1"/>
+          </p:cNvSpPr>
+          <p:nvPr>
+            <p:ph type="title"/>
+          </p:nvPr>
+        </p:nvSpPr>
+        <p:spPr/>
+        <p:txBody>
+          <a:bodyPr/>
+          <a:lstStyle/>
+          <a:p>
+            <a:r>
+              <a:rPr lang="en-US" dirty="0" smtClean="0"/>
+              <a:t>What are </a:t>
+            </a:r>
+            <a:r>
+              <a:rPr lang="en-US" dirty="0" err="1" smtClean="0"/>
+              <a:t>Microservices</a:t>
+            </a:r>
+            <a:r>
+              <a:rPr lang="en-US" dirty="0" smtClean="0"/>
+              <a:t> [1]</a:t>
+            </a:r>
+            <a:endParaRPr lang="en-US" dirty="0"/>
+          </a:p>
+        </p:txBody>
+      </p:sp>
+      <p:sp>
+        <p:nvSpPr>
+          <p:cNvPr id="3" name="Content Placeholder 2"/>
+          <p:cNvSpPr>
+            <a:spLocks noGrp="1"/>
+          </p:cNvSpPr>
+          <p:nvPr>
+            <p:ph idx="1"/>
+          </p:nvPr>
+        </p:nvSpPr>
+        <p:spPr/>
+        <p:txBody>
+          <a:bodyPr/>
+          <a:lstStyle/>
+          <a:p>
+            <a:r>
+              <a:rPr lang="en-US" sz="2400" dirty="0" smtClean="0"/>
+              <a:t>an </a:t>
+            </a:r>
+            <a:r>
+              <a:rPr lang="en-US" sz="2400" i="1" dirty="0" smtClean="0">
+                <a:solidFill>
+                  <a:srgbClr val="C00000"/>
+                </a:solidFill>
+              </a:rPr>
+              <a:t>architectural style</a:t>
+            </a:r>
+            <a:r>
+              <a:rPr lang="en-US" sz="2400" dirty="0" smtClean="0"/>
+              <a:t> that</a:t>
+            </a:r>
+          </a:p>
+          <a:p>
+            <a:r>
+              <a:rPr lang="en-US" sz="2400" i="1" dirty="0" smtClean="0"/>
+              <a:t>"… is an approach to developing a single application as </a:t>
+            </a:r>
+            <a:r>
+              <a:rPr lang="en-US" sz="2400" i="1" u="sng" dirty="0" smtClean="0"/>
+              <a:t>a suite of small services</a:t>
+            </a:r>
+            <a:r>
+              <a:rPr lang="en-US" sz="2400" i="1" dirty="0" smtClean="0"/>
+              <a:t>, each running in </a:t>
+            </a:r>
+            <a:r>
+              <a:rPr lang="en-US" sz="2400" i="1" u="sng" dirty="0" smtClean="0"/>
+              <a:t>its own process</a:t>
+            </a:r>
+            <a:r>
+              <a:rPr lang="en-US" sz="2400" i="1" dirty="0" smtClean="0"/>
+              <a:t> and communicating with </a:t>
+            </a:r>
+            <a:r>
+              <a:rPr lang="en-US" sz="2400" i="1" u="sng" dirty="0" smtClean="0"/>
+              <a:t>lightweight mechanisms</a:t>
+            </a:r>
+            <a:r>
+              <a:rPr lang="en-US" sz="2400" i="1" dirty="0" smtClean="0"/>
+              <a:t>, often an HTTP resource API.</a:t>
+            </a:r>
+          </a:p>
+          <a:p>
+            <a:r>
+              <a:rPr lang="en-US" sz="2400" i="1" dirty="0" smtClean="0"/>
+              <a:t>These services are built around </a:t>
+            </a:r>
+            <a:r>
+              <a:rPr lang="en-US" sz="2400" i="1" u="sng" dirty="0" smtClean="0"/>
+              <a:t>business capabilities</a:t>
+            </a:r>
+            <a:r>
+              <a:rPr lang="en-US" sz="2400" i="1" dirty="0" smtClean="0"/>
+              <a:t> and </a:t>
+            </a:r>
+            <a:r>
+              <a:rPr lang="en-US" sz="2400" i="1" u="sng" dirty="0" smtClean="0"/>
+              <a:t>independently deployable</a:t>
+            </a:r>
+            <a:r>
+              <a:rPr lang="en-US" sz="2400" i="1" dirty="0" smtClean="0"/>
+              <a:t> by fully automated deployment machinery.</a:t>
+            </a:r>
+          </a:p>
+          <a:p>
+            <a:r>
+              <a:rPr lang="en-US" sz="2400" i="1" dirty="0" smtClean="0"/>
+              <a:t>There is a bare minimum of centralized management of these services, which may be written in </a:t>
+            </a:r>
+            <a:r>
+              <a:rPr lang="en-US" sz="2400" i="1" u="sng" dirty="0" smtClean="0"/>
+              <a:t>different programming languages</a:t>
+            </a:r>
+            <a:r>
+              <a:rPr lang="en-US" sz="2400" i="1" dirty="0" smtClean="0"/>
+              <a:t> and use </a:t>
+            </a:r>
+            <a:r>
+              <a:rPr lang="en-US" sz="2400" i="1" u="sng" dirty="0" smtClean="0"/>
+              <a:t>different data storage technologies</a:t>
+            </a:r>
+            <a:r>
+              <a:rPr lang="en-US" sz="2400" i="1" dirty="0" smtClean="0"/>
+              <a:t>."</a:t>
+            </a:r>
+            <a:endParaRPr lang="en-US" sz="2400" i="1" dirty="0"/>
+          </a:p>
+        </p:txBody>
+      </p:sp>
+    </p:spTree>
+  </p:cSld>
+  <p:clrMapOvr>
+    <a:masterClrMapping/>
+  </p:clrMapOvr>
+</p:sld>
+</file>
+
+<file path=ppt/slides/slide16.xml><?xml version="1.0" encoding="utf-8"?>
 <p:sld xmlns:a="http://schemas.openxmlformats.org/drawingml/2006/main" xmlns:r="http://schemas.openxmlformats.org/officeDocument/2006/relationships" xmlns:p="http://schemas.openxmlformats.org/presentationml/2006/main">
   <p:cSld>
     <p:spTree>
@@ -5038,7 +5099,7 @@
 </p:sld>
 </file>
 
-<file path=ppt/slides/slide16.xml><?xml version="1.0" encoding="utf-8"?>
+<file path=ppt/slides/slide17.xml><?xml version="1.0" encoding="utf-8"?>
 <p:sld xmlns:a="http://schemas.openxmlformats.org/drawingml/2006/main" xmlns:r="http://schemas.openxmlformats.org/officeDocument/2006/relationships" xmlns:p="http://schemas.openxmlformats.org/presentationml/2006/main">
   <p:cSld>
     <p:spTree>
@@ -5226,7 +5287,7 @@
 </p:sld>
 </file>
 
-<file path=ppt/slides/slide17.xml><?xml version="1.0" encoding="utf-8"?>
+<file path=ppt/slides/slide18.xml><?xml version="1.0" encoding="utf-8"?>
 <p:sld xmlns:a="http://schemas.openxmlformats.org/drawingml/2006/main" xmlns:r="http://schemas.openxmlformats.org/officeDocument/2006/relationships" xmlns:p="http://schemas.openxmlformats.org/presentationml/2006/main">
   <p:cSld>
     <p:spTree>
@@ -5310,7 +5371,7 @@
 </p:sld>
 </file>
 
-<file path=ppt/slides/slide18.xml><?xml version="1.0" encoding="utf-8"?>
+<file path=ppt/slides/slide19.xml><?xml version="1.0" encoding="utf-8"?>
 <p:sld xmlns:a="http://schemas.openxmlformats.org/drawingml/2006/main" xmlns:r="http://schemas.openxmlformats.org/officeDocument/2006/relationships" xmlns:p="http://schemas.openxmlformats.org/presentationml/2006/main">
   <p:cSld>
     <p:spTree>
@@ -5373,84 +5434,6 @@
           <a:xfrm>
             <a:off x="878657" y="1828800"/>
             <a:ext cx="7427143" cy="3998572"/>
-          </a:xfrm>
-          <a:prstGeom prst="rect">
-            <a:avLst/>
-          </a:prstGeom>
-          <a:noFill/>
-        </p:spPr>
-      </p:pic>
-    </p:spTree>
-  </p:cSld>
-  <p:clrMapOvr>
-    <a:masterClrMapping/>
-  </p:clrMapOvr>
-</p:sld>
-</file>
-
-<file path=ppt/slides/slide19.xml><?xml version="1.0" encoding="utf-8"?>
-<p:sld xmlns:a="http://schemas.openxmlformats.org/drawingml/2006/main" xmlns:r="http://schemas.openxmlformats.org/officeDocument/2006/relationships" xmlns:p="http://schemas.openxmlformats.org/presentationml/2006/main">
-  <p:cSld>
-    <p:spTree>
-      <p:nvGrpSpPr>
-        <p:cNvPr id="1" name=""/>
-        <p:cNvGrpSpPr/>
-        <p:nvPr/>
-      </p:nvGrpSpPr>
-      <p:grpSpPr>
-        <a:xfrm>
-          <a:off x="0" y="0"/>
-          <a:ext cx="0" cy="0"/>
-          <a:chOff x="0" y="0"/>
-          <a:chExt cx="0" cy="0"/>
-        </a:xfrm>
-      </p:grpSpPr>
-      <p:sp>
-        <p:nvSpPr>
-          <p:cNvPr id="2" name="Title 1"/>
-          <p:cNvSpPr>
-            <a:spLocks noGrp="1"/>
-          </p:cNvSpPr>
-          <p:nvPr>
-            <p:ph type="title"/>
-          </p:nvPr>
-        </p:nvSpPr>
-        <p:spPr/>
-        <p:txBody>
-          <a:bodyPr/>
-          <a:lstStyle/>
-          <a:p>
-            <a:r>
-              <a:rPr lang="en-US" dirty="0" smtClean="0"/>
-              <a:t>Composite UI with </a:t>
-            </a:r>
-            <a:r>
-              <a:rPr lang="en-US" dirty="0" err="1" smtClean="0"/>
-              <a:t>Microservices</a:t>
-            </a:r>
-            <a:endParaRPr lang="en-US" dirty="0"/>
-          </a:p>
-        </p:txBody>
-      </p:sp>
-      <p:pic>
-        <p:nvPicPr>
-          <p:cNvPr id="52226" name="Picture 2" descr="https://docs.microsoft.com/en-us/dotnet/architecture/microservices/architect-microservice-container-applications/media/microservice-based-composite-ui-shape-layout/microservice-generate-composite-ui.png"/>
-          <p:cNvPicPr>
-            <a:picLocks noChangeAspect="1" noChangeArrowheads="1"/>
-          </p:cNvPicPr>
-          <p:nvPr/>
-        </p:nvPicPr>
-        <p:blipFill>
-          <a:blip r:embed="rId2" cstate="print"/>
-          <a:srcRect/>
-          <a:stretch>
-            <a:fillRect/>
-          </a:stretch>
-        </p:blipFill>
-        <p:spPr bwMode="auto">
-          <a:xfrm>
-            <a:off x="533400" y="1828800"/>
-            <a:ext cx="8007205" cy="4021060"/>
           </a:xfrm>
           <a:prstGeom prst="rect">
             <a:avLst/>
@@ -5630,9 +5613,36 @@
           <a:chExt cx="0" cy="0"/>
         </a:xfrm>
       </p:grpSpPr>
+      <p:sp>
+        <p:nvSpPr>
+          <p:cNvPr id="2" name="Title 1"/>
+          <p:cNvSpPr>
+            <a:spLocks noGrp="1"/>
+          </p:cNvSpPr>
+          <p:nvPr>
+            <p:ph type="title"/>
+          </p:nvPr>
+        </p:nvSpPr>
+        <p:spPr/>
+        <p:txBody>
+          <a:bodyPr/>
+          <a:lstStyle/>
+          <a:p>
+            <a:r>
+              <a:rPr lang="en-US" dirty="0" smtClean="0"/>
+              <a:t>Composite UI with </a:t>
+            </a:r>
+            <a:r>
+              <a:rPr lang="en-US" dirty="0" err="1" smtClean="0"/>
+              <a:t>Microservices</a:t>
+            </a:r>
+            <a:endParaRPr lang="en-US" dirty="0"/>
+          </a:p>
+        </p:txBody>
+      </p:sp>
       <p:pic>
         <p:nvPicPr>
-          <p:cNvPr id="4" name="Picture 2" descr="https://lh3.ggpht.com/1IfZLL2QDSjZ0wS7sUhaMlsAOS8BBzdR3wZ1WawgRn7KZAM8nEVZYMOUM-lqQb0ikIzp=w300"/>
+          <p:cNvPr id="52226" name="Picture 2" descr="https://docs.microsoft.com/en-us/dotnet/architecture/microservices/architect-microservice-container-applications/media/microservice-based-composite-ui-shape-layout/microservice-generate-composite-ui.png"/>
           <p:cNvPicPr>
             <a:picLocks noChangeAspect="1" noChangeArrowheads="1"/>
           </p:cNvPicPr>
@@ -5647,8 +5657,8 @@
         </p:blipFill>
         <p:spPr bwMode="auto">
           <a:xfrm>
-            <a:off x="3276600" y="1905000"/>
-            <a:ext cx="2857500" cy="2857500"/>
+            <a:off x="533400" y="1828800"/>
+            <a:ext cx="8007205" cy="4021060"/>
           </a:xfrm>
           <a:prstGeom prst="rect">
             <a:avLst/>
@@ -5665,942 +5675,6 @@
 </file>
 
 <file path=ppt/slides/slide21.xml><?xml version="1.0" encoding="utf-8"?>
-<p:sld xmlns:a="http://schemas.openxmlformats.org/drawingml/2006/main" xmlns:r="http://schemas.openxmlformats.org/officeDocument/2006/relationships" xmlns:p="http://schemas.openxmlformats.org/presentationml/2006/main">
-  <p:cSld>
-    <p:spTree>
-      <p:nvGrpSpPr>
-        <p:cNvPr id="1" name=""/>
-        <p:cNvGrpSpPr/>
-        <p:nvPr/>
-      </p:nvGrpSpPr>
-      <p:grpSpPr>
-        <a:xfrm>
-          <a:off x="0" y="0"/>
-          <a:ext cx="0" cy="0"/>
-          <a:chOff x="0" y="0"/>
-          <a:chExt cx="0" cy="0"/>
-        </a:xfrm>
-      </p:grpSpPr>
-      <p:sp>
-        <p:nvSpPr>
-          <p:cNvPr id="2" name="Title 1"/>
-          <p:cNvSpPr>
-            <a:spLocks noGrp="1"/>
-          </p:cNvSpPr>
-          <p:nvPr>
-            <p:ph type="title"/>
-          </p:nvPr>
-        </p:nvSpPr>
-        <p:spPr/>
-        <p:txBody>
-          <a:bodyPr/>
-          <a:lstStyle/>
-          <a:p>
-            <a:r>
-              <a:rPr lang="en-US" dirty="0" err="1" smtClean="0"/>
-              <a:t>Microservices</a:t>
-            </a:r>
-            <a:r>
-              <a:rPr lang="en-US" dirty="0" smtClean="0"/>
-              <a:t> Origin</a:t>
-            </a:r>
-            <a:endParaRPr lang="en-US" dirty="0"/>
-          </a:p>
-        </p:txBody>
-      </p:sp>
-      <p:sp>
-        <p:nvSpPr>
-          <p:cNvPr id="3" name="Content Placeholder 2"/>
-          <p:cNvSpPr>
-            <a:spLocks noGrp="1"/>
-          </p:cNvSpPr>
-          <p:nvPr>
-            <p:ph idx="1"/>
-          </p:nvPr>
-        </p:nvSpPr>
-        <p:spPr/>
-        <p:txBody>
-          <a:bodyPr/>
-          <a:lstStyle/>
-          <a:p>
-            <a:r>
-              <a:rPr lang="en-US" sz="2400" dirty="0" smtClean="0"/>
-              <a:t>Domain-driven design. Continuous delivery. On-demand virtualization. Infrastructure automation. Small autonomous teams. Systems at scale.</a:t>
-            </a:r>
-          </a:p>
-          <a:p>
-            <a:r>
-              <a:rPr lang="en-US" sz="2400" dirty="0" err="1" smtClean="0"/>
-              <a:t>Microservices</a:t>
-            </a:r>
-            <a:r>
-              <a:rPr lang="en-US" sz="2400" dirty="0" smtClean="0"/>
-              <a:t> have </a:t>
-            </a:r>
-            <a:r>
-              <a:rPr lang="en-US" sz="2400" i="1" dirty="0" smtClean="0">
-                <a:solidFill>
-                  <a:srgbClr val="C00000"/>
-                </a:solidFill>
-              </a:rPr>
-              <a:t>emerged</a:t>
-            </a:r>
-            <a:r>
-              <a:rPr lang="en-US" sz="2400" dirty="0" smtClean="0"/>
-              <a:t> from this world.</a:t>
-            </a:r>
-          </a:p>
-          <a:p>
-            <a:r>
-              <a:rPr lang="en-US" sz="2400" dirty="0" smtClean="0"/>
-              <a:t>They weren’t invented or described before the fact; they emerged as a trend, or a pattern, </a:t>
-            </a:r>
-            <a:r>
-              <a:rPr lang="en-US" sz="2400" i="1" dirty="0" smtClean="0">
-                <a:solidFill>
-                  <a:srgbClr val="C00000"/>
-                </a:solidFill>
-              </a:rPr>
-              <a:t>from real-world use</a:t>
-            </a:r>
-            <a:r>
-              <a:rPr lang="en-US" sz="2400" dirty="0" smtClean="0"/>
-              <a:t>.</a:t>
-            </a:r>
-          </a:p>
-        </p:txBody>
-      </p:sp>
-    </p:spTree>
-  </p:cSld>
-  <p:clrMapOvr>
-    <a:masterClrMapping/>
-  </p:clrMapOvr>
-</p:sld>
-</file>
-
-<file path=ppt/slides/slide22.xml><?xml version="1.0" encoding="utf-8"?>
-<p:sld xmlns:a="http://schemas.openxmlformats.org/drawingml/2006/main" xmlns:r="http://schemas.openxmlformats.org/officeDocument/2006/relationships" xmlns:p="http://schemas.openxmlformats.org/presentationml/2006/main">
-  <p:cSld>
-    <p:spTree>
-      <p:nvGrpSpPr>
-        <p:cNvPr id="1" name=""/>
-        <p:cNvGrpSpPr/>
-        <p:nvPr/>
-      </p:nvGrpSpPr>
-      <p:grpSpPr>
-        <a:xfrm>
-          <a:off x="0" y="0"/>
-          <a:ext cx="0" cy="0"/>
-          <a:chOff x="0" y="0"/>
-          <a:chExt cx="0" cy="0"/>
-        </a:xfrm>
-      </p:grpSpPr>
-      <p:sp>
-        <p:nvSpPr>
-          <p:cNvPr id="2" name="Title 1"/>
-          <p:cNvSpPr>
-            <a:spLocks noGrp="1"/>
-          </p:cNvSpPr>
-          <p:nvPr>
-            <p:ph type="title"/>
-          </p:nvPr>
-        </p:nvSpPr>
-        <p:spPr/>
-        <p:txBody>
-          <a:bodyPr/>
-          <a:lstStyle/>
-          <a:p>
-            <a:r>
-              <a:rPr lang="en-US" dirty="0" smtClean="0"/>
-              <a:t>Why </a:t>
-            </a:r>
-            <a:r>
-              <a:rPr lang="en-US" dirty="0" err="1" smtClean="0"/>
-              <a:t>Microservices</a:t>
-            </a:r>
-            <a:r>
-              <a:rPr lang="en-US" dirty="0" smtClean="0"/>
-              <a:t>?</a:t>
-            </a:r>
-            <a:endParaRPr lang="en-US" dirty="0"/>
-          </a:p>
-        </p:txBody>
-      </p:sp>
-      <p:sp>
-        <p:nvSpPr>
-          <p:cNvPr id="3" name="Content Placeholder 2"/>
-          <p:cNvSpPr>
-            <a:spLocks noGrp="1"/>
-          </p:cNvSpPr>
-          <p:nvPr>
-            <p:ph idx="1"/>
-          </p:nvPr>
-        </p:nvSpPr>
-        <p:spPr/>
-        <p:txBody>
-          <a:bodyPr/>
-          <a:lstStyle/>
-          <a:p>
-            <a:r>
-              <a:rPr lang="en-US" sz="2200" dirty="0" smtClean="0">
-                <a:hlinkClick r:id="rId2"/>
-              </a:rPr>
-              <a:t>https://martinfowler.com/articles/microservice-trade-offs.html</a:t>
-            </a:r>
-            <a:endParaRPr lang="en-US" sz="2200" dirty="0" smtClean="0"/>
-          </a:p>
-          <a:p>
-            <a:r>
-              <a:rPr lang="en-US" sz="2200" i="1" dirty="0" smtClean="0">
-                <a:solidFill>
-                  <a:srgbClr val="C00000"/>
-                </a:solidFill>
-              </a:rPr>
-              <a:t>Strong Module Boundaries</a:t>
-            </a:r>
-            <a:r>
-              <a:rPr lang="en-US" sz="2200" dirty="0" smtClean="0"/>
-              <a:t>: </a:t>
-            </a:r>
-            <a:r>
-              <a:rPr lang="en-US" sz="2200" dirty="0" err="1" smtClean="0"/>
-              <a:t>Microservices</a:t>
-            </a:r>
-            <a:r>
-              <a:rPr lang="en-US" sz="2200" dirty="0" smtClean="0"/>
-              <a:t> reinforce modular structure, which is particularly important for larger teams.</a:t>
-            </a:r>
-          </a:p>
-          <a:p>
-            <a:r>
-              <a:rPr lang="en-US" sz="2200" i="1" dirty="0" smtClean="0">
-                <a:solidFill>
-                  <a:srgbClr val="C00000"/>
-                </a:solidFill>
-              </a:rPr>
-              <a:t>Independent Deployment</a:t>
-            </a:r>
-            <a:r>
-              <a:rPr lang="en-US" sz="2200" dirty="0" smtClean="0"/>
-              <a:t>: Simple services are easier to deploy, and since they are autonomous, are less likely to cause system failures when they go wrong.</a:t>
-            </a:r>
-          </a:p>
-          <a:p>
-            <a:r>
-              <a:rPr lang="en-US" sz="2200" i="1" dirty="0" smtClean="0">
-                <a:solidFill>
-                  <a:srgbClr val="C00000"/>
-                </a:solidFill>
-              </a:rPr>
-              <a:t>Technology Diversity</a:t>
-            </a:r>
-            <a:r>
-              <a:rPr lang="en-US" sz="2200" dirty="0" smtClean="0"/>
-              <a:t>: With </a:t>
-            </a:r>
-            <a:r>
-              <a:rPr lang="en-US" sz="2200" dirty="0" err="1" smtClean="0"/>
-              <a:t>microservices</a:t>
-            </a:r>
-            <a:r>
-              <a:rPr lang="en-US" sz="2200" dirty="0" smtClean="0"/>
-              <a:t> you can mix multiple languages, development frameworks and data-storage technologies.</a:t>
-            </a:r>
-          </a:p>
-        </p:txBody>
-      </p:sp>
-    </p:spTree>
-  </p:cSld>
-  <p:clrMapOvr>
-    <a:masterClrMapping/>
-  </p:clrMapOvr>
-</p:sld>
-</file>
-
-<file path=ppt/slides/slide23.xml><?xml version="1.0" encoding="utf-8"?>
-<p:sld xmlns:a="http://schemas.openxmlformats.org/drawingml/2006/main" xmlns:r="http://schemas.openxmlformats.org/officeDocument/2006/relationships" xmlns:p="http://schemas.openxmlformats.org/presentationml/2006/main">
-  <p:cSld>
-    <p:spTree>
-      <p:nvGrpSpPr>
-        <p:cNvPr id="1" name=""/>
-        <p:cNvGrpSpPr/>
-        <p:nvPr/>
-      </p:nvGrpSpPr>
-      <p:grpSpPr>
-        <a:xfrm>
-          <a:off x="0" y="0"/>
-          <a:ext cx="0" cy="0"/>
-          <a:chOff x="0" y="0"/>
-          <a:chExt cx="0" cy="0"/>
-        </a:xfrm>
-      </p:grpSpPr>
-      <p:sp>
-        <p:nvSpPr>
-          <p:cNvPr id="2" name="Title 1"/>
-          <p:cNvSpPr>
-            <a:spLocks noGrp="1"/>
-          </p:cNvSpPr>
-          <p:nvPr>
-            <p:ph type="title"/>
-          </p:nvPr>
-        </p:nvSpPr>
-        <p:spPr/>
-        <p:txBody>
-          <a:bodyPr/>
-          <a:lstStyle/>
-          <a:p>
-            <a:r>
-              <a:rPr lang="en-US" sz="4200" dirty="0" smtClean="0"/>
-              <a:t>Why </a:t>
-            </a:r>
-            <a:r>
-              <a:rPr lang="en-US" sz="4200" dirty="0" err="1" smtClean="0"/>
-              <a:t>Microservices</a:t>
-            </a:r>
-            <a:r>
-              <a:rPr lang="en-US" sz="4200" dirty="0" smtClean="0"/>
-              <a:t>? </a:t>
-            </a:r>
-            <a:r>
-              <a:rPr lang="en-US" sz="4200" dirty="0" smtClean="0"/>
-              <a:t>(My </a:t>
-            </a:r>
-            <a:r>
-              <a:rPr lang="en-US" sz="4200" dirty="0" smtClean="0"/>
-              <a:t>Opinion)</a:t>
-            </a:r>
-            <a:endParaRPr lang="en-US" sz="4200" dirty="0"/>
-          </a:p>
-        </p:txBody>
-      </p:sp>
-      <p:sp>
-        <p:nvSpPr>
-          <p:cNvPr id="3" name="Content Placeholder 2"/>
-          <p:cNvSpPr>
-            <a:spLocks noGrp="1"/>
-          </p:cNvSpPr>
-          <p:nvPr>
-            <p:ph idx="1"/>
-          </p:nvPr>
-        </p:nvSpPr>
-        <p:spPr/>
-        <p:txBody>
-          <a:bodyPr/>
-          <a:lstStyle/>
-          <a:p>
-            <a:r>
-              <a:rPr lang="en-US" sz="1800" b="1" dirty="0" smtClean="0"/>
-              <a:t>Reason 1</a:t>
-            </a:r>
-            <a:r>
-              <a:rPr lang="en-US" sz="1800" dirty="0" smtClean="0"/>
-              <a:t>: You want to have several </a:t>
-            </a:r>
-            <a:r>
-              <a:rPr lang="en-US" sz="1800" b="1" dirty="0" smtClean="0"/>
-              <a:t>independent development teams</a:t>
-            </a:r>
-            <a:r>
-              <a:rPr lang="en-US" sz="1800" dirty="0" smtClean="0"/>
-              <a:t>.</a:t>
-            </a:r>
-          </a:p>
-          <a:p>
-            <a:r>
-              <a:rPr lang="en-US" sz="1800" b="1" dirty="0" smtClean="0"/>
-              <a:t>Reason 2</a:t>
-            </a:r>
-            <a:r>
-              <a:rPr lang="en-US" sz="1800" dirty="0" smtClean="0"/>
-              <a:t>: You want or your client wants to have </a:t>
-            </a:r>
-            <a:r>
-              <a:rPr lang="en-US" sz="1800" b="1" dirty="0" smtClean="0"/>
-              <a:t>a faster and modern UI (i.e. SPA)</a:t>
-            </a:r>
-            <a:r>
-              <a:rPr lang="en-US" sz="1800" dirty="0" smtClean="0"/>
-              <a:t> that is </a:t>
-            </a:r>
-            <a:r>
-              <a:rPr lang="en-US" sz="1800" u="sng" dirty="0" smtClean="0"/>
-              <a:t>totally decoupled</a:t>
-            </a:r>
-            <a:r>
-              <a:rPr lang="en-US" sz="1800" dirty="0" smtClean="0"/>
-              <a:t> from the other parts of the system.</a:t>
-            </a:r>
-          </a:p>
-          <a:p>
-            <a:r>
-              <a:rPr lang="en-US" sz="1800" b="1" dirty="0" smtClean="0"/>
-              <a:t>Reason 3</a:t>
-            </a:r>
-            <a:r>
-              <a:rPr lang="en-US" sz="1800" dirty="0" smtClean="0"/>
-              <a:t>: You want or your client wants that a part of your system (e.g. user store and authentication) can be </a:t>
-            </a:r>
-            <a:r>
-              <a:rPr lang="en-US" sz="1800" b="1" dirty="0" smtClean="0"/>
-              <a:t>shared among or reused by multiple different systems</a:t>
-            </a:r>
-            <a:r>
-              <a:rPr lang="en-US" sz="1800" dirty="0" smtClean="0"/>
-              <a:t>.</a:t>
-            </a:r>
-          </a:p>
-          <a:p>
-            <a:r>
-              <a:rPr lang="en-US" sz="1800" b="1" dirty="0" smtClean="0"/>
-              <a:t>Reason 4</a:t>
-            </a:r>
-            <a:r>
-              <a:rPr lang="en-US" sz="1800" dirty="0" smtClean="0"/>
-              <a:t>: You want or your client wants your system to be able to </a:t>
-            </a:r>
-            <a:r>
-              <a:rPr lang="en-US" sz="1800" b="1" dirty="0" smtClean="0"/>
-              <a:t>scale out easily </a:t>
-            </a:r>
-            <a:r>
-              <a:rPr lang="en-US" sz="1800" b="1" i="1" dirty="0" smtClean="0"/>
-              <a:t>later</a:t>
-            </a:r>
-            <a:r>
-              <a:rPr lang="en-US" sz="1800" dirty="0" smtClean="0"/>
-              <a:t>.</a:t>
-            </a:r>
-          </a:p>
-          <a:p>
-            <a:r>
-              <a:rPr lang="en-US" sz="1800" b="1" dirty="0" smtClean="0"/>
-              <a:t>Reason 5</a:t>
-            </a:r>
-            <a:r>
-              <a:rPr lang="en-US" sz="1800" dirty="0" smtClean="0"/>
-              <a:t>: You want or your client wants that some parts of your system can </a:t>
-            </a:r>
-            <a:r>
-              <a:rPr lang="en-US" sz="1800" b="1" dirty="0" smtClean="0"/>
-              <a:t>be revised or extended or replaced easily </a:t>
-            </a:r>
-            <a:r>
-              <a:rPr lang="en-US" sz="1800" b="1" i="1" dirty="0" smtClean="0"/>
-              <a:t>later</a:t>
-            </a:r>
-            <a:r>
-              <a:rPr lang="en-US" sz="1800" dirty="0" smtClean="0"/>
-              <a:t>.</a:t>
-            </a:r>
-          </a:p>
-        </p:txBody>
-      </p:sp>
-      <p:pic>
-        <p:nvPicPr>
-          <p:cNvPr id="4" name="Picture 4" descr="https://miro.medium.com/max/4000/0*eO07yV9XbK95zYKj.jpg"/>
-          <p:cNvPicPr>
-            <a:picLocks noChangeAspect="1" noChangeArrowheads="1"/>
-          </p:cNvPicPr>
-          <p:nvPr/>
-        </p:nvPicPr>
-        <p:blipFill>
-          <a:blip r:embed="rId2" cstate="print"/>
-          <a:srcRect/>
-          <a:stretch>
-            <a:fillRect/>
-          </a:stretch>
-        </p:blipFill>
-        <p:spPr bwMode="auto">
-          <a:xfrm>
-            <a:off x="3505200" y="4748645"/>
-            <a:ext cx="2208276" cy="1652155"/>
-          </a:xfrm>
-          <a:prstGeom prst="rect">
-            <a:avLst/>
-          </a:prstGeom>
-          <a:noFill/>
-        </p:spPr>
-      </p:pic>
-    </p:spTree>
-  </p:cSld>
-  <p:clrMapOvr>
-    <a:masterClrMapping/>
-  </p:clrMapOvr>
-</p:sld>
-</file>
-
-<file path=ppt/slides/slide24.xml><?xml version="1.0" encoding="utf-8"?>
-<p:sld xmlns:a="http://schemas.openxmlformats.org/drawingml/2006/main" xmlns:r="http://schemas.openxmlformats.org/officeDocument/2006/relationships" xmlns:p="http://schemas.openxmlformats.org/presentationml/2006/main">
-  <p:cSld>
-    <p:spTree>
-      <p:nvGrpSpPr>
-        <p:cNvPr id="1" name=""/>
-        <p:cNvGrpSpPr/>
-        <p:nvPr/>
-      </p:nvGrpSpPr>
-      <p:grpSpPr>
-        <a:xfrm>
-          <a:off x="0" y="0"/>
-          <a:ext cx="0" cy="0"/>
-          <a:chOff x="0" y="0"/>
-          <a:chExt cx="0" cy="0"/>
-        </a:xfrm>
-      </p:grpSpPr>
-      <p:sp>
-        <p:nvSpPr>
-          <p:cNvPr id="2" name="Title 1"/>
-          <p:cNvSpPr>
-            <a:spLocks noGrp="1"/>
-          </p:cNvSpPr>
-          <p:nvPr>
-            <p:ph type="title"/>
-          </p:nvPr>
-        </p:nvSpPr>
-        <p:spPr/>
-        <p:txBody>
-          <a:bodyPr/>
-          <a:lstStyle/>
-          <a:p>
-            <a:r>
-              <a:rPr lang="en-US" dirty="0" err="1" smtClean="0"/>
-              <a:t>Microservice</a:t>
-            </a:r>
-            <a:r>
-              <a:rPr lang="en-US" dirty="0" smtClean="0"/>
-              <a:t> Costs</a:t>
-            </a:r>
-            <a:endParaRPr lang="en-US" dirty="0"/>
-          </a:p>
-        </p:txBody>
-      </p:sp>
-      <p:sp>
-        <p:nvSpPr>
-          <p:cNvPr id="3" name="Content Placeholder 2"/>
-          <p:cNvSpPr>
-            <a:spLocks noGrp="1"/>
-          </p:cNvSpPr>
-          <p:nvPr>
-            <p:ph idx="1"/>
-          </p:nvPr>
-        </p:nvSpPr>
-        <p:spPr/>
-        <p:txBody>
-          <a:bodyPr/>
-          <a:lstStyle/>
-          <a:p>
-            <a:r>
-              <a:rPr lang="en-US" sz="2600" i="1" dirty="0" smtClean="0">
-                <a:solidFill>
-                  <a:srgbClr val="C00000"/>
-                </a:solidFill>
-              </a:rPr>
-              <a:t>Distribution</a:t>
-            </a:r>
-            <a:r>
-              <a:rPr lang="en-US" sz="2600" dirty="0" smtClean="0"/>
-              <a:t>: Distributed systems are harder to program, since remote calls are slow and are always at risk of failure.</a:t>
-            </a:r>
-          </a:p>
-          <a:p>
-            <a:r>
-              <a:rPr lang="en-US" sz="2600" i="1" dirty="0" smtClean="0">
-                <a:solidFill>
-                  <a:srgbClr val="C00000"/>
-                </a:solidFill>
-              </a:rPr>
-              <a:t>Eventual Consistency</a:t>
-            </a:r>
-            <a:r>
-              <a:rPr lang="en-US" sz="2600" dirty="0" smtClean="0"/>
-              <a:t>: Maintaining </a:t>
-            </a:r>
-            <a:r>
-              <a:rPr lang="en-US" sz="2600" u="sng" dirty="0" smtClean="0"/>
-              <a:t>strong consistency is extremely difficult</a:t>
-            </a:r>
-            <a:r>
-              <a:rPr lang="en-US" sz="2600" dirty="0" smtClean="0"/>
-              <a:t> for a distributed system, which means everyone has to manage eventual consistency.</a:t>
-            </a:r>
-          </a:p>
-          <a:p>
-            <a:r>
-              <a:rPr lang="en-US" sz="2600" i="1" dirty="0" smtClean="0">
-                <a:solidFill>
-                  <a:srgbClr val="C00000"/>
-                </a:solidFill>
-              </a:rPr>
-              <a:t>Operational Complexity</a:t>
-            </a:r>
-            <a:r>
-              <a:rPr lang="en-US" sz="2600" dirty="0" smtClean="0"/>
-              <a:t>: You need a mature operations team to manage lots of services, which are being redeployed regularly.</a:t>
-            </a:r>
-          </a:p>
-        </p:txBody>
-      </p:sp>
-    </p:spTree>
-  </p:cSld>
-  <p:clrMapOvr>
-    <a:masterClrMapping/>
-  </p:clrMapOvr>
-</p:sld>
-</file>
-
-<file path=ppt/slides/slide25.xml><?xml version="1.0" encoding="utf-8"?>
-<p:sld xmlns:a="http://schemas.openxmlformats.org/drawingml/2006/main" xmlns:r="http://schemas.openxmlformats.org/officeDocument/2006/relationships" xmlns:p="http://schemas.openxmlformats.org/presentationml/2006/main">
-  <p:cSld>
-    <p:spTree>
-      <p:nvGrpSpPr>
-        <p:cNvPr id="1" name=""/>
-        <p:cNvGrpSpPr/>
-        <p:nvPr/>
-      </p:nvGrpSpPr>
-      <p:grpSpPr>
-        <a:xfrm>
-          <a:off x="0" y="0"/>
-          <a:ext cx="0" cy="0"/>
-          <a:chOff x="0" y="0"/>
-          <a:chExt cx="0" cy="0"/>
-        </a:xfrm>
-      </p:grpSpPr>
-      <p:sp>
-        <p:nvSpPr>
-          <p:cNvPr id="2" name="Title 1"/>
-          <p:cNvSpPr>
-            <a:spLocks noGrp="1"/>
-          </p:cNvSpPr>
-          <p:nvPr>
-            <p:ph type="title"/>
-          </p:nvPr>
-        </p:nvSpPr>
-        <p:spPr/>
-        <p:txBody>
-          <a:bodyPr/>
-          <a:lstStyle/>
-          <a:p>
-            <a:r>
-              <a:rPr lang="en-US" dirty="0" smtClean="0"/>
-              <a:t>When to Use </a:t>
-            </a:r>
-            <a:r>
-              <a:rPr lang="en-US" dirty="0" err="1" smtClean="0"/>
-              <a:t>Microservices</a:t>
-            </a:r>
-            <a:endParaRPr lang="en-US" dirty="0"/>
-          </a:p>
-        </p:txBody>
-      </p:sp>
-      <p:sp>
-        <p:nvSpPr>
-          <p:cNvPr id="3" name="Content Placeholder 2"/>
-          <p:cNvSpPr>
-            <a:spLocks noGrp="1"/>
-          </p:cNvSpPr>
-          <p:nvPr>
-            <p:ph idx="1"/>
-          </p:nvPr>
-        </p:nvSpPr>
-        <p:spPr/>
-        <p:txBody>
-          <a:bodyPr/>
-          <a:lstStyle/>
-          <a:p>
-            <a:r>
-              <a:rPr lang="en-US" sz="2200" dirty="0" smtClean="0">
-                <a:hlinkClick r:id="rId2"/>
-              </a:rPr>
-              <a:t>https://martinfowler.com/bliki/MicroservicePremium.html</a:t>
-            </a:r>
-            <a:endParaRPr lang="en-US" sz="2200" dirty="0" smtClean="0"/>
-          </a:p>
-          <a:p>
-            <a:r>
-              <a:rPr lang="en-US" sz="2200" i="1" dirty="0" smtClean="0">
-                <a:solidFill>
-                  <a:srgbClr val="C00000"/>
-                </a:solidFill>
-              </a:rPr>
-              <a:t>Is a </a:t>
-            </a:r>
-            <a:r>
-              <a:rPr lang="en-US" sz="2200" i="1" dirty="0" err="1" smtClean="0">
-                <a:solidFill>
-                  <a:srgbClr val="C00000"/>
-                </a:solidFill>
-              </a:rPr>
-              <a:t>microservice</a:t>
-            </a:r>
-            <a:r>
-              <a:rPr lang="en-US" sz="2200" i="1" dirty="0" smtClean="0">
-                <a:solidFill>
-                  <a:srgbClr val="C00000"/>
-                </a:solidFill>
-              </a:rPr>
-              <a:t> architecture a good choice for the system you're working on?</a:t>
-            </a:r>
-          </a:p>
-          <a:p>
-            <a:r>
-              <a:rPr lang="en-US" sz="2200" b="1" dirty="0" smtClean="0"/>
-              <a:t>don't even consider </a:t>
-            </a:r>
-            <a:r>
-              <a:rPr lang="en-US" sz="2200" b="1" dirty="0" err="1" smtClean="0"/>
-              <a:t>microservices</a:t>
-            </a:r>
-            <a:r>
-              <a:rPr lang="en-US" sz="2200" b="1" dirty="0" smtClean="0"/>
-              <a:t> unless you have a system that's </a:t>
-            </a:r>
-            <a:r>
-              <a:rPr lang="en-US" sz="2200" b="1" u="sng" dirty="0" smtClean="0"/>
-              <a:t>too complex to manage as a monolith</a:t>
-            </a:r>
-            <a:r>
-              <a:rPr lang="en-US" sz="2200" dirty="0" smtClean="0"/>
-              <a:t>.</a:t>
-            </a:r>
-          </a:p>
-          <a:p>
-            <a:r>
-              <a:rPr lang="en-US" sz="2200" dirty="0" smtClean="0">
-                <a:hlinkClick r:id="rId3"/>
-              </a:rPr>
-              <a:t>https://martinfowler.com/bliki/MonolithFirst.html</a:t>
-            </a:r>
-            <a:endParaRPr lang="en-US" sz="2200" dirty="0" smtClean="0"/>
-          </a:p>
-          <a:p>
-            <a:r>
-              <a:rPr lang="en-US" sz="2200" dirty="0" smtClean="0"/>
-              <a:t>The complexity that drives us to </a:t>
-            </a:r>
-            <a:r>
-              <a:rPr lang="en-US" sz="2200" dirty="0" err="1" smtClean="0"/>
-              <a:t>microservices</a:t>
-            </a:r>
-            <a:r>
-              <a:rPr lang="en-US" sz="2200" dirty="0" smtClean="0"/>
-              <a:t> can come from many sources including dealing with large teams, multi-tenancy, supporting many user interaction models, allowing different business functions to evolve independently, and scaling.</a:t>
-            </a:r>
-          </a:p>
-          <a:p>
-            <a:r>
-              <a:rPr lang="en-US" sz="2200" dirty="0" smtClean="0"/>
-              <a:t>But the biggest factor is that of sheer size - people finding they have a monolith that's </a:t>
-            </a:r>
-            <a:r>
-              <a:rPr lang="en-US" sz="2200" i="1" dirty="0" smtClean="0">
-                <a:solidFill>
-                  <a:srgbClr val="C00000"/>
-                </a:solidFill>
-              </a:rPr>
-              <a:t>too big to modify and deploy</a:t>
-            </a:r>
-            <a:r>
-              <a:rPr lang="en-US" sz="2200" dirty="0" smtClean="0"/>
-              <a:t>.</a:t>
-            </a:r>
-          </a:p>
-        </p:txBody>
-      </p:sp>
-    </p:spTree>
-  </p:cSld>
-  <p:clrMapOvr>
-    <a:masterClrMapping/>
-  </p:clrMapOvr>
-</p:sld>
-</file>
-
-<file path=ppt/slides/slide26.xml><?xml version="1.0" encoding="utf-8"?>
-<p:sld xmlns:a="http://schemas.openxmlformats.org/drawingml/2006/main" xmlns:r="http://schemas.openxmlformats.org/officeDocument/2006/relationships" xmlns:p="http://schemas.openxmlformats.org/presentationml/2006/main">
-  <p:cSld>
-    <p:spTree>
-      <p:nvGrpSpPr>
-        <p:cNvPr id="1" name=""/>
-        <p:cNvGrpSpPr/>
-        <p:nvPr/>
-      </p:nvGrpSpPr>
-      <p:grpSpPr>
-        <a:xfrm>
-          <a:off x="0" y="0"/>
-          <a:ext cx="0" cy="0"/>
-          <a:chOff x="0" y="0"/>
-          <a:chExt cx="0" cy="0"/>
-        </a:xfrm>
-      </p:grpSpPr>
-      <p:sp>
-        <p:nvSpPr>
-          <p:cNvPr id="2" name="Title 1"/>
-          <p:cNvSpPr>
-            <a:spLocks noGrp="1"/>
-          </p:cNvSpPr>
-          <p:nvPr>
-            <p:ph type="title"/>
-          </p:nvPr>
-        </p:nvSpPr>
-        <p:spPr/>
-        <p:txBody>
-          <a:bodyPr/>
-          <a:lstStyle/>
-          <a:p>
-            <a:r>
-              <a:rPr lang="en-US" dirty="0" smtClean="0"/>
-              <a:t>When Not to Use </a:t>
-            </a:r>
-            <a:r>
-              <a:rPr lang="en-US" dirty="0" err="1" smtClean="0"/>
-              <a:t>Microservices</a:t>
-            </a:r>
-            <a:endParaRPr lang="en-US" dirty="0"/>
-          </a:p>
-        </p:txBody>
-      </p:sp>
-      <p:sp>
-        <p:nvSpPr>
-          <p:cNvPr id="3" name="Content Placeholder 2"/>
-          <p:cNvSpPr>
-            <a:spLocks noGrp="1"/>
-          </p:cNvSpPr>
-          <p:nvPr>
-            <p:ph idx="1"/>
-          </p:nvPr>
-        </p:nvSpPr>
-        <p:spPr/>
-        <p:txBody>
-          <a:bodyPr/>
-          <a:lstStyle/>
-          <a:p>
-            <a:r>
-              <a:rPr lang="en-US" sz="2000" dirty="0" smtClean="0">
-                <a:hlinkClick r:id="rId2"/>
-              </a:rPr>
-              <a:t>https://martinfowler.com/bliki/MicroservicePremium.html</a:t>
-            </a:r>
-            <a:endParaRPr lang="en-US" sz="2000" dirty="0" smtClean="0"/>
-          </a:p>
-          <a:p>
-            <a:r>
-              <a:rPr lang="en-US" sz="2000" dirty="0" smtClean="0"/>
-              <a:t>The </a:t>
-            </a:r>
-            <a:r>
-              <a:rPr lang="en-US" sz="2000" dirty="0" err="1" smtClean="0"/>
-              <a:t>microservices</a:t>
-            </a:r>
-            <a:r>
-              <a:rPr lang="en-US" sz="2000" dirty="0" smtClean="0"/>
-              <a:t> approach is all about handling a complex system, but in order to do so the approach introduces </a:t>
-            </a:r>
-            <a:r>
-              <a:rPr lang="en-US" sz="2000" i="1" dirty="0" smtClean="0">
-                <a:solidFill>
-                  <a:srgbClr val="C00000"/>
-                </a:solidFill>
-              </a:rPr>
-              <a:t>its own set of complexities</a:t>
-            </a:r>
-            <a:r>
-              <a:rPr lang="en-US" sz="2000" dirty="0" smtClean="0"/>
-              <a:t>.</a:t>
-            </a:r>
-          </a:p>
-          <a:p>
-            <a:r>
-              <a:rPr lang="en-US" sz="2000" dirty="0" smtClean="0"/>
-              <a:t>When you use </a:t>
-            </a:r>
-            <a:r>
-              <a:rPr lang="en-US" sz="2000" dirty="0" err="1" smtClean="0"/>
-              <a:t>microservices</a:t>
-            </a:r>
-            <a:r>
-              <a:rPr lang="en-US" sz="2000" dirty="0" smtClean="0"/>
-              <a:t> you have to work on automated deployment, monitoring, dealing with failure, eventual consistency, and other factors that a distributed system introduces. There are well-known ways to cope with all this, but it's </a:t>
-            </a:r>
-            <a:r>
-              <a:rPr lang="en-US" sz="2000" i="1" dirty="0" smtClean="0">
-                <a:solidFill>
-                  <a:srgbClr val="C00000"/>
-                </a:solidFill>
-              </a:rPr>
-              <a:t>extra effort</a:t>
-            </a:r>
-            <a:r>
-              <a:rPr lang="en-US" sz="2000" dirty="0" smtClean="0"/>
-              <a:t>.</a:t>
-            </a:r>
-          </a:p>
-          <a:p>
-            <a:r>
-              <a:rPr lang="en-US" sz="2000" dirty="0" smtClean="0">
-                <a:hlinkClick r:id="rId3"/>
-              </a:rPr>
-              <a:t>https://martinfowler.com/bliki/MonolithFirst.html</a:t>
-            </a:r>
-          </a:p>
-          <a:p>
-            <a:r>
-              <a:rPr lang="en-US" sz="2000" dirty="0" smtClean="0"/>
-              <a:t>The first reason for this is classic </a:t>
-            </a:r>
-            <a:r>
-              <a:rPr lang="en-US" sz="2000" i="1" dirty="0" err="1" smtClean="0">
-                <a:solidFill>
-                  <a:srgbClr val="C00000"/>
-                </a:solidFill>
-              </a:rPr>
-              <a:t>Yagni</a:t>
-            </a:r>
-            <a:r>
-              <a:rPr lang="en-US" sz="2000" dirty="0" smtClean="0"/>
-              <a:t>.</a:t>
-            </a:r>
-          </a:p>
-          <a:p>
-            <a:r>
-              <a:rPr lang="en-US" sz="2000" dirty="0" smtClean="0"/>
-              <a:t>The second issue with starting with </a:t>
-            </a:r>
-            <a:r>
-              <a:rPr lang="en-US" sz="2000" dirty="0" err="1" smtClean="0"/>
-              <a:t>microservices</a:t>
-            </a:r>
-            <a:r>
-              <a:rPr lang="en-US" sz="2000" dirty="0" smtClean="0"/>
-              <a:t> is that they only work well if you come up with good, </a:t>
-            </a:r>
-            <a:r>
-              <a:rPr lang="en-US" sz="2000" i="1" dirty="0" smtClean="0">
-                <a:solidFill>
-                  <a:srgbClr val="C00000"/>
-                </a:solidFill>
-              </a:rPr>
-              <a:t>stable boundaries between the services</a:t>
-            </a:r>
-            <a:r>
-              <a:rPr lang="en-US" sz="2000" dirty="0" smtClean="0"/>
-              <a:t>.</a:t>
-            </a:r>
-          </a:p>
-          <a:p>
-            <a:r>
-              <a:rPr lang="en-US" sz="2000" dirty="0" smtClean="0"/>
-              <a:t>Any refactoring of functionality between services is much harder than it is in a monolith. But even experienced architects working in familiar domains have great difficulty getting boundaries right at the beginning.</a:t>
-            </a:r>
-          </a:p>
-        </p:txBody>
-      </p:sp>
-    </p:spTree>
-  </p:cSld>
-  <p:clrMapOvr>
-    <a:masterClrMapping/>
-  </p:clrMapOvr>
-</p:sld>
-</file>
-
-<file path=ppt/slides/slide27.xml><?xml version="1.0" encoding="utf-8"?>
 <p:sld xmlns:a="http://schemas.openxmlformats.org/drawingml/2006/main" xmlns:r="http://schemas.openxmlformats.org/officeDocument/2006/relationships" xmlns:p="http://schemas.openxmlformats.org/presentationml/2006/main">
   <p:cSld>
     <p:spTree>
@@ -6651,6 +5725,934 @@
 </p:sld>
 </file>
 
+<file path=ppt/slides/slide22.xml><?xml version="1.0" encoding="utf-8"?>
+<p:sld xmlns:a="http://schemas.openxmlformats.org/drawingml/2006/main" xmlns:r="http://schemas.openxmlformats.org/officeDocument/2006/relationships" xmlns:p="http://schemas.openxmlformats.org/presentationml/2006/main">
+  <p:cSld>
+    <p:spTree>
+      <p:nvGrpSpPr>
+        <p:cNvPr id="1" name=""/>
+        <p:cNvGrpSpPr/>
+        <p:nvPr/>
+      </p:nvGrpSpPr>
+      <p:grpSpPr>
+        <a:xfrm>
+          <a:off x="0" y="0"/>
+          <a:ext cx="0" cy="0"/>
+          <a:chOff x="0" y="0"/>
+          <a:chExt cx="0" cy="0"/>
+        </a:xfrm>
+      </p:grpSpPr>
+      <p:sp>
+        <p:nvSpPr>
+          <p:cNvPr id="2" name="Title 1"/>
+          <p:cNvSpPr>
+            <a:spLocks noGrp="1"/>
+          </p:cNvSpPr>
+          <p:nvPr>
+            <p:ph type="title"/>
+          </p:nvPr>
+        </p:nvSpPr>
+        <p:spPr/>
+        <p:txBody>
+          <a:bodyPr/>
+          <a:lstStyle/>
+          <a:p>
+            <a:r>
+              <a:rPr lang="en-US" dirty="0" err="1" smtClean="0"/>
+              <a:t>Microservices</a:t>
+            </a:r>
+            <a:r>
+              <a:rPr lang="en-US" dirty="0" smtClean="0"/>
+              <a:t> Origin</a:t>
+            </a:r>
+            <a:endParaRPr lang="en-US" dirty="0"/>
+          </a:p>
+        </p:txBody>
+      </p:sp>
+      <p:sp>
+        <p:nvSpPr>
+          <p:cNvPr id="3" name="Content Placeholder 2"/>
+          <p:cNvSpPr>
+            <a:spLocks noGrp="1"/>
+          </p:cNvSpPr>
+          <p:nvPr>
+            <p:ph idx="1"/>
+          </p:nvPr>
+        </p:nvSpPr>
+        <p:spPr/>
+        <p:txBody>
+          <a:bodyPr/>
+          <a:lstStyle/>
+          <a:p>
+            <a:r>
+              <a:rPr lang="en-US" sz="2400" dirty="0" smtClean="0"/>
+              <a:t>Domain-driven design. Continuous delivery. On-demand virtualization. Infrastructure automation. Small autonomous teams. Systems at scale.</a:t>
+            </a:r>
+          </a:p>
+          <a:p>
+            <a:r>
+              <a:rPr lang="en-US" sz="2400" dirty="0" err="1" smtClean="0"/>
+              <a:t>Microservices</a:t>
+            </a:r>
+            <a:r>
+              <a:rPr lang="en-US" sz="2400" dirty="0" smtClean="0"/>
+              <a:t> have </a:t>
+            </a:r>
+            <a:r>
+              <a:rPr lang="en-US" sz="2400" i="1" dirty="0" smtClean="0">
+                <a:solidFill>
+                  <a:srgbClr val="C00000"/>
+                </a:solidFill>
+              </a:rPr>
+              <a:t>emerged</a:t>
+            </a:r>
+            <a:r>
+              <a:rPr lang="en-US" sz="2400" dirty="0" smtClean="0"/>
+              <a:t> from this world.</a:t>
+            </a:r>
+          </a:p>
+          <a:p>
+            <a:r>
+              <a:rPr lang="en-US" sz="2400" dirty="0" smtClean="0"/>
+              <a:t>They weren’t invented or described before the fact; they emerged as a trend, or a pattern, </a:t>
+            </a:r>
+            <a:r>
+              <a:rPr lang="en-US" sz="2400" i="1" dirty="0" smtClean="0">
+                <a:solidFill>
+                  <a:srgbClr val="C00000"/>
+                </a:solidFill>
+              </a:rPr>
+              <a:t>from real-world use</a:t>
+            </a:r>
+            <a:r>
+              <a:rPr lang="en-US" sz="2400" dirty="0" smtClean="0"/>
+              <a:t>.</a:t>
+            </a:r>
+          </a:p>
+        </p:txBody>
+      </p:sp>
+    </p:spTree>
+  </p:cSld>
+  <p:clrMapOvr>
+    <a:masterClrMapping/>
+  </p:clrMapOvr>
+</p:sld>
+</file>
+
+<file path=ppt/slides/slide23.xml><?xml version="1.0" encoding="utf-8"?>
+<p:sld xmlns:a="http://schemas.openxmlformats.org/drawingml/2006/main" xmlns:r="http://schemas.openxmlformats.org/officeDocument/2006/relationships" xmlns:p="http://schemas.openxmlformats.org/presentationml/2006/main">
+  <p:cSld>
+    <p:spTree>
+      <p:nvGrpSpPr>
+        <p:cNvPr id="1" name=""/>
+        <p:cNvGrpSpPr/>
+        <p:nvPr/>
+      </p:nvGrpSpPr>
+      <p:grpSpPr>
+        <a:xfrm>
+          <a:off x="0" y="0"/>
+          <a:ext cx="0" cy="0"/>
+          <a:chOff x="0" y="0"/>
+          <a:chExt cx="0" cy="0"/>
+        </a:xfrm>
+      </p:grpSpPr>
+      <p:sp>
+        <p:nvSpPr>
+          <p:cNvPr id="2" name="Title 1"/>
+          <p:cNvSpPr>
+            <a:spLocks noGrp="1"/>
+          </p:cNvSpPr>
+          <p:nvPr>
+            <p:ph type="title"/>
+          </p:nvPr>
+        </p:nvSpPr>
+        <p:spPr/>
+        <p:txBody>
+          <a:bodyPr/>
+          <a:lstStyle/>
+          <a:p>
+            <a:r>
+              <a:rPr lang="en-US" dirty="0" smtClean="0"/>
+              <a:t>Why </a:t>
+            </a:r>
+            <a:r>
+              <a:rPr lang="en-US" dirty="0" err="1" smtClean="0"/>
+              <a:t>Microservices</a:t>
+            </a:r>
+            <a:r>
+              <a:rPr lang="en-US" dirty="0" smtClean="0"/>
+              <a:t>?</a:t>
+            </a:r>
+            <a:endParaRPr lang="en-US" dirty="0"/>
+          </a:p>
+        </p:txBody>
+      </p:sp>
+      <p:sp>
+        <p:nvSpPr>
+          <p:cNvPr id="3" name="Content Placeholder 2"/>
+          <p:cNvSpPr>
+            <a:spLocks noGrp="1"/>
+          </p:cNvSpPr>
+          <p:nvPr>
+            <p:ph idx="1"/>
+          </p:nvPr>
+        </p:nvSpPr>
+        <p:spPr/>
+        <p:txBody>
+          <a:bodyPr/>
+          <a:lstStyle/>
+          <a:p>
+            <a:r>
+              <a:rPr lang="en-US" sz="2200" dirty="0" smtClean="0">
+                <a:hlinkClick r:id="rId2"/>
+              </a:rPr>
+              <a:t>https://martinfowler.com/articles/microservice-trade-offs.html</a:t>
+            </a:r>
+            <a:endParaRPr lang="en-US" sz="2200" dirty="0" smtClean="0"/>
+          </a:p>
+          <a:p>
+            <a:r>
+              <a:rPr lang="en-US" sz="2200" i="1" dirty="0" smtClean="0">
+                <a:solidFill>
+                  <a:srgbClr val="C00000"/>
+                </a:solidFill>
+              </a:rPr>
+              <a:t>Strong Module Boundaries</a:t>
+            </a:r>
+            <a:r>
+              <a:rPr lang="en-US" sz="2200" dirty="0" smtClean="0"/>
+              <a:t>: </a:t>
+            </a:r>
+            <a:r>
+              <a:rPr lang="en-US" sz="2200" dirty="0" err="1" smtClean="0"/>
+              <a:t>Microservices</a:t>
+            </a:r>
+            <a:r>
+              <a:rPr lang="en-US" sz="2200" dirty="0" smtClean="0"/>
+              <a:t> reinforce modular structure, which is particularly important for larger teams.</a:t>
+            </a:r>
+          </a:p>
+          <a:p>
+            <a:r>
+              <a:rPr lang="en-US" sz="2200" i="1" dirty="0" smtClean="0">
+                <a:solidFill>
+                  <a:srgbClr val="C00000"/>
+                </a:solidFill>
+              </a:rPr>
+              <a:t>Independent Deployment</a:t>
+            </a:r>
+            <a:r>
+              <a:rPr lang="en-US" sz="2200" dirty="0" smtClean="0"/>
+              <a:t>: Simple services are easier to deploy, and since they are autonomous, are less likely to cause system failures when they go wrong.</a:t>
+            </a:r>
+          </a:p>
+          <a:p>
+            <a:r>
+              <a:rPr lang="en-US" sz="2200" i="1" dirty="0" smtClean="0">
+                <a:solidFill>
+                  <a:srgbClr val="C00000"/>
+                </a:solidFill>
+              </a:rPr>
+              <a:t>Technology Diversity</a:t>
+            </a:r>
+            <a:r>
+              <a:rPr lang="en-US" sz="2200" dirty="0" smtClean="0"/>
+              <a:t>: With </a:t>
+            </a:r>
+            <a:r>
+              <a:rPr lang="en-US" sz="2200" dirty="0" err="1" smtClean="0"/>
+              <a:t>microservices</a:t>
+            </a:r>
+            <a:r>
+              <a:rPr lang="en-US" sz="2200" dirty="0" smtClean="0"/>
+              <a:t> you can mix multiple languages, development frameworks and data-storage technologies.</a:t>
+            </a:r>
+          </a:p>
+        </p:txBody>
+      </p:sp>
+    </p:spTree>
+  </p:cSld>
+  <p:clrMapOvr>
+    <a:masterClrMapping/>
+  </p:clrMapOvr>
+</p:sld>
+</file>
+
+<file path=ppt/slides/slide24.xml><?xml version="1.0" encoding="utf-8"?>
+<p:sld xmlns:a="http://schemas.openxmlformats.org/drawingml/2006/main" xmlns:r="http://schemas.openxmlformats.org/officeDocument/2006/relationships" xmlns:p="http://schemas.openxmlformats.org/presentationml/2006/main">
+  <p:cSld>
+    <p:spTree>
+      <p:nvGrpSpPr>
+        <p:cNvPr id="1" name=""/>
+        <p:cNvGrpSpPr/>
+        <p:nvPr/>
+      </p:nvGrpSpPr>
+      <p:grpSpPr>
+        <a:xfrm>
+          <a:off x="0" y="0"/>
+          <a:ext cx="0" cy="0"/>
+          <a:chOff x="0" y="0"/>
+          <a:chExt cx="0" cy="0"/>
+        </a:xfrm>
+      </p:grpSpPr>
+      <p:sp>
+        <p:nvSpPr>
+          <p:cNvPr id="2" name="Title 1"/>
+          <p:cNvSpPr>
+            <a:spLocks noGrp="1"/>
+          </p:cNvSpPr>
+          <p:nvPr>
+            <p:ph type="title"/>
+          </p:nvPr>
+        </p:nvSpPr>
+        <p:spPr/>
+        <p:txBody>
+          <a:bodyPr/>
+          <a:lstStyle/>
+          <a:p>
+            <a:r>
+              <a:rPr lang="en-US" sz="4200" dirty="0" smtClean="0"/>
+              <a:t>Why </a:t>
+            </a:r>
+            <a:r>
+              <a:rPr lang="en-US" sz="4200" dirty="0" err="1" smtClean="0"/>
+              <a:t>Microservices</a:t>
+            </a:r>
+            <a:r>
+              <a:rPr lang="en-US" sz="4200" dirty="0" smtClean="0"/>
+              <a:t>? (My Opinion)</a:t>
+            </a:r>
+            <a:endParaRPr lang="en-US" sz="4200" dirty="0"/>
+          </a:p>
+        </p:txBody>
+      </p:sp>
+      <p:sp>
+        <p:nvSpPr>
+          <p:cNvPr id="3" name="Content Placeholder 2"/>
+          <p:cNvSpPr>
+            <a:spLocks noGrp="1"/>
+          </p:cNvSpPr>
+          <p:nvPr>
+            <p:ph idx="1"/>
+          </p:nvPr>
+        </p:nvSpPr>
+        <p:spPr/>
+        <p:txBody>
+          <a:bodyPr/>
+          <a:lstStyle/>
+          <a:p>
+            <a:r>
+              <a:rPr lang="en-US" sz="1800" b="1" dirty="0" smtClean="0"/>
+              <a:t>Reason 1</a:t>
+            </a:r>
+            <a:r>
+              <a:rPr lang="en-US" sz="1800" dirty="0" smtClean="0"/>
+              <a:t>: You want to have several </a:t>
+            </a:r>
+            <a:r>
+              <a:rPr lang="en-US" sz="1800" b="1" dirty="0" smtClean="0"/>
+              <a:t>independent development teams</a:t>
+            </a:r>
+            <a:r>
+              <a:rPr lang="en-US" sz="1800" dirty="0" smtClean="0"/>
+              <a:t>.</a:t>
+            </a:r>
+          </a:p>
+          <a:p>
+            <a:r>
+              <a:rPr lang="en-US" sz="1800" b="1" dirty="0" smtClean="0"/>
+              <a:t>Reason 2</a:t>
+            </a:r>
+            <a:r>
+              <a:rPr lang="en-US" sz="1800" dirty="0" smtClean="0"/>
+              <a:t>: You want or your client wants to have </a:t>
+            </a:r>
+            <a:r>
+              <a:rPr lang="en-US" sz="1800" b="1" dirty="0" smtClean="0"/>
+              <a:t>a faster and modern UI (i.e. SPA)</a:t>
+            </a:r>
+            <a:r>
+              <a:rPr lang="en-US" sz="1800" dirty="0" smtClean="0"/>
+              <a:t> that is </a:t>
+            </a:r>
+            <a:r>
+              <a:rPr lang="en-US" sz="1800" u="sng" dirty="0" smtClean="0"/>
+              <a:t>totally decoupled</a:t>
+            </a:r>
+            <a:r>
+              <a:rPr lang="en-US" sz="1800" dirty="0" smtClean="0"/>
+              <a:t> from the other parts of the system.</a:t>
+            </a:r>
+          </a:p>
+          <a:p>
+            <a:r>
+              <a:rPr lang="en-US" sz="1800" b="1" dirty="0" smtClean="0"/>
+              <a:t>Reason 3</a:t>
+            </a:r>
+            <a:r>
+              <a:rPr lang="en-US" sz="1800" dirty="0" smtClean="0"/>
+              <a:t>: You want or your client wants that a part of your system (e.g. user store and authentication) can be </a:t>
+            </a:r>
+            <a:r>
+              <a:rPr lang="en-US" sz="1800" b="1" dirty="0" smtClean="0"/>
+              <a:t>shared among or reused by multiple different systems</a:t>
+            </a:r>
+            <a:r>
+              <a:rPr lang="en-US" sz="1800" dirty="0" smtClean="0"/>
+              <a:t>.</a:t>
+            </a:r>
+          </a:p>
+          <a:p>
+            <a:r>
+              <a:rPr lang="en-US" sz="1800" b="1" dirty="0" smtClean="0"/>
+              <a:t>Reason 4</a:t>
+            </a:r>
+            <a:r>
+              <a:rPr lang="en-US" sz="1800" dirty="0" smtClean="0"/>
+              <a:t>: You want or your client wants your system to be able to </a:t>
+            </a:r>
+            <a:r>
+              <a:rPr lang="en-US" sz="1800" b="1" dirty="0" smtClean="0"/>
+              <a:t>scale out easily </a:t>
+            </a:r>
+            <a:r>
+              <a:rPr lang="en-US" sz="1800" b="1" i="1" dirty="0" smtClean="0"/>
+              <a:t>later</a:t>
+            </a:r>
+            <a:r>
+              <a:rPr lang="en-US" sz="1800" dirty="0" smtClean="0"/>
+              <a:t>.</a:t>
+            </a:r>
+          </a:p>
+          <a:p>
+            <a:r>
+              <a:rPr lang="en-US" sz="1800" b="1" dirty="0" smtClean="0"/>
+              <a:t>Reason 5</a:t>
+            </a:r>
+            <a:r>
+              <a:rPr lang="en-US" sz="1800" dirty="0" smtClean="0"/>
+              <a:t>: You want or your client wants that some parts of your system can </a:t>
+            </a:r>
+            <a:r>
+              <a:rPr lang="en-US" sz="1800" b="1" dirty="0" smtClean="0"/>
+              <a:t>be revised or extended or replaced easily </a:t>
+            </a:r>
+            <a:r>
+              <a:rPr lang="en-US" sz="1800" b="1" i="1" dirty="0" smtClean="0"/>
+              <a:t>later</a:t>
+            </a:r>
+            <a:r>
+              <a:rPr lang="en-US" sz="1800" dirty="0" smtClean="0"/>
+              <a:t>.</a:t>
+            </a:r>
+          </a:p>
+        </p:txBody>
+      </p:sp>
+      <p:pic>
+        <p:nvPicPr>
+          <p:cNvPr id="4" name="Picture 4" descr="https://miro.medium.com/max/4000/0*eO07yV9XbK95zYKj.jpg"/>
+          <p:cNvPicPr>
+            <a:picLocks noChangeAspect="1" noChangeArrowheads="1"/>
+          </p:cNvPicPr>
+          <p:nvPr/>
+        </p:nvPicPr>
+        <p:blipFill>
+          <a:blip r:embed="rId2" cstate="print"/>
+          <a:srcRect/>
+          <a:stretch>
+            <a:fillRect/>
+          </a:stretch>
+        </p:blipFill>
+        <p:spPr bwMode="auto">
+          <a:xfrm>
+            <a:off x="3505200" y="4748645"/>
+            <a:ext cx="2208276" cy="1652155"/>
+          </a:xfrm>
+          <a:prstGeom prst="rect">
+            <a:avLst/>
+          </a:prstGeom>
+          <a:noFill/>
+        </p:spPr>
+      </p:pic>
+    </p:spTree>
+  </p:cSld>
+  <p:clrMapOvr>
+    <a:masterClrMapping/>
+  </p:clrMapOvr>
+</p:sld>
+</file>
+
+<file path=ppt/slides/slide25.xml><?xml version="1.0" encoding="utf-8"?>
+<p:sld xmlns:a="http://schemas.openxmlformats.org/drawingml/2006/main" xmlns:r="http://schemas.openxmlformats.org/officeDocument/2006/relationships" xmlns:p="http://schemas.openxmlformats.org/presentationml/2006/main">
+  <p:cSld>
+    <p:spTree>
+      <p:nvGrpSpPr>
+        <p:cNvPr id="1" name=""/>
+        <p:cNvGrpSpPr/>
+        <p:nvPr/>
+      </p:nvGrpSpPr>
+      <p:grpSpPr>
+        <a:xfrm>
+          <a:off x="0" y="0"/>
+          <a:ext cx="0" cy="0"/>
+          <a:chOff x="0" y="0"/>
+          <a:chExt cx="0" cy="0"/>
+        </a:xfrm>
+      </p:grpSpPr>
+      <p:sp>
+        <p:nvSpPr>
+          <p:cNvPr id="2" name="Title 1"/>
+          <p:cNvSpPr>
+            <a:spLocks noGrp="1"/>
+          </p:cNvSpPr>
+          <p:nvPr>
+            <p:ph type="title"/>
+          </p:nvPr>
+        </p:nvSpPr>
+        <p:spPr/>
+        <p:txBody>
+          <a:bodyPr/>
+          <a:lstStyle/>
+          <a:p>
+            <a:r>
+              <a:rPr lang="en-US" dirty="0" err="1" smtClean="0"/>
+              <a:t>Microservice</a:t>
+            </a:r>
+            <a:r>
+              <a:rPr lang="en-US" dirty="0" smtClean="0"/>
+              <a:t> Costs</a:t>
+            </a:r>
+            <a:endParaRPr lang="en-US" dirty="0"/>
+          </a:p>
+        </p:txBody>
+      </p:sp>
+      <p:sp>
+        <p:nvSpPr>
+          <p:cNvPr id="3" name="Content Placeholder 2"/>
+          <p:cNvSpPr>
+            <a:spLocks noGrp="1"/>
+          </p:cNvSpPr>
+          <p:nvPr>
+            <p:ph idx="1"/>
+          </p:nvPr>
+        </p:nvSpPr>
+        <p:spPr/>
+        <p:txBody>
+          <a:bodyPr/>
+          <a:lstStyle/>
+          <a:p>
+            <a:r>
+              <a:rPr lang="en-US" sz="2600" i="1" dirty="0" smtClean="0">
+                <a:solidFill>
+                  <a:srgbClr val="C00000"/>
+                </a:solidFill>
+              </a:rPr>
+              <a:t>Distribution</a:t>
+            </a:r>
+            <a:r>
+              <a:rPr lang="en-US" sz="2600" dirty="0" smtClean="0"/>
+              <a:t>: Distributed systems are harder to program, since remote calls are slow and are always at risk of failure.</a:t>
+            </a:r>
+          </a:p>
+          <a:p>
+            <a:r>
+              <a:rPr lang="en-US" sz="2600" i="1" dirty="0" smtClean="0">
+                <a:solidFill>
+                  <a:srgbClr val="C00000"/>
+                </a:solidFill>
+              </a:rPr>
+              <a:t>Eventual Consistency</a:t>
+            </a:r>
+            <a:r>
+              <a:rPr lang="en-US" sz="2600" dirty="0" smtClean="0"/>
+              <a:t>: Maintaining </a:t>
+            </a:r>
+            <a:r>
+              <a:rPr lang="en-US" sz="2600" u="sng" dirty="0" smtClean="0"/>
+              <a:t>strong consistency is extremely difficult</a:t>
+            </a:r>
+            <a:r>
+              <a:rPr lang="en-US" sz="2600" dirty="0" smtClean="0"/>
+              <a:t> for a distributed system, which means everyone has to manage eventual consistency.</a:t>
+            </a:r>
+          </a:p>
+          <a:p>
+            <a:r>
+              <a:rPr lang="en-US" sz="2600" i="1" dirty="0" smtClean="0">
+                <a:solidFill>
+                  <a:srgbClr val="C00000"/>
+                </a:solidFill>
+              </a:rPr>
+              <a:t>Operational Complexity</a:t>
+            </a:r>
+            <a:r>
+              <a:rPr lang="en-US" sz="2600" dirty="0" smtClean="0"/>
+              <a:t>: You need a mature operations team to manage lots of services, which are being redeployed regularly.</a:t>
+            </a:r>
+          </a:p>
+        </p:txBody>
+      </p:sp>
+    </p:spTree>
+  </p:cSld>
+  <p:clrMapOvr>
+    <a:masterClrMapping/>
+  </p:clrMapOvr>
+</p:sld>
+</file>
+
+<file path=ppt/slides/slide26.xml><?xml version="1.0" encoding="utf-8"?>
+<p:sld xmlns:a="http://schemas.openxmlformats.org/drawingml/2006/main" xmlns:r="http://schemas.openxmlformats.org/officeDocument/2006/relationships" xmlns:p="http://schemas.openxmlformats.org/presentationml/2006/main">
+  <p:cSld>
+    <p:spTree>
+      <p:nvGrpSpPr>
+        <p:cNvPr id="1" name=""/>
+        <p:cNvGrpSpPr/>
+        <p:nvPr/>
+      </p:nvGrpSpPr>
+      <p:grpSpPr>
+        <a:xfrm>
+          <a:off x="0" y="0"/>
+          <a:ext cx="0" cy="0"/>
+          <a:chOff x="0" y="0"/>
+          <a:chExt cx="0" cy="0"/>
+        </a:xfrm>
+      </p:grpSpPr>
+      <p:sp>
+        <p:nvSpPr>
+          <p:cNvPr id="2" name="Title 1"/>
+          <p:cNvSpPr>
+            <a:spLocks noGrp="1"/>
+          </p:cNvSpPr>
+          <p:nvPr>
+            <p:ph type="title"/>
+          </p:nvPr>
+        </p:nvSpPr>
+        <p:spPr/>
+        <p:txBody>
+          <a:bodyPr/>
+          <a:lstStyle/>
+          <a:p>
+            <a:r>
+              <a:rPr lang="en-US" dirty="0" smtClean="0"/>
+              <a:t>When to Use </a:t>
+            </a:r>
+            <a:r>
+              <a:rPr lang="en-US" dirty="0" err="1" smtClean="0"/>
+              <a:t>Microservices</a:t>
+            </a:r>
+            <a:endParaRPr lang="en-US" dirty="0"/>
+          </a:p>
+        </p:txBody>
+      </p:sp>
+      <p:sp>
+        <p:nvSpPr>
+          <p:cNvPr id="3" name="Content Placeholder 2"/>
+          <p:cNvSpPr>
+            <a:spLocks noGrp="1"/>
+          </p:cNvSpPr>
+          <p:nvPr>
+            <p:ph idx="1"/>
+          </p:nvPr>
+        </p:nvSpPr>
+        <p:spPr/>
+        <p:txBody>
+          <a:bodyPr/>
+          <a:lstStyle/>
+          <a:p>
+            <a:r>
+              <a:rPr lang="en-US" sz="2200" dirty="0" smtClean="0">
+                <a:hlinkClick r:id="rId2"/>
+              </a:rPr>
+              <a:t>https://martinfowler.com/bliki/MicroservicePremium.html</a:t>
+            </a:r>
+            <a:endParaRPr lang="en-US" sz="2200" dirty="0" smtClean="0"/>
+          </a:p>
+          <a:p>
+            <a:r>
+              <a:rPr lang="en-US" sz="2200" i="1" dirty="0" smtClean="0">
+                <a:solidFill>
+                  <a:srgbClr val="C00000"/>
+                </a:solidFill>
+              </a:rPr>
+              <a:t>Is a </a:t>
+            </a:r>
+            <a:r>
+              <a:rPr lang="en-US" sz="2200" i="1" dirty="0" err="1" smtClean="0">
+                <a:solidFill>
+                  <a:srgbClr val="C00000"/>
+                </a:solidFill>
+              </a:rPr>
+              <a:t>microservice</a:t>
+            </a:r>
+            <a:r>
+              <a:rPr lang="en-US" sz="2200" i="1" dirty="0" smtClean="0">
+                <a:solidFill>
+                  <a:srgbClr val="C00000"/>
+                </a:solidFill>
+              </a:rPr>
+              <a:t> architecture a good choice for the system you're working on?</a:t>
+            </a:r>
+          </a:p>
+          <a:p>
+            <a:r>
+              <a:rPr lang="en-US" sz="2200" b="1" dirty="0" smtClean="0"/>
+              <a:t>don't even consider </a:t>
+            </a:r>
+            <a:r>
+              <a:rPr lang="en-US" sz="2200" b="1" dirty="0" err="1" smtClean="0"/>
+              <a:t>microservices</a:t>
+            </a:r>
+            <a:r>
+              <a:rPr lang="en-US" sz="2200" b="1" dirty="0" smtClean="0"/>
+              <a:t> unless you have a system that's </a:t>
+            </a:r>
+            <a:r>
+              <a:rPr lang="en-US" sz="2200" b="1" u="sng" dirty="0" smtClean="0"/>
+              <a:t>too complex to manage as a monolith</a:t>
+            </a:r>
+            <a:r>
+              <a:rPr lang="en-US" sz="2200" dirty="0" smtClean="0"/>
+              <a:t>.</a:t>
+            </a:r>
+          </a:p>
+          <a:p>
+            <a:r>
+              <a:rPr lang="en-US" sz="2200" dirty="0" smtClean="0">
+                <a:hlinkClick r:id="rId3"/>
+              </a:rPr>
+              <a:t>https://martinfowler.com/bliki/MonolithFirst.html</a:t>
+            </a:r>
+            <a:endParaRPr lang="en-US" sz="2200" dirty="0" smtClean="0"/>
+          </a:p>
+          <a:p>
+            <a:r>
+              <a:rPr lang="en-US" sz="2200" dirty="0" smtClean="0"/>
+              <a:t>The complexity that drives us to </a:t>
+            </a:r>
+            <a:r>
+              <a:rPr lang="en-US" sz="2200" dirty="0" err="1" smtClean="0"/>
+              <a:t>microservices</a:t>
+            </a:r>
+            <a:r>
+              <a:rPr lang="en-US" sz="2200" dirty="0" smtClean="0"/>
+              <a:t> can come from many sources including dealing with large teams, multi-tenancy, supporting many user interaction models, allowing different business functions to evolve independently, and scaling.</a:t>
+            </a:r>
+          </a:p>
+          <a:p>
+            <a:r>
+              <a:rPr lang="en-US" sz="2200" dirty="0" smtClean="0"/>
+              <a:t>But the biggest factor is that of sheer size - people finding they have a monolith that's </a:t>
+            </a:r>
+            <a:r>
+              <a:rPr lang="en-US" sz="2200" i="1" dirty="0" smtClean="0">
+                <a:solidFill>
+                  <a:srgbClr val="C00000"/>
+                </a:solidFill>
+              </a:rPr>
+              <a:t>too big to modify and deploy</a:t>
+            </a:r>
+            <a:r>
+              <a:rPr lang="en-US" sz="2200" dirty="0" smtClean="0"/>
+              <a:t>.</a:t>
+            </a:r>
+          </a:p>
+        </p:txBody>
+      </p:sp>
+    </p:spTree>
+  </p:cSld>
+  <p:clrMapOvr>
+    <a:masterClrMapping/>
+  </p:clrMapOvr>
+</p:sld>
+</file>
+
+<file path=ppt/slides/slide27.xml><?xml version="1.0" encoding="utf-8"?>
+<p:sld xmlns:a="http://schemas.openxmlformats.org/drawingml/2006/main" xmlns:r="http://schemas.openxmlformats.org/officeDocument/2006/relationships" xmlns:p="http://schemas.openxmlformats.org/presentationml/2006/main">
+  <p:cSld>
+    <p:spTree>
+      <p:nvGrpSpPr>
+        <p:cNvPr id="1" name=""/>
+        <p:cNvGrpSpPr/>
+        <p:nvPr/>
+      </p:nvGrpSpPr>
+      <p:grpSpPr>
+        <a:xfrm>
+          <a:off x="0" y="0"/>
+          <a:ext cx="0" cy="0"/>
+          <a:chOff x="0" y="0"/>
+          <a:chExt cx="0" cy="0"/>
+        </a:xfrm>
+      </p:grpSpPr>
+      <p:sp>
+        <p:nvSpPr>
+          <p:cNvPr id="2" name="Title 1"/>
+          <p:cNvSpPr>
+            <a:spLocks noGrp="1"/>
+          </p:cNvSpPr>
+          <p:nvPr>
+            <p:ph type="title"/>
+          </p:nvPr>
+        </p:nvSpPr>
+        <p:spPr/>
+        <p:txBody>
+          <a:bodyPr/>
+          <a:lstStyle/>
+          <a:p>
+            <a:r>
+              <a:rPr lang="en-US" dirty="0" smtClean="0"/>
+              <a:t>When Not to Use </a:t>
+            </a:r>
+            <a:r>
+              <a:rPr lang="en-US" dirty="0" err="1" smtClean="0"/>
+              <a:t>Microservices</a:t>
+            </a:r>
+            <a:endParaRPr lang="en-US" dirty="0"/>
+          </a:p>
+        </p:txBody>
+      </p:sp>
+      <p:sp>
+        <p:nvSpPr>
+          <p:cNvPr id="3" name="Content Placeholder 2"/>
+          <p:cNvSpPr>
+            <a:spLocks noGrp="1"/>
+          </p:cNvSpPr>
+          <p:nvPr>
+            <p:ph idx="1"/>
+          </p:nvPr>
+        </p:nvSpPr>
+        <p:spPr/>
+        <p:txBody>
+          <a:bodyPr/>
+          <a:lstStyle/>
+          <a:p>
+            <a:r>
+              <a:rPr lang="en-US" sz="2000" dirty="0" smtClean="0">
+                <a:hlinkClick r:id="rId2"/>
+              </a:rPr>
+              <a:t>https://martinfowler.com/bliki/MicroservicePremium.html</a:t>
+            </a:r>
+            <a:endParaRPr lang="en-US" sz="2000" dirty="0" smtClean="0"/>
+          </a:p>
+          <a:p>
+            <a:r>
+              <a:rPr lang="en-US" sz="2000" dirty="0" smtClean="0"/>
+              <a:t>The </a:t>
+            </a:r>
+            <a:r>
+              <a:rPr lang="en-US" sz="2000" dirty="0" err="1" smtClean="0"/>
+              <a:t>microservices</a:t>
+            </a:r>
+            <a:r>
+              <a:rPr lang="en-US" sz="2000" dirty="0" smtClean="0"/>
+              <a:t> approach is all about handling a complex system, but in order to do so the approach introduces </a:t>
+            </a:r>
+            <a:r>
+              <a:rPr lang="en-US" sz="2000" i="1" dirty="0" smtClean="0">
+                <a:solidFill>
+                  <a:srgbClr val="C00000"/>
+                </a:solidFill>
+              </a:rPr>
+              <a:t>its own set of complexities</a:t>
+            </a:r>
+            <a:r>
+              <a:rPr lang="en-US" sz="2000" dirty="0" smtClean="0"/>
+              <a:t>.</a:t>
+            </a:r>
+          </a:p>
+          <a:p>
+            <a:r>
+              <a:rPr lang="en-US" sz="2000" dirty="0" smtClean="0"/>
+              <a:t>When you use </a:t>
+            </a:r>
+            <a:r>
+              <a:rPr lang="en-US" sz="2000" dirty="0" err="1" smtClean="0"/>
+              <a:t>microservices</a:t>
+            </a:r>
+            <a:r>
+              <a:rPr lang="en-US" sz="2000" dirty="0" smtClean="0"/>
+              <a:t> you have to work on automated deployment, monitoring, dealing with failure, eventual consistency, and other factors that a distributed system introduces. There are well-known ways to cope with all this, but it's </a:t>
+            </a:r>
+            <a:r>
+              <a:rPr lang="en-US" sz="2000" i="1" dirty="0" smtClean="0">
+                <a:solidFill>
+                  <a:srgbClr val="C00000"/>
+                </a:solidFill>
+              </a:rPr>
+              <a:t>extra effort</a:t>
+            </a:r>
+            <a:r>
+              <a:rPr lang="en-US" sz="2000" dirty="0" smtClean="0"/>
+              <a:t>.</a:t>
+            </a:r>
+          </a:p>
+          <a:p>
+            <a:r>
+              <a:rPr lang="en-US" sz="2000" dirty="0" smtClean="0">
+                <a:hlinkClick r:id="rId3"/>
+              </a:rPr>
+              <a:t>https://martinfowler.com/bliki/MonolithFirst.html</a:t>
+            </a:r>
+          </a:p>
+          <a:p>
+            <a:r>
+              <a:rPr lang="en-US" sz="2000" dirty="0" smtClean="0"/>
+              <a:t>The first reason for this is classic </a:t>
+            </a:r>
+            <a:r>
+              <a:rPr lang="en-US" sz="2000" i="1" dirty="0" err="1" smtClean="0">
+                <a:solidFill>
+                  <a:srgbClr val="C00000"/>
+                </a:solidFill>
+              </a:rPr>
+              <a:t>Yagni</a:t>
+            </a:r>
+            <a:r>
+              <a:rPr lang="en-US" sz="2000" dirty="0" smtClean="0"/>
+              <a:t>.</a:t>
+            </a:r>
+          </a:p>
+          <a:p>
+            <a:r>
+              <a:rPr lang="en-US" sz="2000" dirty="0" smtClean="0"/>
+              <a:t>The second issue with starting with </a:t>
+            </a:r>
+            <a:r>
+              <a:rPr lang="en-US" sz="2000" dirty="0" err="1" smtClean="0"/>
+              <a:t>microservices</a:t>
+            </a:r>
+            <a:r>
+              <a:rPr lang="en-US" sz="2000" dirty="0" smtClean="0"/>
+              <a:t> is that they only work well if you come up with good, </a:t>
+            </a:r>
+            <a:r>
+              <a:rPr lang="en-US" sz="2000" i="1" dirty="0" smtClean="0">
+                <a:solidFill>
+                  <a:srgbClr val="C00000"/>
+                </a:solidFill>
+              </a:rPr>
+              <a:t>stable boundaries between the services</a:t>
+            </a:r>
+            <a:r>
+              <a:rPr lang="en-US" sz="2000" dirty="0" smtClean="0"/>
+              <a:t>.</a:t>
+            </a:r>
+          </a:p>
+          <a:p>
+            <a:r>
+              <a:rPr lang="en-US" sz="2000" dirty="0" smtClean="0"/>
+              <a:t>Any refactoring of functionality between services is much harder than it is in a monolith. But even experienced architects working in familiar domains have great difficulty getting boundaries right at the beginning.</a:t>
+            </a:r>
+          </a:p>
+        </p:txBody>
+      </p:sp>
+    </p:spTree>
+  </p:cSld>
+  <p:clrMapOvr>
+    <a:masterClrMapping/>
+  </p:clrMapOvr>
+</p:sld>
+</file>
+
 <file path=ppt/slides/slide28.xml><?xml version="1.0" encoding="utf-8"?>
 <p:sld xmlns:a="http://schemas.openxmlformats.org/drawingml/2006/main" xmlns:r="http://schemas.openxmlformats.org/officeDocument/2006/relationships" xmlns:p="http://schemas.openxmlformats.org/presentationml/2006/main">
   <p:cSld>
@@ -6668,112 +6670,32 @@
           <a:chExt cx="0" cy="0"/>
         </a:xfrm>
       </p:grpSpPr>
-      <p:sp>
-        <p:nvSpPr>
-          <p:cNvPr id="2" name="Title 1"/>
-          <p:cNvSpPr>
-            <a:spLocks noGrp="1"/>
-          </p:cNvSpPr>
-          <p:nvPr>
-            <p:ph type="title"/>
-          </p:nvPr>
-        </p:nvSpPr>
-        <p:spPr/>
-        <p:txBody>
-          <a:bodyPr/>
-          <a:lstStyle/>
-          <a:p>
-            <a:r>
-              <a:rPr lang="en-US" dirty="0" smtClean="0"/>
-              <a:t>Why </a:t>
-            </a:r>
-            <a:r>
-              <a:rPr lang="en-US" dirty="0" err="1" smtClean="0"/>
-              <a:t>Microservices</a:t>
-            </a:r>
-            <a:r>
-              <a:rPr lang="en-US" smtClean="0"/>
-              <a:t>: </a:t>
-            </a:r>
-            <a:r>
-              <a:rPr lang="en-US" dirty="0" smtClean="0"/>
-              <a:t>Example</a:t>
-            </a:r>
-            <a:endParaRPr lang="en-US" dirty="0"/>
-          </a:p>
-        </p:txBody>
-      </p:sp>
-      <p:sp>
-        <p:nvSpPr>
-          <p:cNvPr id="3" name="Content Placeholder 2"/>
-          <p:cNvSpPr>
-            <a:spLocks noGrp="1"/>
-          </p:cNvSpPr>
-          <p:nvPr>
-            <p:ph idx="1"/>
-          </p:nvPr>
-        </p:nvSpPr>
-        <p:spPr/>
-        <p:txBody>
-          <a:bodyPr/>
-          <a:lstStyle/>
-          <a:p>
-            <a:r>
-              <a:rPr lang="en-US" sz="1800" u="sng" dirty="0" smtClean="0">
-                <a:hlinkClick r:id="rId2"/>
-              </a:rPr>
-              <a:t>http://philcalcado.com/2015/09/08/how_we_ended_up_with_microservices.html</a:t>
-            </a:r>
-            <a:endParaRPr lang="en-US" sz="1800" dirty="0" smtClean="0"/>
-          </a:p>
-          <a:p>
-            <a:r>
-              <a:rPr lang="en-US" sz="2600" dirty="0" smtClean="0"/>
-              <a:t>If you were to ask anybody from any of the teams about how our </a:t>
-            </a:r>
-            <a:r>
-              <a:rPr lang="en-US" sz="2600" i="1" dirty="0" smtClean="0">
-                <a:solidFill>
-                  <a:srgbClr val="C00000"/>
-                </a:solidFill>
-              </a:rPr>
-              <a:t>development process</a:t>
-            </a:r>
-            <a:r>
-              <a:rPr lang="en-US" sz="2600" dirty="0" smtClean="0"/>
-              <a:t> worked, they would describe something like this:</a:t>
-            </a:r>
-          </a:p>
-          <a:p>
-            <a:pPr lvl="1"/>
-            <a:r>
-              <a:rPr lang="en-US" sz="2200" dirty="0" smtClean="0"/>
-              <a:t>Somebody has an idea for a feature, they write a couple of paragraphs and draw some mockups. We then discuss it as a team.</a:t>
-            </a:r>
-          </a:p>
-          <a:p>
-            <a:pPr lvl="1"/>
-            <a:r>
-              <a:rPr lang="en-US" sz="2200" dirty="0" smtClean="0"/>
-              <a:t>Designers shape up the user experience.</a:t>
-            </a:r>
-          </a:p>
-          <a:p>
-            <a:pPr lvl="1"/>
-            <a:r>
-              <a:rPr lang="en-US" sz="2200" dirty="0" smtClean="0"/>
-              <a:t>We write the code.</a:t>
-            </a:r>
-          </a:p>
-          <a:p>
-            <a:pPr lvl="1"/>
-            <a:r>
-              <a:rPr lang="en-US" sz="2200" dirty="0" smtClean="0"/>
-              <a:t>After a little testing, we deploy.</a:t>
-            </a:r>
-          </a:p>
-        </p:txBody>
-      </p:sp>
+      <p:pic>
+        <p:nvPicPr>
+          <p:cNvPr id="4" name="Picture 2" descr="https://lh3.ggpht.com/1IfZLL2QDSjZ0wS7sUhaMlsAOS8BBzdR3wZ1WawgRn7KZAM8nEVZYMOUM-lqQb0ikIzp=w300"/>
+          <p:cNvPicPr>
+            <a:picLocks noChangeAspect="1" noChangeArrowheads="1"/>
+          </p:cNvPicPr>
+          <p:nvPr/>
+        </p:nvPicPr>
+        <p:blipFill>
+          <a:blip r:embed="rId2" cstate="print"/>
+          <a:srcRect/>
+          <a:stretch>
+            <a:fillRect/>
+          </a:stretch>
+        </p:blipFill>
+        <p:spPr bwMode="auto">
+          <a:xfrm>
+            <a:off x="3276600" y="1905000"/>
+            <a:ext cx="2857500" cy="2857500"/>
+          </a:xfrm>
+          <a:prstGeom prst="rect">
+            <a:avLst/>
+          </a:prstGeom>
+          <a:noFill/>
+        </p:spPr>
+      </p:pic>
     </p:spTree>
   </p:cSld>
   <p:clrMapOvr>
@@ -6816,7 +6738,19 @@
           <a:p>
             <a:r>
               <a:rPr lang="en-US" dirty="0" smtClean="0"/>
-              <a:t>Value Stream Map</a:t>
+              <a:t>Why </a:t>
+            </a:r>
+            <a:r>
+              <a:rPr lang="en-US" dirty="0" err="1" smtClean="0"/>
+              <a:t>Microservices</a:t>
+            </a:r>
+            <a:r>
+              <a:rPr lang="en-US" smtClean="0"/>
+              <a:t>: </a:t>
+            </a:r>
+            <a:r>
+              <a:rPr lang="en-US" dirty="0" smtClean="0"/>
+              <a:t>Example</a:t>
             </a:r>
             <a:endParaRPr lang="en-US" dirty="0"/>
           </a:p>
@@ -6838,74 +6772,61 @@
           <a:lstStyle/>
           <a:p>
             <a:r>
-              <a:rPr lang="en-US" sz="2400" dirty="0" smtClean="0"/>
-              <a:t>The </a:t>
-            </a:r>
-            <a:r>
-              <a:rPr lang="en-US" sz="2400" i="1" dirty="0" smtClean="0">
+              <a:rPr lang="en-US" sz="1800" u="sng" dirty="0" smtClean="0">
+                <a:hlinkClick r:id="rId2"/>
+              </a:rPr>
+              <a:t>http://philcalcado.com/2015/09/08/how_we_ended_up_with_microservices.html</a:t>
+            </a:r>
+            <a:endParaRPr lang="en-US" sz="1800" dirty="0" smtClean="0"/>
+          </a:p>
+          <a:p>
+            <a:r>
+              <a:rPr lang="en-US" sz="2600" dirty="0" smtClean="0"/>
+              <a:t>If you were to ask anybody from any of the teams about how our </a:t>
+            </a:r>
+            <a:r>
+              <a:rPr lang="en-US" sz="2600" i="1" dirty="0" smtClean="0">
                 <a:solidFill>
                   <a:srgbClr val="C00000"/>
                 </a:solidFill>
               </a:rPr>
-              <a:t>actual flow</a:t>
-            </a:r>
-            <a:r>
-              <a:rPr lang="en-US" sz="2400" dirty="0" smtClean="0"/>
-              <a:t> was something like this:</a:t>
+              <a:t>development process</a:t>
+            </a:r>
+            <a:r>
+              <a:rPr lang="en-US" sz="2600" dirty="0" smtClean="0"/>
+              <a:t> worked, they would describe something like this:</a:t>
             </a:r>
           </a:p>
           <a:p>
             <a:pPr lvl="1"/>
             <a:r>
-              <a:rPr lang="en-US" sz="2000" dirty="0" smtClean="0"/>
-              <a:t>Somebody comes up with an idea for a feature. They then write a fairly lightweight spec, with some screen mockups, and stores that in a Google Drive document.</a:t>
+              <a:rPr lang="en-US" sz="2200" dirty="0" smtClean="0"/>
+              <a:t>Somebody has an idea for a feature, they write a couple of paragraphs and draw some mockups. We then discuss it as a team.</a:t>
             </a:r>
           </a:p>
           <a:p>
             <a:pPr lvl="1"/>
             <a:r>
-              <a:rPr lang="en-US" sz="2000" dirty="0" smtClean="0"/>
-              <a:t>The spec stays in this document until somebody has time to actually work on it.</a:t>
+              <a:rPr lang="en-US" sz="2200" dirty="0" smtClean="0"/>
+              <a:t>Designers shape up the user experience.</a:t>
             </a:r>
           </a:p>
           <a:p>
             <a:pPr lvl="1"/>
             <a:r>
-              <a:rPr lang="en-US" sz="2000" dirty="0" smtClean="0"/>
-              <a:t>...</a:t>
-            </a:r>
-          </a:p>
-          <a:p>
-            <a:endParaRPr lang="en-US" sz="2400" dirty="0" smtClean="0"/>
-          </a:p>
-        </p:txBody>
-      </p:sp>
-      <p:pic>
-        <p:nvPicPr>
-          <p:cNvPr id="1026" name="Picture 2" descr="http://philcalcado.com/img/2015-09-7-constraints/vm1.png"/>
-          <p:cNvPicPr>
-            <a:picLocks noChangeAspect="1" noChangeArrowheads="1"/>
-          </p:cNvPicPr>
-          <p:nvPr/>
-        </p:nvPicPr>
-        <p:blipFill>
-          <a:blip r:embed="rId2" cstate="print"/>
-          <a:srcRect/>
-          <a:stretch>
-            <a:fillRect/>
-          </a:stretch>
-        </p:blipFill>
-        <p:spPr bwMode="auto">
-          <a:xfrm>
-            <a:off x="685800" y="4114800"/>
-            <a:ext cx="7829207" cy="2241905"/>
-          </a:xfrm>
-          <a:prstGeom prst="rect">
-            <a:avLst/>
-          </a:prstGeom>
-          <a:noFill/>
-        </p:spPr>
-      </p:pic>
+              <a:rPr lang="en-US" sz="2200" dirty="0" smtClean="0"/>
+              <a:t>We write the code.</a:t>
+            </a:r>
+          </a:p>
+          <a:p>
+            <a:pPr lvl="1"/>
+            <a:r>
+              <a:rPr lang="en-US" sz="2200" dirty="0" smtClean="0"/>
+              <a:t>After a little testing, we deploy.</a:t>
+            </a:r>
+          </a:p>
+        </p:txBody>
+      </p:sp>
     </p:spTree>
   </p:cSld>
   <p:clrMapOvr>
@@ -7104,6 +7025,138 @@
           <a:p>
             <a:r>
               <a:rPr lang="en-US" dirty="0" smtClean="0"/>
+              <a:t>Value Stream Map</a:t>
+            </a:r>
+            <a:endParaRPr lang="en-US" dirty="0"/>
+          </a:p>
+        </p:txBody>
+      </p:sp>
+      <p:sp>
+        <p:nvSpPr>
+          <p:cNvPr id="3" name="Content Placeholder 2"/>
+          <p:cNvSpPr>
+            <a:spLocks noGrp="1"/>
+          </p:cNvSpPr>
+          <p:nvPr>
+            <p:ph idx="1"/>
+          </p:nvPr>
+        </p:nvSpPr>
+        <p:spPr/>
+        <p:txBody>
+          <a:bodyPr/>
+          <a:lstStyle/>
+          <a:p>
+            <a:r>
+              <a:rPr lang="en-US" sz="2400" dirty="0" smtClean="0"/>
+              <a:t>The </a:t>
+            </a:r>
+            <a:r>
+              <a:rPr lang="en-US" sz="2400" i="1" dirty="0" smtClean="0">
+                <a:solidFill>
+                  <a:srgbClr val="C00000"/>
+                </a:solidFill>
+              </a:rPr>
+              <a:t>actual flow</a:t>
+            </a:r>
+            <a:r>
+              <a:rPr lang="en-US" sz="2400" dirty="0" smtClean="0"/>
+              <a:t> was something like this:</a:t>
+            </a:r>
+          </a:p>
+          <a:p>
+            <a:pPr lvl="1"/>
+            <a:r>
+              <a:rPr lang="en-US" sz="2000" dirty="0" smtClean="0"/>
+              <a:t>Somebody comes up with an idea for a feature. They then write a fairly lightweight spec, with some screen mockups, and stores that in a Google Drive document.</a:t>
+            </a:r>
+          </a:p>
+          <a:p>
+            <a:pPr lvl="1"/>
+            <a:r>
+              <a:rPr lang="en-US" sz="2000" dirty="0" smtClean="0"/>
+              <a:t>The spec stays in this document until somebody has time to actually work on it.</a:t>
+            </a:r>
+          </a:p>
+          <a:p>
+            <a:pPr lvl="1"/>
+            <a:r>
+              <a:rPr lang="en-US" sz="2000" dirty="0" smtClean="0"/>
+              <a:t>...</a:t>
+            </a:r>
+          </a:p>
+          <a:p>
+            <a:endParaRPr lang="en-US" sz="2400" dirty="0" smtClean="0"/>
+          </a:p>
+        </p:txBody>
+      </p:sp>
+      <p:pic>
+        <p:nvPicPr>
+          <p:cNvPr id="1026" name="Picture 2" descr="http://philcalcado.com/img/2015-09-7-constraints/vm1.png"/>
+          <p:cNvPicPr>
+            <a:picLocks noChangeAspect="1" noChangeArrowheads="1"/>
+          </p:cNvPicPr>
+          <p:nvPr/>
+        </p:nvPicPr>
+        <p:blipFill>
+          <a:blip r:embed="rId2" cstate="print"/>
+          <a:srcRect/>
+          <a:stretch>
+            <a:fillRect/>
+          </a:stretch>
+        </p:blipFill>
+        <p:spPr bwMode="auto">
+          <a:xfrm>
+            <a:off x="685800" y="4114800"/>
+            <a:ext cx="7829207" cy="2241905"/>
+          </a:xfrm>
+          <a:prstGeom prst="rect">
+            <a:avLst/>
+          </a:prstGeom>
+          <a:noFill/>
+        </p:spPr>
+      </p:pic>
+    </p:spTree>
+  </p:cSld>
+  <p:clrMapOvr>
+    <a:masterClrMapping/>
+  </p:clrMapOvr>
+</p:sld>
+</file>
+
+<file path=ppt/slides/slide31.xml><?xml version="1.0" encoding="utf-8"?>
+<p:sld xmlns:a="http://schemas.openxmlformats.org/drawingml/2006/main" xmlns:r="http://schemas.openxmlformats.org/officeDocument/2006/relationships" xmlns:p="http://schemas.openxmlformats.org/presentationml/2006/main">
+  <p:cSld>
+    <p:spTree>
+      <p:nvGrpSpPr>
+        <p:cNvPr id="1" name=""/>
+        <p:cNvGrpSpPr/>
+        <p:nvPr/>
+      </p:nvGrpSpPr>
+      <p:grpSpPr>
+        <a:xfrm>
+          <a:off x="0" y="0"/>
+          <a:ext cx="0" cy="0"/>
+          <a:chOff x="0" y="0"/>
+          <a:chExt cx="0" cy="0"/>
+        </a:xfrm>
+      </p:grpSpPr>
+      <p:sp>
+        <p:nvSpPr>
+          <p:cNvPr id="2" name="Title 1"/>
+          <p:cNvSpPr>
+            <a:spLocks noGrp="1"/>
+          </p:cNvSpPr>
+          <p:nvPr>
+            <p:ph type="title"/>
+          </p:nvPr>
+        </p:nvSpPr>
+        <p:spPr/>
+        <p:txBody>
+          <a:bodyPr/>
+          <a:lstStyle/>
+          <a:p>
+            <a:r>
+              <a:rPr lang="en-US" dirty="0" smtClean="0"/>
               <a:t>Adopt a Release Train</a:t>
             </a:r>
             <a:endParaRPr lang="en-US" dirty="0"/>
@@ -7191,7 +7244,7 @@
 </p:sld>
 </file>
 
-<file path=ppt/slides/slide31.xml><?xml version="1.0" encoding="utf-8"?>
+<file path=ppt/slides/slide32.xml><?xml version="1.0" encoding="utf-8"?>
 <p:sld xmlns:a="http://schemas.openxmlformats.org/drawingml/2006/main" xmlns:r="http://schemas.openxmlformats.org/officeDocument/2006/relationships" xmlns:p="http://schemas.openxmlformats.org/presentationml/2006/main">
   <p:cSld>
     <p:spTree>
@@ -7302,7 +7355,7 @@
 </p:sld>
 </file>
 
-<file path=ppt/slides/slide32.xml><?xml version="1.0" encoding="utf-8"?>
+<file path=ppt/slides/slide33.xml><?xml version="1.0" encoding="utf-8"?>
 <p:sld xmlns:a="http://schemas.openxmlformats.org/drawingml/2006/main" xmlns:r="http://schemas.openxmlformats.org/officeDocument/2006/relationships" xmlns:p="http://schemas.openxmlformats.org/presentationml/2006/main">
   <p:cSld>
     <p:spTree>
@@ -7402,7 +7455,7 @@
 </p:sld>
 </file>
 
-<file path=ppt/slides/slide33.xml><?xml version="1.0" encoding="utf-8"?>
+<file path=ppt/slides/slide34.xml><?xml version="1.0" encoding="utf-8"?>
 <p:sld xmlns:a="http://schemas.openxmlformats.org/drawingml/2006/main" xmlns:r="http://schemas.openxmlformats.org/officeDocument/2006/relationships" xmlns:p="http://schemas.openxmlformats.org/presentationml/2006/main">
   <p:cSld>
     <p:spTree>
@@ -7514,7 +7567,7 @@
 </p:sld>
 </file>
 
-<file path=ppt/slides/slide34.xml><?xml version="1.0" encoding="utf-8"?>
+<file path=ppt/slides/slide35.xml><?xml version="1.0" encoding="utf-8"?>
 <p:sld xmlns:a="http://schemas.openxmlformats.org/drawingml/2006/main" xmlns:r="http://schemas.openxmlformats.org/officeDocument/2006/relationships" xmlns:p="http://schemas.openxmlformats.org/presentationml/2006/main">
   <p:cSld>
     <p:spTree>
@@ -7622,7 +7675,7 @@
 </p:sld>
 </file>
 
-<file path=ppt/slides/slide35.xml><?xml version="1.0" encoding="utf-8"?>
+<file path=ppt/slides/slide36.xml><?xml version="1.0" encoding="utf-8"?>
 <p:sld xmlns:a="http://schemas.openxmlformats.org/drawingml/2006/main" xmlns:r="http://schemas.openxmlformats.org/officeDocument/2006/relationships" xmlns:p="http://schemas.openxmlformats.org/presentationml/2006/main">
   <p:cSld>
     <p:spTree>
@@ -7696,7 +7749,7 @@
 </p:sld>
 </file>
 
-<file path=ppt/slides/slide36.xml><?xml version="1.0" encoding="utf-8"?>
+<file path=ppt/slides/slide37.xml><?xml version="1.0" encoding="utf-8"?>
 <p:sld xmlns:a="http://schemas.openxmlformats.org/drawingml/2006/main" xmlns:r="http://schemas.openxmlformats.org/officeDocument/2006/relationships" xmlns:p="http://schemas.openxmlformats.org/presentationml/2006/main">
   <p:cSld>
     <p:spTree>
@@ -7713,38 +7766,13 @@
           <a:chExt cx="0" cy="0"/>
         </a:xfrm>
       </p:grpSpPr>
-      <p:sp>
-        <p:nvSpPr>
-          <p:cNvPr id="18434" name="Title 1"/>
-          <p:cNvSpPr>
-            <a:spLocks noGrp="1"/>
-          </p:cNvSpPr>
-          <p:nvPr>
-            <p:ph type="title"/>
-          </p:nvPr>
-        </p:nvSpPr>
-        <p:spPr/>
-        <p:txBody>
-          <a:bodyPr/>
-          <a:lstStyle/>
-          <a:p>
-            <a:pPr eaLnBrk="1" hangingPunct="1"/>
-            <a:r>
-              <a:rPr lang="en-US" dirty="0" smtClean="0"/>
-              <a:t>Thank You &amp; See You Again</a:t>
-            </a:r>
-          </a:p>
-        </p:txBody>
-      </p:sp>
       <p:pic>
         <p:nvPicPr>
-          <p:cNvPr id="5" name="Content Placeholder 4"/>
+          <p:cNvPr id="4" name="Picture 2" descr="https://lh3.ggpht.com/1IfZLL2QDSjZ0wS7sUhaMlsAOS8BBzdR3wZ1WawgRn7KZAM8nEVZYMOUM-lqQb0ikIzp=w300"/>
           <p:cNvPicPr>
-            <a:picLocks noGrp="1" noChangeAspect="1" noChangeArrowheads="1"/>
+            <a:picLocks noChangeAspect="1" noChangeArrowheads="1"/>
           </p:cNvPicPr>
-          <p:nvPr>
-            <p:ph idx="1"/>
-          </p:nvPr>
+          <p:nvPr/>
         </p:nvPicPr>
         <p:blipFill>
           <a:blip r:embed="rId2" cstate="print"/>
@@ -7753,11 +7781,14 @@
             <a:fillRect/>
           </a:stretch>
         </p:blipFill>
-        <p:spPr>
+        <p:spPr bwMode="auto">
           <a:xfrm>
-            <a:off x="1143000" y="1676400"/>
-            <a:ext cx="6810375" cy="4525963"/>
+            <a:off x="3276600" y="1905000"/>
+            <a:ext cx="2857500" cy="2857500"/>
           </a:xfrm>
+          <a:prstGeom prst="rect">
+            <a:avLst/>
+          </a:prstGeom>
           <a:noFill/>
         </p:spPr>
       </p:pic>
@@ -7766,13 +7797,180 @@
   <p:clrMapOvr>
     <a:masterClrMapping/>
   </p:clrMapOvr>
-  <p:timing>
-    <p:tnLst>
-      <p:par>
-        <p:cTn id="1" dur="indefinite" restart="never" nodeType="tmRoot"/>
-      </p:par>
-    </p:tnLst>
-  </p:timing>
+</p:sld>
+</file>
+
+<file path=ppt/slides/slide38.xml><?xml version="1.0" encoding="utf-8"?>
+<p:sld xmlns:a="http://schemas.openxmlformats.org/drawingml/2006/main" xmlns:r="http://schemas.openxmlformats.org/officeDocument/2006/relationships" xmlns:p="http://schemas.openxmlformats.org/presentationml/2006/main">
+  <p:cSld>
+    <p:spTree>
+      <p:nvGrpSpPr>
+        <p:cNvPr id="1" name=""/>
+        <p:cNvGrpSpPr/>
+        <p:nvPr/>
+      </p:nvGrpSpPr>
+      <p:grpSpPr>
+        <a:xfrm>
+          <a:off x="0" y="0"/>
+          <a:ext cx="0" cy="0"/>
+          <a:chOff x="0" y="0"/>
+          <a:chExt cx="0" cy="0"/>
+        </a:xfrm>
+      </p:grpSpPr>
+      <p:sp>
+        <p:nvSpPr>
+          <p:cNvPr id="2" name="Title 1"/>
+          <p:cNvSpPr>
+            <a:spLocks noGrp="1"/>
+          </p:cNvSpPr>
+          <p:nvPr>
+            <p:ph type="title"/>
+          </p:nvPr>
+        </p:nvSpPr>
+        <p:spPr/>
+        <p:txBody>
+          <a:bodyPr/>
+          <a:lstStyle/>
+          <a:p>
+            <a:r>
+              <a:rPr lang="en-US" dirty="0" err="1" smtClean="0"/>
+              <a:t>DeathStarBench</a:t>
+            </a:r>
+            <a:endParaRPr lang="en-US" dirty="0"/>
+          </a:p>
+        </p:txBody>
+      </p:sp>
+      <p:sp>
+        <p:nvSpPr>
+          <p:cNvPr id="3" name="Content Placeholder 2"/>
+          <p:cNvSpPr>
+            <a:spLocks noGrp="1"/>
+          </p:cNvSpPr>
+          <p:nvPr>
+            <p:ph idx="1"/>
+          </p:nvPr>
+        </p:nvSpPr>
+        <p:spPr/>
+        <p:txBody>
+          <a:bodyPr/>
+          <a:lstStyle/>
+          <a:p>
+            <a:r>
+              <a:rPr lang="en-US" sz="2400" b="1" dirty="0" smtClean="0"/>
+              <a:t>Yu </a:t>
+            </a:r>
+            <a:r>
+              <a:rPr lang="en-US" sz="2400" b="1" dirty="0" err="1" smtClean="0"/>
+              <a:t>Gan</a:t>
+            </a:r>
+            <a:r>
+              <a:rPr lang="en-US" sz="2400" b="1" dirty="0" smtClean="0"/>
+              <a:t> et al. (2019). An Open-Source Benchmark Suite for </a:t>
+            </a:r>
+            <a:r>
+              <a:rPr lang="en-US" sz="2400" b="1" dirty="0" err="1" smtClean="0"/>
+              <a:t>Microservices</a:t>
+            </a:r>
+            <a:r>
+              <a:rPr lang="en-US" sz="2400" b="1" dirty="0" smtClean="0"/>
+              <a:t> and Their Hardware-Software Implications for Cloud &amp; Edge Systems.</a:t>
+            </a:r>
+          </a:p>
+          <a:p>
+            <a:r>
+              <a:rPr lang="en-US" sz="2400" dirty="0" smtClean="0">
+                <a:hlinkClick r:id="rId2"/>
+              </a:rPr>
+              <a:t>https://github.com/delimitrou/DeathStarBench</a:t>
+            </a:r>
+            <a:endParaRPr lang="en-US" sz="2400" dirty="0" smtClean="0"/>
+          </a:p>
+          <a:p>
+            <a:endParaRPr lang="en-US" sz="2400" b="1" dirty="0"/>
+          </a:p>
+        </p:txBody>
+      </p:sp>
+    </p:spTree>
+  </p:cSld>
+  <p:clrMapOvr>
+    <a:masterClrMapping/>
+  </p:clrMapOvr>
+</p:sld>
+</file>
+
+<file path=ppt/slides/slide39.xml><?xml version="1.0" encoding="utf-8"?>
+<p:sld xmlns:a="http://schemas.openxmlformats.org/drawingml/2006/main" xmlns:r="http://schemas.openxmlformats.org/officeDocument/2006/relationships" xmlns:p="http://schemas.openxmlformats.org/presentationml/2006/main">
+  <p:cSld>
+    <p:spTree>
+      <p:nvGrpSpPr>
+        <p:cNvPr id="1" name=""/>
+        <p:cNvGrpSpPr/>
+        <p:nvPr/>
+      </p:nvGrpSpPr>
+      <p:grpSpPr>
+        <a:xfrm>
+          <a:off x="0" y="0"/>
+          <a:ext cx="0" cy="0"/>
+          <a:chOff x="0" y="0"/>
+          <a:chExt cx="0" cy="0"/>
+        </a:xfrm>
+      </p:grpSpPr>
+      <p:sp>
+        <p:nvSpPr>
+          <p:cNvPr id="2" name="Title 1"/>
+          <p:cNvSpPr>
+            <a:spLocks noGrp="1"/>
+          </p:cNvSpPr>
+          <p:nvPr>
+            <p:ph type="title"/>
+          </p:nvPr>
+        </p:nvSpPr>
+        <p:spPr/>
+        <p:txBody>
+          <a:bodyPr/>
+          <a:lstStyle/>
+          <a:p>
+            <a:r>
+              <a:rPr lang="en-US" dirty="0" smtClean="0"/>
+              <a:t>Online Boutique</a:t>
+            </a:r>
+            <a:endParaRPr lang="en-US" dirty="0"/>
+          </a:p>
+        </p:txBody>
+      </p:sp>
+      <p:sp>
+        <p:nvSpPr>
+          <p:cNvPr id="3" name="Content Placeholder 2"/>
+          <p:cNvSpPr>
+            <a:spLocks noGrp="1"/>
+          </p:cNvSpPr>
+          <p:nvPr>
+            <p:ph idx="1"/>
+          </p:nvPr>
+        </p:nvSpPr>
+        <p:spPr/>
+        <p:txBody>
+          <a:bodyPr/>
+          <a:lstStyle/>
+          <a:p>
+            <a:r>
+              <a:rPr lang="en-US" sz="2400" dirty="0" smtClean="0">
+                <a:hlinkClick r:id="rId2"/>
+              </a:rPr>
+              <a:t>https://github.com/googlecloudplatform/microservices-demo</a:t>
+            </a:r>
+            <a:endParaRPr lang="en-US" sz="2400" dirty="0" smtClean="0"/>
+          </a:p>
+          <a:p>
+            <a:endParaRPr lang="en-US" sz="2400" dirty="0"/>
+          </a:p>
+        </p:txBody>
+      </p:sp>
+    </p:spTree>
+  </p:cSld>
+  <p:clrMapOvr>
+    <a:masterClrMapping/>
+  </p:clrMapOvr>
 </p:sld>
 </file>
 
@@ -7933,6 +8131,587 @@
           <a:prstGeom prst="rect">
             <a:avLst/>
           </a:prstGeom>
+          <a:noFill/>
+        </p:spPr>
+      </p:pic>
+    </p:spTree>
+  </p:cSld>
+  <p:clrMapOvr>
+    <a:masterClrMapping/>
+  </p:clrMapOvr>
+  <p:timing>
+    <p:tnLst>
+      <p:par>
+        <p:cTn id="1" dur="indefinite" restart="never" nodeType="tmRoot"/>
+      </p:par>
+    </p:tnLst>
+  </p:timing>
+</p:sld>
+</file>
+
+<file path=ppt/slides/slide40.xml><?xml version="1.0" encoding="utf-8"?>
+<p:sld xmlns:a="http://schemas.openxmlformats.org/drawingml/2006/main" xmlns:r="http://schemas.openxmlformats.org/officeDocument/2006/relationships" xmlns:p="http://schemas.openxmlformats.org/presentationml/2006/main">
+  <p:cSld>
+    <p:spTree>
+      <p:nvGrpSpPr>
+        <p:cNvPr id="1" name=""/>
+        <p:cNvGrpSpPr/>
+        <p:nvPr/>
+      </p:nvGrpSpPr>
+      <p:grpSpPr>
+        <a:xfrm>
+          <a:off x="0" y="0"/>
+          <a:ext cx="0" cy="0"/>
+          <a:chOff x="0" y="0"/>
+          <a:chExt cx="0" cy="0"/>
+        </a:xfrm>
+      </p:grpSpPr>
+      <p:sp>
+        <p:nvSpPr>
+          <p:cNvPr id="2" name="Title 1"/>
+          <p:cNvSpPr>
+            <a:spLocks noGrp="1"/>
+          </p:cNvSpPr>
+          <p:nvPr>
+            <p:ph type="title"/>
+          </p:nvPr>
+        </p:nvSpPr>
+        <p:spPr/>
+        <p:txBody>
+          <a:bodyPr/>
+          <a:lstStyle/>
+          <a:p>
+            <a:r>
+              <a:rPr lang="en-US" dirty="0" err="1" smtClean="0"/>
+              <a:t>TeaStore</a:t>
+            </a:r>
+            <a:endParaRPr lang="en-US" dirty="0"/>
+          </a:p>
+        </p:txBody>
+      </p:sp>
+      <p:sp>
+        <p:nvSpPr>
+          <p:cNvPr id="3" name="Content Placeholder 2"/>
+          <p:cNvSpPr>
+            <a:spLocks noGrp="1"/>
+          </p:cNvSpPr>
+          <p:nvPr>
+            <p:ph idx="1"/>
+          </p:nvPr>
+        </p:nvSpPr>
+        <p:spPr/>
+        <p:txBody>
+          <a:bodyPr/>
+          <a:lstStyle/>
+          <a:p>
+            <a:r>
+              <a:rPr lang="en-US" sz="2400" dirty="0" smtClean="0"/>
+              <a:t>(</a:t>
+            </a:r>
+            <a:r>
+              <a:rPr lang="en-US" sz="2400" dirty="0" smtClean="0"/>
+              <a:t>2018). </a:t>
+            </a:r>
+            <a:r>
+              <a:rPr lang="en-US" sz="2400" dirty="0" err="1" smtClean="0"/>
+              <a:t>TeaStore</a:t>
+            </a:r>
+            <a:r>
+              <a:rPr lang="en-US" sz="2400" dirty="0" smtClean="0"/>
+              <a:t>.</a:t>
+            </a:r>
+          </a:p>
+          <a:p>
+            <a:r>
+              <a:rPr lang="en-US" sz="2400" dirty="0" smtClean="0">
+                <a:hlinkClick r:id="rId2"/>
+              </a:rPr>
+              <a:t>https://</a:t>
+            </a:r>
+            <a:r>
+              <a:rPr lang="en-US" sz="2400" dirty="0" smtClean="0">
+                <a:hlinkClick r:id="rId2"/>
+              </a:rPr>
+              <a:t>github.com/descartesresearch/teastore</a:t>
+            </a:r>
+            <a:endParaRPr lang="en-US" sz="2400" dirty="0" smtClean="0"/>
+          </a:p>
+          <a:p>
+            <a:endParaRPr lang="en-US" sz="2400" dirty="0"/>
+          </a:p>
+        </p:txBody>
+      </p:sp>
+    </p:spTree>
+  </p:cSld>
+  <p:clrMapOvr>
+    <a:masterClrMapping/>
+  </p:clrMapOvr>
+</p:sld>
+</file>
+
+<file path=ppt/slides/slide41.xml><?xml version="1.0" encoding="utf-8"?>
+<p:sld xmlns:a="http://schemas.openxmlformats.org/drawingml/2006/main" xmlns:r="http://schemas.openxmlformats.org/officeDocument/2006/relationships" xmlns:p="http://schemas.openxmlformats.org/presentationml/2006/main">
+  <p:cSld>
+    <p:spTree>
+      <p:nvGrpSpPr>
+        <p:cNvPr id="1" name=""/>
+        <p:cNvGrpSpPr/>
+        <p:nvPr/>
+      </p:nvGrpSpPr>
+      <p:grpSpPr>
+        <a:xfrm>
+          <a:off x="0" y="0"/>
+          <a:ext cx="0" cy="0"/>
+          <a:chOff x="0" y="0"/>
+          <a:chExt cx="0" cy="0"/>
+        </a:xfrm>
+      </p:grpSpPr>
+      <p:sp>
+        <p:nvSpPr>
+          <p:cNvPr id="2" name="Title 1"/>
+          <p:cNvSpPr>
+            <a:spLocks noGrp="1"/>
+          </p:cNvSpPr>
+          <p:nvPr>
+            <p:ph type="title"/>
+          </p:nvPr>
+        </p:nvSpPr>
+        <p:spPr/>
+        <p:txBody>
+          <a:bodyPr/>
+          <a:lstStyle/>
+          <a:p>
+            <a:r>
+              <a:rPr lang="en-US" dirty="0" err="1" smtClean="0"/>
+              <a:t>Bookinfo</a:t>
+            </a:r>
+            <a:endParaRPr lang="en-US" dirty="0"/>
+          </a:p>
+        </p:txBody>
+      </p:sp>
+      <p:sp>
+        <p:nvSpPr>
+          <p:cNvPr id="3" name="Content Placeholder 2"/>
+          <p:cNvSpPr>
+            <a:spLocks noGrp="1"/>
+          </p:cNvSpPr>
+          <p:nvPr>
+            <p:ph idx="1"/>
+          </p:nvPr>
+        </p:nvSpPr>
+        <p:spPr/>
+        <p:txBody>
+          <a:bodyPr/>
+          <a:lstStyle/>
+          <a:p>
+            <a:r>
+              <a:rPr lang="en-US" sz="2400" dirty="0" smtClean="0">
+                <a:hlinkClick r:id="rId2"/>
+              </a:rPr>
+              <a:t>https://istio.io/latest/docs/examples/bookinfo/</a:t>
+            </a:r>
+            <a:endParaRPr lang="en-US" sz="2400" dirty="0" smtClean="0"/>
+          </a:p>
+        </p:txBody>
+      </p:sp>
+    </p:spTree>
+  </p:cSld>
+  <p:clrMapOvr>
+    <a:masterClrMapping/>
+  </p:clrMapOvr>
+</p:sld>
+</file>
+
+<file path=ppt/slides/slide42.xml><?xml version="1.0" encoding="utf-8"?>
+<p:sld xmlns:a="http://schemas.openxmlformats.org/drawingml/2006/main" xmlns:r="http://schemas.openxmlformats.org/officeDocument/2006/relationships" xmlns:p="http://schemas.openxmlformats.org/presentationml/2006/main">
+  <p:cSld>
+    <p:spTree>
+      <p:nvGrpSpPr>
+        <p:cNvPr id="1" name=""/>
+        <p:cNvGrpSpPr/>
+        <p:nvPr/>
+      </p:nvGrpSpPr>
+      <p:grpSpPr>
+        <a:xfrm>
+          <a:off x="0" y="0"/>
+          <a:ext cx="0" cy="0"/>
+          <a:chOff x="0" y="0"/>
+          <a:chExt cx="0" cy="0"/>
+        </a:xfrm>
+      </p:grpSpPr>
+      <p:sp>
+        <p:nvSpPr>
+          <p:cNvPr id="2" name="Title 1"/>
+          <p:cNvSpPr>
+            <a:spLocks noGrp="1"/>
+          </p:cNvSpPr>
+          <p:nvPr>
+            <p:ph type="title"/>
+          </p:nvPr>
+        </p:nvSpPr>
+        <p:spPr/>
+        <p:txBody>
+          <a:bodyPr/>
+          <a:lstStyle/>
+          <a:p>
+            <a:r>
+              <a:rPr lang="en-US" dirty="0" smtClean="0"/>
+              <a:t>Sock Shop</a:t>
+            </a:r>
+            <a:endParaRPr lang="en-US" dirty="0"/>
+          </a:p>
+        </p:txBody>
+      </p:sp>
+      <p:sp>
+        <p:nvSpPr>
+          <p:cNvPr id="3" name="Content Placeholder 2"/>
+          <p:cNvSpPr>
+            <a:spLocks noGrp="1"/>
+          </p:cNvSpPr>
+          <p:nvPr>
+            <p:ph idx="1"/>
+          </p:nvPr>
+        </p:nvSpPr>
+        <p:spPr/>
+        <p:txBody>
+          <a:bodyPr/>
+          <a:lstStyle/>
+          <a:p>
+            <a:r>
+              <a:rPr lang="en-US" sz="2400" dirty="0" smtClean="0">
+                <a:hlinkClick r:id="rId2"/>
+              </a:rPr>
+              <a:t>https://</a:t>
+            </a:r>
+            <a:r>
+              <a:rPr lang="en-US" sz="2400" dirty="0" smtClean="0">
+                <a:hlinkClick r:id="rId2"/>
+              </a:rPr>
+              <a:t>github.com/ocp-power-demos/sock-shop-demo</a:t>
+            </a:r>
+            <a:endParaRPr lang="en-US" sz="2400" dirty="0" smtClean="0"/>
+          </a:p>
+          <a:p>
+            <a:endParaRPr lang="en-US" sz="2400" dirty="0" smtClean="0"/>
+          </a:p>
+        </p:txBody>
+      </p:sp>
+    </p:spTree>
+  </p:cSld>
+  <p:clrMapOvr>
+    <a:masterClrMapping/>
+  </p:clrMapOvr>
+</p:sld>
+</file>
+
+<file path=ppt/slides/slide43.xml><?xml version="1.0" encoding="utf-8"?>
+<p:sld xmlns:a="http://schemas.openxmlformats.org/drawingml/2006/main" xmlns:r="http://schemas.openxmlformats.org/officeDocument/2006/relationships" xmlns:p="http://schemas.openxmlformats.org/presentationml/2006/main">
+  <p:cSld>
+    <p:spTree>
+      <p:nvGrpSpPr>
+        <p:cNvPr id="1" name=""/>
+        <p:cNvGrpSpPr/>
+        <p:nvPr/>
+      </p:nvGrpSpPr>
+      <p:grpSpPr>
+        <a:xfrm>
+          <a:off x="0" y="0"/>
+          <a:ext cx="0" cy="0"/>
+          <a:chOff x="0" y="0"/>
+          <a:chExt cx="0" cy="0"/>
+        </a:xfrm>
+      </p:grpSpPr>
+      <p:sp>
+        <p:nvSpPr>
+          <p:cNvPr id="2" name="Title 1"/>
+          <p:cNvSpPr>
+            <a:spLocks noGrp="1"/>
+          </p:cNvSpPr>
+          <p:nvPr>
+            <p:ph type="title"/>
+          </p:nvPr>
+        </p:nvSpPr>
+        <p:spPr/>
+        <p:txBody>
+          <a:bodyPr/>
+          <a:lstStyle/>
+          <a:p>
+            <a:r>
+              <a:rPr lang="en-US" dirty="0" err="1" smtClean="0"/>
+              <a:t>JPetStore</a:t>
+            </a:r>
+            <a:endParaRPr lang="en-US" dirty="0"/>
+          </a:p>
+        </p:txBody>
+      </p:sp>
+      <p:sp>
+        <p:nvSpPr>
+          <p:cNvPr id="3" name="Content Placeholder 2"/>
+          <p:cNvSpPr>
+            <a:spLocks noGrp="1"/>
+          </p:cNvSpPr>
+          <p:nvPr>
+            <p:ph idx="1"/>
+          </p:nvPr>
+        </p:nvSpPr>
+        <p:spPr/>
+        <p:txBody>
+          <a:bodyPr/>
+          <a:lstStyle/>
+          <a:p>
+            <a:r>
+              <a:rPr lang="en-US" sz="2400" dirty="0" smtClean="0">
+                <a:hlinkClick r:id="rId2"/>
+              </a:rPr>
+              <a:t>https://</a:t>
+            </a:r>
+            <a:r>
+              <a:rPr lang="en-US" sz="2400" dirty="0" smtClean="0">
+                <a:hlinkClick r:id="rId2"/>
+              </a:rPr>
+              <a:t>github.com/mybatis/jpetstore-6</a:t>
+            </a:r>
+            <a:endParaRPr lang="en-US" sz="2400" dirty="0" smtClean="0"/>
+          </a:p>
+          <a:p>
+            <a:endParaRPr lang="en-US" sz="2400" dirty="0" smtClean="0"/>
+          </a:p>
+        </p:txBody>
+      </p:sp>
+    </p:spTree>
+  </p:cSld>
+  <p:clrMapOvr>
+    <a:masterClrMapping/>
+  </p:clrMapOvr>
+</p:sld>
+</file>
+
+<file path=ppt/slides/slide44.xml><?xml version="1.0" encoding="utf-8"?>
+<p:sld xmlns:a="http://schemas.openxmlformats.org/drawingml/2006/main" xmlns:r="http://schemas.openxmlformats.org/officeDocument/2006/relationships" xmlns:p="http://schemas.openxmlformats.org/presentationml/2006/main">
+  <p:cSld>
+    <p:spTree>
+      <p:nvGrpSpPr>
+        <p:cNvPr id="1" name=""/>
+        <p:cNvGrpSpPr/>
+        <p:nvPr/>
+      </p:nvGrpSpPr>
+      <p:grpSpPr>
+        <a:xfrm>
+          <a:off x="0" y="0"/>
+          <a:ext cx="0" cy="0"/>
+          <a:chOff x="0" y="0"/>
+          <a:chExt cx="0" cy="0"/>
+        </a:xfrm>
+      </p:grpSpPr>
+      <p:sp>
+        <p:nvSpPr>
+          <p:cNvPr id="2" name="Title 1"/>
+          <p:cNvSpPr>
+            <a:spLocks noGrp="1"/>
+          </p:cNvSpPr>
+          <p:nvPr>
+            <p:ph type="title"/>
+          </p:nvPr>
+        </p:nvSpPr>
+        <p:spPr/>
+        <p:txBody>
+          <a:bodyPr/>
+          <a:lstStyle/>
+          <a:p>
+            <a:r>
+              <a:rPr lang="en-US" dirty="0" err="1" smtClean="0"/>
+              <a:t>PetClinic</a:t>
+            </a:r>
+            <a:endParaRPr lang="en-US" dirty="0"/>
+          </a:p>
+        </p:txBody>
+      </p:sp>
+      <p:sp>
+        <p:nvSpPr>
+          <p:cNvPr id="3" name="Content Placeholder 2"/>
+          <p:cNvSpPr>
+            <a:spLocks noGrp="1"/>
+          </p:cNvSpPr>
+          <p:nvPr>
+            <p:ph idx="1"/>
+          </p:nvPr>
+        </p:nvSpPr>
+        <p:spPr/>
+        <p:txBody>
+          <a:bodyPr/>
+          <a:lstStyle/>
+          <a:p>
+            <a:r>
+              <a:rPr lang="en-US" sz="2400" dirty="0" smtClean="0">
+                <a:hlinkClick r:id="rId2"/>
+              </a:rPr>
+              <a:t>https://</a:t>
+            </a:r>
+            <a:r>
+              <a:rPr lang="en-US" sz="2400" dirty="0" smtClean="0">
+                <a:hlinkClick r:id="rId2"/>
+              </a:rPr>
+              <a:t>github.com/spring-petclinic/spring-petclinic-microservices</a:t>
+            </a:r>
+            <a:endParaRPr lang="en-US" sz="2400" dirty="0" smtClean="0"/>
+          </a:p>
+          <a:p>
+            <a:endParaRPr lang="en-US" sz="2400" dirty="0" smtClean="0"/>
+          </a:p>
+        </p:txBody>
+      </p:sp>
+    </p:spTree>
+  </p:cSld>
+  <p:clrMapOvr>
+    <a:masterClrMapping/>
+  </p:clrMapOvr>
+</p:sld>
+</file>
+
+<file path=ppt/slides/slide45.xml><?xml version="1.0" encoding="utf-8"?>
+<p:sld xmlns:a="http://schemas.openxmlformats.org/drawingml/2006/main" xmlns:r="http://schemas.openxmlformats.org/officeDocument/2006/relationships" xmlns:p="http://schemas.openxmlformats.org/presentationml/2006/main">
+  <p:cSld>
+    <p:spTree>
+      <p:nvGrpSpPr>
+        <p:cNvPr id="1" name=""/>
+        <p:cNvGrpSpPr/>
+        <p:nvPr/>
+      </p:nvGrpSpPr>
+      <p:grpSpPr>
+        <a:xfrm>
+          <a:off x="0" y="0"/>
+          <a:ext cx="0" cy="0"/>
+          <a:chOff x="0" y="0"/>
+          <a:chExt cx="0" cy="0"/>
+        </a:xfrm>
+      </p:grpSpPr>
+      <p:sp>
+        <p:nvSpPr>
+          <p:cNvPr id="2" name="Title 1"/>
+          <p:cNvSpPr>
+            <a:spLocks noGrp="1"/>
+          </p:cNvSpPr>
+          <p:nvPr>
+            <p:ph type="title"/>
+          </p:nvPr>
+        </p:nvSpPr>
+        <p:spPr/>
+        <p:txBody>
+          <a:bodyPr/>
+          <a:lstStyle/>
+          <a:p>
+            <a:r>
+              <a:rPr lang="en-US" dirty="0" smtClean="0"/>
+              <a:t>µBench</a:t>
+            </a:r>
+            <a:endParaRPr lang="en-US" dirty="0"/>
+          </a:p>
+        </p:txBody>
+      </p:sp>
+      <p:sp>
+        <p:nvSpPr>
+          <p:cNvPr id="3" name="Content Placeholder 2"/>
+          <p:cNvSpPr>
+            <a:spLocks noGrp="1"/>
+          </p:cNvSpPr>
+          <p:nvPr>
+            <p:ph idx="1"/>
+          </p:nvPr>
+        </p:nvSpPr>
+        <p:spPr/>
+        <p:txBody>
+          <a:bodyPr/>
+          <a:lstStyle/>
+          <a:p>
+            <a:r>
+              <a:rPr lang="en-US" sz="2400" dirty="0" smtClean="0">
+                <a:hlinkClick r:id="rId2"/>
+              </a:rPr>
+              <a:t>https://</a:t>
+            </a:r>
+            <a:r>
+              <a:rPr lang="en-US" sz="2400" dirty="0" smtClean="0">
+                <a:hlinkClick r:id="rId2"/>
+              </a:rPr>
+              <a:t>github.com/mSvcBench/muBench</a:t>
+            </a:r>
+            <a:endParaRPr lang="en-US" sz="2400" dirty="0" smtClean="0"/>
+          </a:p>
+          <a:p>
+            <a:endParaRPr lang="en-US" sz="2400" dirty="0" smtClean="0"/>
+          </a:p>
+        </p:txBody>
+      </p:sp>
+    </p:spTree>
+  </p:cSld>
+  <p:clrMapOvr>
+    <a:masterClrMapping/>
+  </p:clrMapOvr>
+</p:sld>
+</file>
+
+<file path=ppt/slides/slide46.xml><?xml version="1.0" encoding="utf-8"?>
+<p:sld xmlns:a="http://schemas.openxmlformats.org/drawingml/2006/main" xmlns:r="http://schemas.openxmlformats.org/officeDocument/2006/relationships" xmlns:p="http://schemas.openxmlformats.org/presentationml/2006/main">
+  <p:cSld>
+    <p:spTree>
+      <p:nvGrpSpPr>
+        <p:cNvPr id="1" name=""/>
+        <p:cNvGrpSpPr/>
+        <p:nvPr/>
+      </p:nvGrpSpPr>
+      <p:grpSpPr>
+        <a:xfrm>
+          <a:off x="0" y="0"/>
+          <a:ext cx="0" cy="0"/>
+          <a:chOff x="0" y="0"/>
+          <a:chExt cx="0" cy="0"/>
+        </a:xfrm>
+      </p:grpSpPr>
+      <p:sp>
+        <p:nvSpPr>
+          <p:cNvPr id="18434" name="Title 1"/>
+          <p:cNvSpPr>
+            <a:spLocks noGrp="1"/>
+          </p:cNvSpPr>
+          <p:nvPr>
+            <p:ph type="title"/>
+          </p:nvPr>
+        </p:nvSpPr>
+        <p:spPr/>
+        <p:txBody>
+          <a:bodyPr/>
+          <a:lstStyle/>
+          <a:p>
+            <a:pPr eaLnBrk="1" hangingPunct="1"/>
+            <a:r>
+              <a:rPr lang="en-US" dirty="0" smtClean="0"/>
+              <a:t>Thank You &amp; See You Again</a:t>
+            </a:r>
+          </a:p>
+        </p:txBody>
+      </p:sp>
+      <p:pic>
+        <p:nvPicPr>
+          <p:cNvPr id="5" name="Content Placeholder 4"/>
+          <p:cNvPicPr>
+            <a:picLocks noGrp="1" noChangeAspect="1" noChangeArrowheads="1"/>
+          </p:cNvPicPr>
+          <p:nvPr>
+            <p:ph idx="1"/>
+          </p:nvPr>
+        </p:nvPicPr>
+        <p:blipFill>
+          <a:blip r:embed="rId2" cstate="print"/>
+          <a:srcRect/>
+          <a:stretch>
+            <a:fillRect/>
+          </a:stretch>
+        </p:blipFill>
+        <p:spPr>
+          <a:xfrm>
+            <a:off x="1143000" y="1676400"/>
+            <a:ext cx="6810375" cy="4525963"/>
+          </a:xfrm>
           <a:noFill/>
         </p:spPr>
       </p:pic>

--- a/Microservices/01.1. Introduction To Microservices.pptx
+++ b/Microservices/01.1. Introduction To Microservices.pptx
@@ -268,7 +268,7 @@
             <a:fld id="{2F0940CE-BE1D-4C40-AF8B-3898A4D1F5EC}" type="datetimeFigureOut">
               <a:rPr lang="en-US" smtClean="0"/>
               <a:pPr/>
-              <a:t>7/1/2026</a:t>
+              <a:t>7/6/2026</a:t>
             </a:fld>
             <a:endParaRPr lang="en-US"/>
           </a:p>
@@ -889,7 +889,7 @@
               <a:pPr>
                 <a:defRPr/>
               </a:pPr>
-              <a:t>7/1/2026</a:t>
+              <a:t>7/6/2026</a:t>
             </a:fld>
             <a:endParaRPr lang="en-US"/>
           </a:p>
@@ -1081,7 +1081,7 @@
               <a:pPr>
                 <a:defRPr/>
               </a:pPr>
-              <a:t>7/1/2026</a:t>
+              <a:t>7/6/2026</a:t>
             </a:fld>
             <a:endParaRPr lang="en-US"/>
           </a:p>
@@ -1283,7 +1283,7 @@
               <a:pPr>
                 <a:defRPr/>
               </a:pPr>
-              <a:t>7/1/2026</a:t>
+              <a:t>7/6/2026</a:t>
             </a:fld>
             <a:endParaRPr lang="en-US"/>
           </a:p>
@@ -1475,7 +1475,7 @@
               <a:pPr>
                 <a:defRPr/>
               </a:pPr>
-              <a:t>7/1/2026</a:t>
+              <a:t>7/6/2026</a:t>
             </a:fld>
             <a:endParaRPr lang="en-US"/>
           </a:p>
@@ -1743,7 +1743,7 @@
               <a:pPr>
                 <a:defRPr/>
               </a:pPr>
-              <a:t>7/1/2026</a:t>
+              <a:t>7/6/2026</a:t>
             </a:fld>
             <a:endParaRPr lang="en-US"/>
           </a:p>
@@ -2053,7 +2053,7 @@
               <a:pPr>
                 <a:defRPr/>
               </a:pPr>
-              <a:t>7/1/2026</a:t>
+              <a:t>7/6/2026</a:t>
             </a:fld>
             <a:endParaRPr lang="en-US"/>
           </a:p>
@@ -2497,7 +2497,7 @@
               <a:pPr>
                 <a:defRPr/>
               </a:pPr>
-              <a:t>7/1/2026</a:t>
+              <a:t>7/6/2026</a:t>
             </a:fld>
             <a:endParaRPr lang="en-US"/>
           </a:p>
@@ -2637,7 +2637,7 @@
               <a:pPr>
                 <a:defRPr/>
               </a:pPr>
-              <a:t>7/1/2026</a:t>
+              <a:t>7/6/2026</a:t>
             </a:fld>
             <a:endParaRPr lang="en-US"/>
           </a:p>
@@ -2754,7 +2754,7 @@
               <a:pPr>
                 <a:defRPr/>
               </a:pPr>
-              <a:t>7/1/2026</a:t>
+              <a:t>7/6/2026</a:t>
             </a:fld>
             <a:endParaRPr lang="en-US"/>
           </a:p>
@@ -3053,7 +3053,7 @@
               <a:pPr>
                 <a:defRPr/>
               </a:pPr>
-              <a:t>7/1/2026</a:t>
+              <a:t>7/6/2026</a:t>
             </a:fld>
             <a:endParaRPr lang="en-US"/>
           </a:p>
@@ -3331,7 +3331,7 @@
               <a:pPr>
                 <a:defRPr/>
               </a:pPr>
-              <a:t>7/1/2026</a:t>
+              <a:t>7/6/2026</a:t>
             </a:fld>
             <a:endParaRPr lang="en-US"/>
           </a:p>
@@ -3579,7 +3579,7 @@
               <a:pPr>
                 <a:defRPr/>
               </a:pPr>
-              <a:t>7/1/2026</a:t>
+              <a:t>7/6/2026</a:t>
             </a:fld>
             <a:endParaRPr lang="en-US"/>
           </a:p>
@@ -6247,6 +6247,20 @@
                   <a:srgbClr val="C00000"/>
                 </a:solidFill>
               </a:rPr>
+              <a:t>Operational Complexity</a:t>
+            </a:r>
+            <a:r>
+              <a:rPr lang="en-US" sz="2600" dirty="0" smtClean="0"/>
+              <a:t>: You need a mature operations team to manage lots of services, which are being redeployed regularly.</a:t>
+            </a:r>
+          </a:p>
+          <a:p>
+            <a:r>
+              <a:rPr lang="en-US" sz="2600" i="1" dirty="0" smtClean="0">
+                <a:solidFill>
+                  <a:srgbClr val="C00000"/>
+                </a:solidFill>
+              </a:rPr>
               <a:t>Distribution</a:t>
             </a:r>
             <a:r>
@@ -6273,22 +6287,13 @@
             </a:r>
             <a:r>
               <a:rPr lang="en-US" sz="2600" dirty="0" smtClean="0"/>
-              <a:t> for a distributed system, which means everyone has to manage eventual consistency.</a:t>
-            </a:r>
-          </a:p>
-          <a:p>
-            <a:r>
-              <a:rPr lang="en-US" sz="2600" i="1" dirty="0" smtClean="0">
-                <a:solidFill>
-                  <a:srgbClr val="C00000"/>
-                </a:solidFill>
-              </a:rPr>
-              <a:t>Operational Complexity</a:t>
+              <a:t> for a distributed system, which means everyone has to manage eventual consistency</a:t>
             </a:r>
             <a:r>
               <a:rPr lang="en-US" sz="2600" dirty="0" smtClean="0"/>
-              <a:t>: You need a mature operations team to manage lots of services, which are being redeployed regularly.</a:t>
-            </a:r>
+              <a:t>.</a:t>
+            </a:r>
+            <a:endParaRPr lang="en-US" sz="2600" dirty="0" smtClean="0"/>
           </a:p>
         </p:txBody>
       </p:sp>
@@ -7881,11 +7886,101 @@
               <a:rPr lang="en-US" sz="2400" dirty="0" smtClean="0">
                 <a:hlinkClick r:id="rId2"/>
               </a:rPr>
-              <a:t>https://github.com/delimitrou/DeathStarBench</a:t>
+              <a:t>https://</a:t>
+            </a:r>
+            <a:r>
+              <a:rPr lang="en-US" sz="2400" dirty="0" smtClean="0">
+                <a:hlinkClick r:id="rId2"/>
+              </a:rPr>
+              <a:t>github.com/delimitrou/DeathStarBench</a:t>
             </a:r>
             <a:endParaRPr lang="en-US" sz="2400" dirty="0" smtClean="0"/>
           </a:p>
           <a:p>
+            <a:r>
+              <a:rPr lang="en-US" sz="2400" dirty="0" smtClean="0"/>
+              <a:t>Social </a:t>
+            </a:r>
+            <a:r>
+              <a:rPr lang="en-US" sz="2400" dirty="0" smtClean="0"/>
+              <a:t>Network</a:t>
+            </a:r>
+            <a:r>
+              <a:rPr lang="en-US" sz="2400" dirty="0" smtClean="0"/>
+              <a:t>: C++14 </a:t>
+            </a:r>
+            <a:r>
+              <a:rPr lang="en-US" sz="2400" dirty="0" err="1" smtClean="0"/>
+              <a:t>microservices</a:t>
+            </a:r>
+            <a:r>
+              <a:rPr lang="en-US" sz="2400" dirty="0" smtClean="0"/>
+              <a:t>, Apache Thrift RPC, </a:t>
+            </a:r>
+            <a:r>
+              <a:rPr lang="en-US" sz="2400" dirty="0" err="1" smtClean="0"/>
+              <a:t>Lua</a:t>
+            </a:r>
+            <a:r>
+              <a:rPr lang="en-US" sz="2400" dirty="0" smtClean="0"/>
+              <a:t>/</a:t>
+            </a:r>
+            <a:r>
+              <a:rPr lang="en-US" sz="2400" dirty="0" err="1" smtClean="0"/>
+              <a:t>OpenResty</a:t>
+            </a:r>
+            <a:r>
+              <a:rPr lang="en-US" sz="2400" dirty="0" smtClean="0"/>
+              <a:t> frontend, </a:t>
+            </a:r>
+            <a:r>
+              <a:rPr lang="en-US" sz="2400" dirty="0" err="1" smtClean="0"/>
+              <a:t>Docker</a:t>
+            </a:r>
+            <a:r>
+              <a:rPr lang="en-US" sz="2400" dirty="0" smtClean="0"/>
+              <a:t> Compose, </a:t>
+            </a:r>
+            <a:r>
+              <a:rPr lang="en-US" sz="2400" dirty="0" err="1" smtClean="0"/>
+              <a:t>Docker</a:t>
+            </a:r>
+            <a:r>
+              <a:rPr lang="en-US" sz="2400" dirty="0" smtClean="0"/>
+              <a:t> Swarm, </a:t>
+            </a:r>
+            <a:r>
+              <a:rPr lang="en-US" sz="2400" dirty="0" err="1" smtClean="0"/>
+              <a:t>MongoDB</a:t>
+            </a:r>
+            <a:r>
+              <a:rPr lang="en-US" sz="2400" dirty="0" smtClean="0"/>
+              <a:t>, </a:t>
+            </a:r>
+            <a:r>
+              <a:rPr lang="en-US" sz="2400" dirty="0" err="1" smtClean="0"/>
+              <a:t>Redis</a:t>
+            </a:r>
+            <a:r>
+              <a:rPr lang="en-US" sz="2400" dirty="0" smtClean="0"/>
+              <a:t>, </a:t>
+            </a:r>
+            <a:r>
+              <a:rPr lang="en-US" sz="2400" dirty="0" err="1" smtClean="0"/>
+              <a:t>Memcached</a:t>
+            </a:r>
+            <a:r>
+              <a:rPr lang="en-US" sz="2400" dirty="0" smtClean="0"/>
+              <a:t>, </a:t>
+            </a:r>
+            <a:r>
+              <a:rPr lang="en-US" sz="2400" dirty="0" err="1" smtClean="0"/>
+              <a:t>RabbitMQ</a:t>
+            </a:r>
+            <a:r>
+              <a:rPr lang="en-US" sz="2400" smtClean="0"/>
+              <a:t>, Jaeger</a:t>
+            </a:r>
             <a:endParaRPr lang="en-US" sz="2400" b="1" dirty="0"/>
           </a:p>
         </p:txBody>
@@ -8206,11 +8301,7 @@
           <a:p>
             <a:r>
               <a:rPr lang="en-US" sz="2400" dirty="0" smtClean="0"/>
-              <a:t>(</a:t>
-            </a:r>
-            <a:r>
-              <a:rPr lang="en-US" sz="2400" dirty="0" smtClean="0"/>
-              <a:t>2018). </a:t>
+              <a:t>(2018). </a:t>
             </a:r>
             <a:r>
               <a:rPr lang="en-US" sz="2400" dirty="0" err="1" smtClean="0"/>
@@ -8226,13 +8317,7 @@
               <a:rPr lang="en-US" sz="2400" dirty="0" smtClean="0">
                 <a:hlinkClick r:id="rId2"/>
               </a:rPr>
-              <a:t>https://</a:t>
-            </a:r>
-            <a:r>
-              <a:rPr lang="en-US" sz="2400" dirty="0" smtClean="0">
-                <a:hlinkClick r:id="rId2"/>
-              </a:rPr>
-              <a:t>github.com/descartesresearch/teastore</a:t>
+              <a:t>https://github.com/descartesresearch/teastore</a:t>
             </a:r>
             <a:endParaRPr lang="en-US" sz="2400" dirty="0" smtClean="0"/>
           </a:p>
@@ -8381,13 +8466,7 @@
               <a:rPr lang="en-US" sz="2400" dirty="0" smtClean="0">
                 <a:hlinkClick r:id="rId2"/>
               </a:rPr>
-              <a:t>https://</a:t>
-            </a:r>
-            <a:r>
-              <a:rPr lang="en-US" sz="2400" dirty="0" smtClean="0">
-                <a:hlinkClick r:id="rId2"/>
-              </a:rPr>
-              <a:t>github.com/ocp-power-demos/sock-shop-demo</a:t>
+              <a:t>https://github.com/ocp-power-demos/sock-shop-demo</a:t>
             </a:r>
             <a:endParaRPr lang="en-US" sz="2400" dirty="0" smtClean="0"/>
           </a:p>
@@ -8463,13 +8542,7 @@
               <a:rPr lang="en-US" sz="2400" dirty="0" smtClean="0">
                 <a:hlinkClick r:id="rId2"/>
               </a:rPr>
-              <a:t>https://</a:t>
-            </a:r>
-            <a:r>
-              <a:rPr lang="en-US" sz="2400" dirty="0" smtClean="0">
-                <a:hlinkClick r:id="rId2"/>
-              </a:rPr>
-              <a:t>github.com/mybatis/jpetstore-6</a:t>
+              <a:t>https://github.com/mybatis/jpetstore-6</a:t>
             </a:r>
             <a:endParaRPr lang="en-US" sz="2400" dirty="0" smtClean="0"/>
           </a:p>
@@ -8545,13 +8618,7 @@
               <a:rPr lang="en-US" sz="2400" dirty="0" smtClean="0">
                 <a:hlinkClick r:id="rId2"/>
               </a:rPr>
-              <a:t>https://</a:t>
-            </a:r>
-            <a:r>
-              <a:rPr lang="en-US" sz="2400" dirty="0" smtClean="0">
-                <a:hlinkClick r:id="rId2"/>
-              </a:rPr>
-              <a:t>github.com/spring-petclinic/spring-petclinic-microservices</a:t>
+              <a:t>https://github.com/spring-petclinic/spring-petclinic-microservices</a:t>
             </a:r>
             <a:endParaRPr lang="en-US" sz="2400" dirty="0" smtClean="0"/>
           </a:p>
@@ -8627,13 +8694,7 @@
               <a:rPr lang="en-US" sz="2400" dirty="0" smtClean="0">
                 <a:hlinkClick r:id="rId2"/>
               </a:rPr>
-              <a:t>https://</a:t>
-            </a:r>
-            <a:r>
-              <a:rPr lang="en-US" sz="2400" dirty="0" smtClean="0">
-                <a:hlinkClick r:id="rId2"/>
-              </a:rPr>
-              <a:t>github.com/mSvcBench/muBench</a:t>
+              <a:t>https://github.com/mSvcBench/muBench</a:t>
             </a:r>
             <a:endParaRPr lang="en-US" sz="2400" dirty="0" smtClean="0"/>
           </a:p>

--- a/Microservices/01.1. Introduction To Microservices.pptx
+++ b/Microservices/01.1. Introduction To Microservices.pptx
@@ -49,9 +49,9 @@
     <p:sldId id="686" r:id="rId40"/>
     <p:sldId id="688" r:id="rId41"/>
     <p:sldId id="689" r:id="rId42"/>
-    <p:sldId id="690" r:id="rId43"/>
-    <p:sldId id="691" r:id="rId44"/>
-    <p:sldId id="692" r:id="rId45"/>
+    <p:sldId id="691" r:id="rId43"/>
+    <p:sldId id="692" r:id="rId44"/>
+    <p:sldId id="694" r:id="rId45"/>
     <p:sldId id="693" r:id="rId46"/>
     <p:sldId id="516" r:id="rId47"/>
   </p:sldIdLst>
@@ -7861,127 +7861,213 @@
           <a:lstStyle/>
           <a:p>
             <a:r>
-              <a:rPr lang="en-US" sz="2400" b="1" dirty="0" smtClean="0"/>
+              <a:rPr lang="en-US" sz="2200" b="1" dirty="0" smtClean="0"/>
               <a:t>Yu </a:t>
             </a:r>
             <a:r>
-              <a:rPr lang="en-US" sz="2400" b="1" dirty="0" err="1" smtClean="0"/>
+              <a:rPr lang="en-US" sz="2200" b="1" dirty="0" err="1" smtClean="0"/>
               <a:t>Gan</a:t>
             </a:r>
             <a:r>
-              <a:rPr lang="en-US" sz="2400" b="1" dirty="0" smtClean="0"/>
+              <a:rPr lang="en-US" sz="2200" b="1" dirty="0" smtClean="0"/>
               <a:t> et al. (2019). An Open-Source Benchmark Suite for </a:t>
             </a:r>
             <a:r>
-              <a:rPr lang="en-US" sz="2400" b="1" dirty="0" err="1" smtClean="0"/>
+              <a:rPr lang="en-US" sz="2200" b="1" dirty="0" err="1" smtClean="0"/>
               <a:t>Microservices</a:t>
             </a:r>
             <a:r>
-              <a:rPr lang="en-US" sz="2400" b="1" dirty="0" smtClean="0"/>
+              <a:rPr lang="en-US" sz="2200" b="1" dirty="0" smtClean="0"/>
               <a:t> and Their Hardware-Software Implications for Cloud &amp; Edge Systems.</a:t>
             </a:r>
           </a:p>
           <a:p>
             <a:r>
-              <a:rPr lang="en-US" sz="2400" dirty="0" smtClean="0">
+              <a:rPr lang="en-US" sz="2200" dirty="0" smtClean="0">
                 <a:hlinkClick r:id="rId2"/>
               </a:rPr>
               <a:t>https://</a:t>
             </a:r>
             <a:r>
-              <a:rPr lang="en-US" sz="2400" dirty="0" smtClean="0">
+              <a:rPr lang="en-US" sz="2200" dirty="0" smtClean="0">
                 <a:hlinkClick r:id="rId2"/>
               </a:rPr>
               <a:t>github.com/delimitrou/DeathStarBench</a:t>
             </a:r>
-            <a:endParaRPr lang="en-US" sz="2400" dirty="0" smtClean="0"/>
-          </a:p>
-          <a:p>
-            <a:r>
-              <a:rPr lang="en-US" sz="2400" dirty="0" smtClean="0"/>
+            <a:endParaRPr lang="en-US" sz="2200" dirty="0" smtClean="0"/>
+          </a:p>
+          <a:p>
+            <a:r>
+              <a:rPr lang="en-US" sz="2200" b="1" dirty="0" smtClean="0"/>
               <a:t>Social </a:t>
             </a:r>
             <a:r>
-              <a:rPr lang="en-US" sz="2400" dirty="0" smtClean="0"/>
+              <a:rPr lang="en-US" sz="2200" b="1" dirty="0" smtClean="0"/>
               <a:t>Network</a:t>
             </a:r>
             <a:r>
-              <a:rPr lang="en-US" sz="2400" dirty="0" smtClean="0"/>
-              <a:t>: C++14 </a:t>
-            </a:r>
-            <a:r>
-              <a:rPr lang="en-US" sz="2400" dirty="0" err="1" smtClean="0"/>
-              <a:t>microservices</a:t>
-            </a:r>
-            <a:r>
-              <a:rPr lang="en-US" sz="2400" dirty="0" smtClean="0"/>
-              <a:t>, Apache Thrift RPC, </a:t>
-            </a:r>
-            <a:r>
-              <a:rPr lang="en-US" sz="2400" dirty="0" err="1" smtClean="0"/>
+              <a:rPr lang="en-US" sz="2200" dirty="0" smtClean="0"/>
+              <a:t>: C</a:t>
+            </a:r>
+            <a:r>
+              <a:rPr lang="en-US" sz="2200" dirty="0" smtClean="0"/>
+              <a:t>++, </a:t>
+            </a:r>
+            <a:r>
+              <a:rPr lang="en-US" sz="2200" dirty="0" smtClean="0"/>
+              <a:t>Apache Thrift RPC, </a:t>
+            </a:r>
+            <a:r>
+              <a:rPr lang="en-US" sz="2200" dirty="0" err="1" smtClean="0"/>
               <a:t>Lua</a:t>
             </a:r>
             <a:r>
-              <a:rPr lang="en-US" sz="2400" dirty="0" smtClean="0"/>
+              <a:rPr lang="en-US" sz="2200" dirty="0" smtClean="0"/>
               <a:t>/</a:t>
             </a:r>
             <a:r>
-              <a:rPr lang="en-US" sz="2400" dirty="0" err="1" smtClean="0"/>
+              <a:rPr lang="en-US" sz="2200" dirty="0" err="1" smtClean="0"/>
               <a:t>OpenResty</a:t>
             </a:r>
             <a:r>
-              <a:rPr lang="en-US" sz="2400" dirty="0" smtClean="0"/>
+              <a:rPr lang="en-US" sz="2200" dirty="0" smtClean="0"/>
               <a:t> frontend, </a:t>
             </a:r>
             <a:r>
-              <a:rPr lang="en-US" sz="2400" dirty="0" err="1" smtClean="0"/>
+              <a:rPr lang="en-US" sz="2200" dirty="0" err="1" smtClean="0"/>
+              <a:t>MongoDB</a:t>
+            </a:r>
+            <a:r>
+              <a:rPr lang="en-US" sz="2200" dirty="0" smtClean="0"/>
+              <a:t>, </a:t>
+            </a:r>
+            <a:r>
+              <a:rPr lang="en-US" sz="2200" dirty="0" err="1" smtClean="0"/>
+              <a:t>Redis</a:t>
+            </a:r>
+            <a:r>
+              <a:rPr lang="en-US" sz="2200" dirty="0" smtClean="0"/>
+              <a:t>, </a:t>
+            </a:r>
+            <a:r>
+              <a:rPr lang="en-US" sz="2200" dirty="0" err="1" smtClean="0"/>
+              <a:t>Memcached</a:t>
+            </a:r>
+            <a:r>
+              <a:rPr lang="en-US" sz="2200" dirty="0" smtClean="0"/>
+              <a:t>, </a:t>
+            </a:r>
+            <a:r>
+              <a:rPr lang="en-US" sz="2200" dirty="0" err="1" smtClean="0"/>
+              <a:t>RabbitMQ</a:t>
+            </a:r>
+            <a:r>
+              <a:rPr lang="en-US" sz="2200" dirty="0" smtClean="0"/>
+              <a:t>, </a:t>
+            </a:r>
+            <a:r>
+              <a:rPr lang="en-US" sz="2200" dirty="0" err="1" smtClean="0"/>
               <a:t>Docker</a:t>
             </a:r>
             <a:r>
-              <a:rPr lang="en-US" sz="2400" dirty="0" smtClean="0"/>
+              <a:rPr lang="en-US" sz="2200" dirty="0" smtClean="0"/>
               <a:t> Compose, </a:t>
             </a:r>
             <a:r>
-              <a:rPr lang="en-US" sz="2400" dirty="0" err="1" smtClean="0"/>
+              <a:rPr lang="en-US" sz="2200" dirty="0" err="1" smtClean="0"/>
               <a:t>Docker</a:t>
             </a:r>
             <a:r>
-              <a:rPr lang="en-US" sz="2400" dirty="0" smtClean="0"/>
-              <a:t> Swarm, </a:t>
-            </a:r>
-            <a:r>
-              <a:rPr lang="en-US" sz="2400" dirty="0" err="1" smtClean="0"/>
+              <a:rPr lang="en-US" sz="2200" dirty="0" smtClean="0"/>
+              <a:t> </a:t>
+            </a:r>
+            <a:r>
+              <a:rPr lang="en-US" sz="2200" dirty="0" smtClean="0"/>
+              <a:t>Swarm, Jaeger, Python init scripts.</a:t>
+            </a:r>
+          </a:p>
+          <a:p>
+            <a:r>
+              <a:rPr lang="en-US" sz="2200" b="1" dirty="0" smtClean="0"/>
+              <a:t>Hotel </a:t>
+            </a:r>
+            <a:r>
+              <a:rPr lang="en-US" sz="2200" b="1" dirty="0" smtClean="0"/>
+              <a:t>Reservation: </a:t>
+            </a:r>
+            <a:r>
+              <a:rPr lang="en-US" sz="2200" dirty="0" smtClean="0"/>
+              <a:t>Go, </a:t>
+            </a:r>
+            <a:r>
+              <a:rPr lang="en-US" sz="2200" dirty="0" err="1" smtClean="0"/>
+              <a:t>gRPC</a:t>
+            </a:r>
+            <a:r>
+              <a:rPr lang="en-US" sz="2200" dirty="0" smtClean="0"/>
+              <a:t>, </a:t>
+            </a:r>
+            <a:r>
+              <a:rPr lang="en-US" sz="2200" dirty="0" err="1" smtClean="0"/>
               <a:t>MongoDB</a:t>
             </a:r>
             <a:r>
-              <a:rPr lang="en-US" sz="2400" dirty="0" smtClean="0"/>
+              <a:rPr lang="en-US" sz="2200" dirty="0" smtClean="0"/>
               <a:t>, </a:t>
             </a:r>
             <a:r>
-              <a:rPr lang="en-US" sz="2400" dirty="0" err="1" smtClean="0"/>
-              <a:t>Redis</a:t>
-            </a:r>
-            <a:r>
-              <a:rPr lang="en-US" sz="2400" dirty="0" smtClean="0"/>
+              <a:rPr lang="en-US" sz="2200" dirty="0" err="1" smtClean="0"/>
+              <a:t>Memcached</a:t>
+            </a:r>
+            <a:r>
+              <a:rPr lang="en-US" sz="2200" dirty="0" smtClean="0"/>
               <a:t>, </a:t>
             </a:r>
             <a:r>
-              <a:rPr lang="en-US" sz="2400" dirty="0" err="1" smtClean="0"/>
-              <a:t>Memcached</a:t>
-            </a:r>
-            <a:r>
-              <a:rPr lang="en-US" sz="2400" dirty="0" smtClean="0"/>
+              <a:rPr lang="en-US" sz="2200" dirty="0" err="1" smtClean="0"/>
+              <a:t>Docker</a:t>
+            </a:r>
+            <a:r>
+              <a:rPr lang="en-US" sz="2200" dirty="0" smtClean="0"/>
               <a:t>, </a:t>
             </a:r>
             <a:r>
-              <a:rPr lang="en-US" sz="2400" dirty="0" err="1" smtClean="0"/>
-              <a:t>RabbitMQ</a:t>
-            </a:r>
-            <a:r>
-              <a:rPr lang="en-US" sz="2400" smtClean="0"/>
-              <a:t>, Jaeger</a:t>
-            </a:r>
-            <a:endParaRPr lang="en-US" sz="2400" b="1" dirty="0"/>
+              <a:rPr lang="en-US" sz="2200" dirty="0" err="1" smtClean="0"/>
+              <a:t>Kubernetes</a:t>
+            </a:r>
+            <a:r>
+              <a:rPr lang="en-US" sz="2200" dirty="0" smtClean="0"/>
+              <a:t>, </a:t>
+            </a:r>
+            <a:r>
+              <a:rPr lang="en-US" sz="2200" dirty="0" err="1" smtClean="0"/>
+              <a:t>OpenShift</a:t>
+            </a:r>
+            <a:r>
+              <a:rPr lang="en-US" sz="2200" dirty="0" smtClean="0"/>
+              <a:t>, </a:t>
+            </a:r>
+            <a:r>
+              <a:rPr lang="en-US" sz="2200" dirty="0" smtClean="0"/>
+              <a:t>Helm</a:t>
+            </a:r>
+            <a:r>
+              <a:rPr lang="en-US" sz="2200" dirty="0" smtClean="0"/>
+              <a:t>, Consul, </a:t>
+            </a:r>
+            <a:r>
+              <a:rPr lang="en-US" sz="2200" dirty="0" err="1" smtClean="0"/>
+              <a:t>OpenTracing</a:t>
+            </a:r>
+            <a:r>
+              <a:rPr lang="en-US" sz="2200" dirty="0" smtClean="0"/>
+              <a:t>, </a:t>
+            </a:r>
+            <a:r>
+              <a:rPr lang="en-US" sz="2200" dirty="0" smtClean="0"/>
+              <a:t>Jaeger.</a:t>
+            </a:r>
+            <a:endParaRPr lang="en-US" sz="2200" b="1" dirty="0"/>
           </a:p>
         </p:txBody>
       </p:sp>
@@ -8057,6 +8143,74 @@
             <a:endParaRPr lang="en-US" sz="2400" dirty="0" smtClean="0"/>
           </a:p>
           <a:p>
+            <a:r>
+              <a:rPr lang="en-US" sz="2400" dirty="0" smtClean="0"/>
+              <a:t>Go, Python, C#, Node.js, </a:t>
+            </a:r>
+            <a:r>
+              <a:rPr lang="en-US" sz="2400" dirty="0" err="1" smtClean="0"/>
+              <a:t>gRPC</a:t>
+            </a:r>
+            <a:r>
+              <a:rPr lang="en-US" sz="2400" dirty="0" smtClean="0"/>
+              <a:t>, </a:t>
+            </a:r>
+            <a:r>
+              <a:rPr lang="en-US" sz="2400" dirty="0" err="1" smtClean="0"/>
+              <a:t>Docker</a:t>
+            </a:r>
+            <a:r>
+              <a:rPr lang="en-US" sz="2400" dirty="0" smtClean="0"/>
+              <a:t>, </a:t>
+            </a:r>
+            <a:r>
+              <a:rPr lang="en-US" sz="2400" dirty="0" err="1" smtClean="0"/>
+              <a:t>Kubernetes</a:t>
+            </a:r>
+            <a:r>
+              <a:rPr lang="en-US" sz="2400" dirty="0" smtClean="0"/>
+              <a:t>, </a:t>
+            </a:r>
+            <a:r>
+              <a:rPr lang="en-US" sz="2400" dirty="0" err="1" smtClean="0"/>
+              <a:t>Skaffold</a:t>
+            </a:r>
+            <a:r>
+              <a:rPr lang="en-US" sz="2400" dirty="0" smtClean="0"/>
+              <a:t>, </a:t>
+            </a:r>
+            <a:r>
+              <a:rPr lang="en-US" sz="2400" dirty="0" err="1" smtClean="0"/>
+              <a:t>Kustomize</a:t>
+            </a:r>
+            <a:r>
+              <a:rPr lang="en-US" sz="2400" dirty="0" smtClean="0"/>
+              <a:t>, Helm, </a:t>
+            </a:r>
+            <a:r>
+              <a:rPr lang="en-US" sz="2400" dirty="0" err="1" smtClean="0"/>
+              <a:t>Terraform</a:t>
+            </a:r>
+            <a:r>
+              <a:rPr lang="en-US" sz="2400" dirty="0" smtClean="0"/>
+              <a:t>, GKE, </a:t>
+            </a:r>
+            <a:r>
+              <a:rPr lang="en-US" sz="2400" dirty="0" err="1" smtClean="0"/>
+              <a:t>Istio</a:t>
+            </a:r>
+            <a:r>
+              <a:rPr lang="en-US" sz="2400" dirty="0" smtClean="0"/>
+              <a:t>, and </a:t>
+            </a:r>
+            <a:r>
+              <a:rPr lang="en-US" sz="2400" dirty="0" err="1" smtClean="0"/>
+              <a:t>Redis</a:t>
+            </a:r>
+            <a:r>
+              <a:rPr lang="en-US" sz="2400" dirty="0" smtClean="0"/>
+              <a:t>.</a:t>
+            </a:r>
             <a:endParaRPr lang="en-US" sz="2400" dirty="0"/>
           </a:p>
         </p:txBody>
@@ -8322,6 +8476,98 @@
             <a:endParaRPr lang="en-US" sz="2400" dirty="0" smtClean="0"/>
           </a:p>
           <a:p>
+            <a:r>
+              <a:rPr lang="en-US" sz="2400" dirty="0" smtClean="0"/>
+              <a:t>Java, Maven, </a:t>
+            </a:r>
+            <a:r>
+              <a:rPr lang="en-US" sz="2400" dirty="0" smtClean="0"/>
+              <a:t>Netflix </a:t>
+            </a:r>
+            <a:r>
+              <a:rPr lang="en-US" sz="2400" dirty="0" smtClean="0"/>
+              <a:t>Ribbon, </a:t>
+            </a:r>
+            <a:r>
+              <a:rPr lang="en-US" sz="2400" dirty="0" err="1" smtClean="0"/>
+              <a:t>MariaDB</a:t>
+            </a:r>
+            <a:r>
+              <a:rPr lang="en-US" sz="2400" dirty="0" smtClean="0"/>
+              <a:t>.</a:t>
+            </a:r>
+          </a:p>
+          <a:p>
+            <a:r>
+              <a:rPr lang="en-US" sz="2400" dirty="0" err="1" smtClean="0"/>
+              <a:t>Docker</a:t>
+            </a:r>
+            <a:r>
+              <a:rPr lang="en-US" sz="2400" dirty="0" smtClean="0"/>
+              <a:t>, </a:t>
+            </a:r>
+            <a:r>
+              <a:rPr lang="en-US" sz="2400" dirty="0" err="1" smtClean="0"/>
+              <a:t>Docker</a:t>
+            </a:r>
+            <a:r>
+              <a:rPr lang="en-US" sz="2400" dirty="0" smtClean="0"/>
+              <a:t> Compose, </a:t>
+            </a:r>
+            <a:r>
+              <a:rPr lang="en-US" sz="2400" dirty="0" err="1" smtClean="0"/>
+              <a:t>Kubernetes</a:t>
+            </a:r>
+            <a:r>
+              <a:rPr lang="en-US" sz="2400" dirty="0" smtClean="0"/>
+              <a:t>, Helm, </a:t>
+            </a:r>
+            <a:r>
+              <a:rPr lang="en-US" sz="2400" dirty="0" err="1" smtClean="0"/>
+              <a:t>Kieker</a:t>
+            </a:r>
+            <a:r>
+              <a:rPr lang="en-US" sz="2400" dirty="0" smtClean="0"/>
+              <a:t>, </a:t>
+            </a:r>
+            <a:r>
+              <a:rPr lang="en-US" sz="2400" dirty="0" err="1" smtClean="0"/>
+              <a:t>OpenTracing</a:t>
+            </a:r>
+            <a:r>
+              <a:rPr lang="en-US" sz="2400" dirty="0" smtClean="0"/>
+              <a:t>, </a:t>
+            </a:r>
+            <a:r>
+              <a:rPr lang="en-US" sz="2400" dirty="0" err="1" smtClean="0"/>
+              <a:t>Istio</a:t>
+            </a:r>
+            <a:r>
+              <a:rPr lang="en-US" sz="2400" dirty="0" smtClean="0"/>
+              <a:t>, </a:t>
+            </a:r>
+            <a:r>
+              <a:rPr lang="en-US" sz="2400" dirty="0" err="1" smtClean="0"/>
+              <a:t>RabbitMQ</a:t>
+            </a:r>
+            <a:r>
+              <a:rPr lang="en-US" sz="2400" dirty="0" smtClean="0"/>
+              <a:t>, LIMBO.</a:t>
+            </a:r>
+          </a:p>
+          <a:p>
+            <a:r>
+              <a:rPr lang="en-US" sz="2400" dirty="0" err="1" smtClean="0"/>
+              <a:t>JMeter</a:t>
+            </a:r>
+            <a:r>
+              <a:rPr lang="en-US" sz="2400" dirty="0" smtClean="0"/>
+              <a:t> and </a:t>
+            </a:r>
+            <a:r>
+              <a:rPr lang="en-US" sz="2400" dirty="0" smtClean="0"/>
+              <a:t>Locust.</a:t>
+            </a:r>
             <a:endParaRPr lang="en-US" sz="2400" dirty="0"/>
           </a:p>
         </p:txBody>
@@ -8393,7 +8639,44 @@
               <a:rPr lang="en-US" sz="2400" dirty="0" smtClean="0">
                 <a:hlinkClick r:id="rId2"/>
               </a:rPr>
-              <a:t>https://istio.io/latest/docs/examples/bookinfo/</a:t>
+              <a:t>https://istio.io/latest/docs/examples/bookinfo</a:t>
+            </a:r>
+            <a:r>
+              <a:rPr lang="en-US" sz="2400" dirty="0" smtClean="0">
+                <a:hlinkClick r:id="rId2"/>
+              </a:rPr>
+              <a:t>/</a:t>
+            </a:r>
+            <a:endParaRPr lang="en-US" sz="2400" dirty="0" smtClean="0"/>
+          </a:p>
+          <a:p>
+            <a:r>
+              <a:rPr lang="en-US" sz="2400" dirty="0" smtClean="0"/>
+              <a:t>Python, Ruby, Java.</a:t>
+            </a:r>
+          </a:p>
+          <a:p>
+            <a:r>
+              <a:rPr lang="en-US" sz="2400" dirty="0" smtClean="0"/>
+              <a:t>Node.js.</a:t>
+            </a:r>
+          </a:p>
+          <a:p>
+            <a:r>
+              <a:rPr lang="en-US" sz="2400" dirty="0" err="1" smtClean="0"/>
+              <a:t>Kubernetes</a:t>
+            </a:r>
+            <a:r>
+              <a:rPr lang="en-US" sz="2400" dirty="0" smtClean="0"/>
+              <a:t> and </a:t>
+            </a:r>
+            <a:r>
+              <a:rPr lang="en-US" sz="2400" dirty="0" err="1" smtClean="0"/>
+              <a:t>Istio</a:t>
+            </a:r>
+            <a:r>
+              <a:rPr lang="en-US" sz="2400" dirty="0" smtClean="0"/>
+              <a:t>.</a:t>
             </a:r>
             <a:endParaRPr lang="en-US" sz="2400" dirty="0" smtClean="0"/>
           </a:p>
@@ -8440,8 +8723,8 @@
           <a:lstStyle/>
           <a:p>
             <a:r>
-              <a:rPr lang="en-US" dirty="0" smtClean="0"/>
-              <a:t>Sock Shop</a:t>
+              <a:rPr lang="en-US" dirty="0" err="1" smtClean="0"/>
+              <a:t>JPetStore</a:t>
             </a:r>
             <a:endParaRPr lang="en-US" dirty="0"/>
           </a:p>
@@ -8466,7 +8749,7 @@
               <a:rPr lang="en-US" sz="2400" dirty="0" smtClean="0">
                 <a:hlinkClick r:id="rId2"/>
               </a:rPr>
-              <a:t>https://github.com/ocp-power-demos/sock-shop-demo</a:t>
+              <a:t>https://github.com/mybatis/jpetstore-6</a:t>
             </a:r>
             <a:endParaRPr lang="en-US" sz="2400" dirty="0" smtClean="0"/>
           </a:p>
@@ -8517,7 +8800,7 @@
           <a:p>
             <a:r>
               <a:rPr lang="en-US" dirty="0" err="1" smtClean="0"/>
-              <a:t>JPetStore</a:t>
+              <a:t>PetClinic</a:t>
             </a:r>
             <a:endParaRPr lang="en-US" dirty="0"/>
           </a:p>
@@ -8542,7 +8825,7 @@
               <a:rPr lang="en-US" sz="2400" dirty="0" smtClean="0">
                 <a:hlinkClick r:id="rId2"/>
               </a:rPr>
-              <a:t>https://github.com/mybatis/jpetstore-6</a:t>
+              <a:t>https://github.com/spring-petclinic/spring-petclinic-microservices</a:t>
             </a:r>
             <a:endParaRPr lang="en-US" sz="2400" dirty="0" smtClean="0"/>
           </a:p>
@@ -8592,8 +8875,8 @@
           <a:lstStyle/>
           <a:p>
             <a:r>
-              <a:rPr lang="en-US" dirty="0" err="1" smtClean="0"/>
-              <a:t>PetClinic</a:t>
+              <a:rPr lang="en-US" dirty="0" smtClean="0"/>
+              <a:t>Sock Shop</a:t>
             </a:r>
             <a:endParaRPr lang="en-US" dirty="0"/>
           </a:p>
@@ -8618,11 +8901,51 @@
               <a:rPr lang="en-US" sz="2400" dirty="0" smtClean="0">
                 <a:hlinkClick r:id="rId2"/>
               </a:rPr>
-              <a:t>https://github.com/spring-petclinic/spring-petclinic-microservices</a:t>
+              <a:t>https://github.com/ocp-power-demos/sock-shop-demo</a:t>
             </a:r>
             <a:endParaRPr lang="en-US" sz="2400" dirty="0" smtClean="0"/>
           </a:p>
           <a:p>
+            <a:r>
+              <a:rPr lang="en-US" sz="2400" dirty="0" smtClean="0"/>
+              <a:t>Spring Boot, </a:t>
+            </a:r>
+            <a:r>
+              <a:rPr lang="en-US" sz="2400" dirty="0" smtClean="0"/>
+              <a:t>Go, Node.js, </a:t>
+            </a:r>
+            <a:r>
+              <a:rPr lang="en-US" sz="2400" dirty="0" err="1" smtClean="0"/>
+              <a:t>MongoDB</a:t>
+            </a:r>
+            <a:r>
+              <a:rPr lang="en-US" sz="2400" dirty="0" smtClean="0"/>
+              <a:t>, </a:t>
+            </a:r>
+            <a:r>
+              <a:rPr lang="en-US" sz="2400" dirty="0" err="1" smtClean="0"/>
+              <a:t>Docker</a:t>
+            </a:r>
+            <a:r>
+              <a:rPr lang="en-US" sz="2400" dirty="0" smtClean="0"/>
+              <a:t>, </a:t>
+            </a:r>
+            <a:r>
+              <a:rPr lang="en-US" sz="2400" dirty="0" err="1" smtClean="0"/>
+              <a:t>Kubernetes</a:t>
+            </a:r>
+            <a:r>
+              <a:rPr lang="en-US" sz="2400" dirty="0" smtClean="0"/>
+              <a:t>, </a:t>
+            </a:r>
+            <a:r>
+              <a:rPr lang="en-US" sz="2400" dirty="0" err="1" smtClean="0"/>
+              <a:t>OpenShift</a:t>
+            </a:r>
+            <a:r>
+              <a:rPr lang="en-US" sz="2400" dirty="0" smtClean="0"/>
+              <a:t>.</a:t>
+            </a:r>
             <a:endParaRPr lang="en-US" sz="2400" dirty="0" smtClean="0"/>
           </a:p>
         </p:txBody>

--- a/Microservices/01.1. Introduction To Microservices.pptx
+++ b/Microservices/01.1. Introduction To Microservices.pptx
@@ -28,28 +28,28 @@
     <p:sldId id="668" r:id="rId19"/>
     <p:sldId id="681" r:id="rId20"/>
     <p:sldId id="682" r:id="rId21"/>
-    <p:sldId id="666" r:id="rId22"/>
-    <p:sldId id="669" r:id="rId23"/>
-    <p:sldId id="595" r:id="rId24"/>
-    <p:sldId id="679" r:id="rId25"/>
-    <p:sldId id="602" r:id="rId26"/>
-    <p:sldId id="603" r:id="rId27"/>
-    <p:sldId id="604" r:id="rId28"/>
-    <p:sldId id="670" r:id="rId29"/>
-    <p:sldId id="671" r:id="rId30"/>
-    <p:sldId id="672" r:id="rId31"/>
-    <p:sldId id="673" r:id="rId32"/>
-    <p:sldId id="674" r:id="rId33"/>
-    <p:sldId id="675" r:id="rId34"/>
-    <p:sldId id="676" r:id="rId35"/>
-    <p:sldId id="677" r:id="rId36"/>
-    <p:sldId id="678" r:id="rId37"/>
-    <p:sldId id="684" r:id="rId38"/>
-    <p:sldId id="685" r:id="rId39"/>
-    <p:sldId id="686" r:id="rId40"/>
-    <p:sldId id="688" r:id="rId41"/>
-    <p:sldId id="689" r:id="rId42"/>
-    <p:sldId id="691" r:id="rId43"/>
+    <p:sldId id="695" r:id="rId22"/>
+    <p:sldId id="666" r:id="rId23"/>
+    <p:sldId id="669" r:id="rId24"/>
+    <p:sldId id="595" r:id="rId25"/>
+    <p:sldId id="679" r:id="rId26"/>
+    <p:sldId id="602" r:id="rId27"/>
+    <p:sldId id="603" r:id="rId28"/>
+    <p:sldId id="604" r:id="rId29"/>
+    <p:sldId id="670" r:id="rId30"/>
+    <p:sldId id="671" r:id="rId31"/>
+    <p:sldId id="672" r:id="rId32"/>
+    <p:sldId id="673" r:id="rId33"/>
+    <p:sldId id="674" r:id="rId34"/>
+    <p:sldId id="675" r:id="rId35"/>
+    <p:sldId id="676" r:id="rId36"/>
+    <p:sldId id="677" r:id="rId37"/>
+    <p:sldId id="678" r:id="rId38"/>
+    <p:sldId id="684" r:id="rId39"/>
+    <p:sldId id="685" r:id="rId40"/>
+    <p:sldId id="686" r:id="rId41"/>
+    <p:sldId id="688" r:id="rId42"/>
+    <p:sldId id="689" r:id="rId43"/>
     <p:sldId id="692" r:id="rId44"/>
     <p:sldId id="694" r:id="rId45"/>
     <p:sldId id="693" r:id="rId46"/>
@@ -268,7 +268,7 @@
             <a:fld id="{2F0940CE-BE1D-4C40-AF8B-3898A4D1F5EC}" type="datetimeFigureOut">
               <a:rPr lang="en-US" smtClean="0"/>
               <a:pPr/>
-              <a:t>7/6/2026</a:t>
+              <a:t>7/7/2026</a:t>
             </a:fld>
             <a:endParaRPr lang="en-US"/>
           </a:p>
@@ -889,7 +889,7 @@
               <a:pPr>
                 <a:defRPr/>
               </a:pPr>
-              <a:t>7/6/2026</a:t>
+              <a:t>7/7/2026</a:t>
             </a:fld>
             <a:endParaRPr lang="en-US"/>
           </a:p>
@@ -1081,7 +1081,7 @@
               <a:pPr>
                 <a:defRPr/>
               </a:pPr>
-              <a:t>7/6/2026</a:t>
+              <a:t>7/7/2026</a:t>
             </a:fld>
             <a:endParaRPr lang="en-US"/>
           </a:p>
@@ -1283,7 +1283,7 @@
               <a:pPr>
                 <a:defRPr/>
               </a:pPr>
-              <a:t>7/6/2026</a:t>
+              <a:t>7/7/2026</a:t>
             </a:fld>
             <a:endParaRPr lang="en-US"/>
           </a:p>
@@ -1475,7 +1475,7 @@
               <a:pPr>
                 <a:defRPr/>
               </a:pPr>
-              <a:t>7/6/2026</a:t>
+              <a:t>7/7/2026</a:t>
             </a:fld>
             <a:endParaRPr lang="en-US"/>
           </a:p>
@@ -1743,7 +1743,7 @@
               <a:pPr>
                 <a:defRPr/>
               </a:pPr>
-              <a:t>7/6/2026</a:t>
+              <a:t>7/7/2026</a:t>
             </a:fld>
             <a:endParaRPr lang="en-US"/>
           </a:p>
@@ -2053,7 +2053,7 @@
               <a:pPr>
                 <a:defRPr/>
               </a:pPr>
-              <a:t>7/6/2026</a:t>
+              <a:t>7/7/2026</a:t>
             </a:fld>
             <a:endParaRPr lang="en-US"/>
           </a:p>
@@ -2497,7 +2497,7 @@
               <a:pPr>
                 <a:defRPr/>
               </a:pPr>
-              <a:t>7/6/2026</a:t>
+              <a:t>7/7/2026</a:t>
             </a:fld>
             <a:endParaRPr lang="en-US"/>
           </a:p>
@@ -2637,7 +2637,7 @@
               <a:pPr>
                 <a:defRPr/>
               </a:pPr>
-              <a:t>7/6/2026</a:t>
+              <a:t>7/7/2026</a:t>
             </a:fld>
             <a:endParaRPr lang="en-US"/>
           </a:p>
@@ -2754,7 +2754,7 @@
               <a:pPr>
                 <a:defRPr/>
               </a:pPr>
-              <a:t>7/6/2026</a:t>
+              <a:t>7/7/2026</a:t>
             </a:fld>
             <a:endParaRPr lang="en-US"/>
           </a:p>
@@ -3053,7 +3053,7 @@
               <a:pPr>
                 <a:defRPr/>
               </a:pPr>
-              <a:t>7/6/2026</a:t>
+              <a:t>7/7/2026</a:t>
             </a:fld>
             <a:endParaRPr lang="en-US"/>
           </a:p>
@@ -3331,7 +3331,7 @@
               <a:pPr>
                 <a:defRPr/>
               </a:pPr>
-              <a:t>7/6/2026</a:t>
+              <a:t>7/7/2026</a:t>
             </a:fld>
             <a:endParaRPr lang="en-US"/>
           </a:p>
@@ -3579,7 +3579,7 @@
               <a:pPr>
                 <a:defRPr/>
               </a:pPr>
-              <a:t>7/6/2026</a:t>
+              <a:t>7/7/2026</a:t>
             </a:fld>
             <a:endParaRPr lang="en-US"/>
           </a:p>
@@ -5691,32 +5691,88 @@
           <a:chExt cx="0" cy="0"/>
         </a:xfrm>
       </p:grpSpPr>
-      <p:pic>
-        <p:nvPicPr>
-          <p:cNvPr id="4" name="Picture 2" descr="https://lh3.ggpht.com/1IfZLL2QDSjZ0wS7sUhaMlsAOS8BBzdR3wZ1WawgRn7KZAM8nEVZYMOUM-lqQb0ikIzp=w300"/>
-          <p:cNvPicPr>
-            <a:picLocks noChangeAspect="1" noChangeArrowheads="1"/>
-          </p:cNvPicPr>
-          <p:nvPr/>
-        </p:nvPicPr>
-        <p:blipFill>
-          <a:blip r:embed="rId2" cstate="print"/>
-          <a:srcRect/>
-          <a:stretch>
-            <a:fillRect/>
-          </a:stretch>
-        </p:blipFill>
-        <p:spPr bwMode="auto">
-          <a:xfrm>
-            <a:off x="3276600" y="1905000"/>
-            <a:ext cx="2857500" cy="2857500"/>
-          </a:xfrm>
-          <a:prstGeom prst="rect">
-            <a:avLst/>
-          </a:prstGeom>
-          <a:noFill/>
-        </p:spPr>
-      </p:pic>
+      <p:sp>
+        <p:nvSpPr>
+          <p:cNvPr id="2" name="Title 1"/>
+          <p:cNvSpPr>
+            <a:spLocks noGrp="1"/>
+          </p:cNvSpPr>
+          <p:nvPr>
+            <p:ph type="title"/>
+          </p:nvPr>
+        </p:nvSpPr>
+        <p:spPr/>
+        <p:txBody>
+          <a:bodyPr/>
+          <a:lstStyle/>
+          <a:p>
+            <a:r>
+              <a:rPr lang="en-US" dirty="0" smtClean="0"/>
+              <a:t>Monolith vs. </a:t>
+            </a:r>
+            <a:r>
+              <a:rPr lang="en-US" dirty="0" err="1" smtClean="0"/>
+              <a:t>Microservices</a:t>
+            </a:r>
+            <a:r>
+              <a:rPr lang="en-US" dirty="0" smtClean="0"/>
+              <a:t>: Key Architectural Differences</a:t>
+            </a:r>
+            <a:endParaRPr lang="en-US" dirty="0"/>
+          </a:p>
+        </p:txBody>
+      </p:sp>
+      <p:sp>
+        <p:nvSpPr>
+          <p:cNvPr id="3" name="Content Placeholder 2"/>
+          <p:cNvSpPr>
+            <a:spLocks noGrp="1"/>
+          </p:cNvSpPr>
+          <p:nvPr>
+            <p:ph idx="1"/>
+          </p:nvPr>
+        </p:nvSpPr>
+        <p:spPr/>
+        <p:txBody>
+          <a:bodyPr/>
+          <a:lstStyle/>
+          <a:p>
+            <a:r>
+              <a:rPr lang="en-US" dirty="0" smtClean="0"/>
+              <a:t>Multiple back-end processes.</a:t>
+            </a:r>
+          </a:p>
+          <a:p>
+            <a:r>
+              <a:rPr lang="en-US" dirty="0" smtClean="0"/>
+              <a:t>Multiple separate databases.</a:t>
+            </a:r>
+          </a:p>
+          <a:p>
+            <a:r>
+              <a:rPr lang="en-US" dirty="0" smtClean="0"/>
+              <a:t>Independent deployment of back-ends and databases.</a:t>
+            </a:r>
+          </a:p>
+          <a:p>
+            <a:r>
+              <a:rPr lang="en-US" dirty="0" smtClean="0"/>
+              <a:t>One front-end. (Possible multiple micro-frontends</a:t>
+            </a:r>
+            <a:r>
+              <a:rPr lang="en-US" dirty="0" smtClean="0"/>
+              <a:t>.)</a:t>
+            </a:r>
+          </a:p>
+          <a:p>
+            <a:r>
+              <a:rPr lang="en-US" dirty="0" smtClean="0"/>
+              <a:t>Possible API gateways.</a:t>
+            </a:r>
+            <a:endParaRPr lang="en-US" dirty="0" smtClean="0"/>
+          </a:p>
+        </p:txBody>
+      </p:sp>
     </p:spTree>
   </p:cSld>
   <p:clrMapOvr>
@@ -5726,939 +5782,6 @@
 </file>
 
 <file path=ppt/slides/slide22.xml><?xml version="1.0" encoding="utf-8"?>
-<p:sld xmlns:a="http://schemas.openxmlformats.org/drawingml/2006/main" xmlns:r="http://schemas.openxmlformats.org/officeDocument/2006/relationships" xmlns:p="http://schemas.openxmlformats.org/presentationml/2006/main">
-  <p:cSld>
-    <p:spTree>
-      <p:nvGrpSpPr>
-        <p:cNvPr id="1" name=""/>
-        <p:cNvGrpSpPr/>
-        <p:nvPr/>
-      </p:nvGrpSpPr>
-      <p:grpSpPr>
-        <a:xfrm>
-          <a:off x="0" y="0"/>
-          <a:ext cx="0" cy="0"/>
-          <a:chOff x="0" y="0"/>
-          <a:chExt cx="0" cy="0"/>
-        </a:xfrm>
-      </p:grpSpPr>
-      <p:sp>
-        <p:nvSpPr>
-          <p:cNvPr id="2" name="Title 1"/>
-          <p:cNvSpPr>
-            <a:spLocks noGrp="1"/>
-          </p:cNvSpPr>
-          <p:nvPr>
-            <p:ph type="title"/>
-          </p:nvPr>
-        </p:nvSpPr>
-        <p:spPr/>
-        <p:txBody>
-          <a:bodyPr/>
-          <a:lstStyle/>
-          <a:p>
-            <a:r>
-              <a:rPr lang="en-US" dirty="0" err="1" smtClean="0"/>
-              <a:t>Microservices</a:t>
-            </a:r>
-            <a:r>
-              <a:rPr lang="en-US" dirty="0" smtClean="0"/>
-              <a:t> Origin</a:t>
-            </a:r>
-            <a:endParaRPr lang="en-US" dirty="0"/>
-          </a:p>
-        </p:txBody>
-      </p:sp>
-      <p:sp>
-        <p:nvSpPr>
-          <p:cNvPr id="3" name="Content Placeholder 2"/>
-          <p:cNvSpPr>
-            <a:spLocks noGrp="1"/>
-          </p:cNvSpPr>
-          <p:nvPr>
-            <p:ph idx="1"/>
-          </p:nvPr>
-        </p:nvSpPr>
-        <p:spPr/>
-        <p:txBody>
-          <a:bodyPr/>
-          <a:lstStyle/>
-          <a:p>
-            <a:r>
-              <a:rPr lang="en-US" sz="2400" dirty="0" smtClean="0"/>
-              <a:t>Domain-driven design. Continuous delivery. On-demand virtualization. Infrastructure automation. Small autonomous teams. Systems at scale.</a:t>
-            </a:r>
-          </a:p>
-          <a:p>
-            <a:r>
-              <a:rPr lang="en-US" sz="2400" dirty="0" err="1" smtClean="0"/>
-              <a:t>Microservices</a:t>
-            </a:r>
-            <a:r>
-              <a:rPr lang="en-US" sz="2400" dirty="0" smtClean="0"/>
-              <a:t> have </a:t>
-            </a:r>
-            <a:r>
-              <a:rPr lang="en-US" sz="2400" i="1" dirty="0" smtClean="0">
-                <a:solidFill>
-                  <a:srgbClr val="C00000"/>
-                </a:solidFill>
-              </a:rPr>
-              <a:t>emerged</a:t>
-            </a:r>
-            <a:r>
-              <a:rPr lang="en-US" sz="2400" dirty="0" smtClean="0"/>
-              <a:t> from this world.</a:t>
-            </a:r>
-          </a:p>
-          <a:p>
-            <a:r>
-              <a:rPr lang="en-US" sz="2400" dirty="0" smtClean="0"/>
-              <a:t>They weren’t invented or described before the fact; they emerged as a trend, or a pattern, </a:t>
-            </a:r>
-            <a:r>
-              <a:rPr lang="en-US" sz="2400" i="1" dirty="0" smtClean="0">
-                <a:solidFill>
-                  <a:srgbClr val="C00000"/>
-                </a:solidFill>
-              </a:rPr>
-              <a:t>from real-world use</a:t>
-            </a:r>
-            <a:r>
-              <a:rPr lang="en-US" sz="2400" dirty="0" smtClean="0"/>
-              <a:t>.</a:t>
-            </a:r>
-          </a:p>
-        </p:txBody>
-      </p:sp>
-    </p:spTree>
-  </p:cSld>
-  <p:clrMapOvr>
-    <a:masterClrMapping/>
-  </p:clrMapOvr>
-</p:sld>
-</file>
-
-<file path=ppt/slides/slide23.xml><?xml version="1.0" encoding="utf-8"?>
-<p:sld xmlns:a="http://schemas.openxmlformats.org/drawingml/2006/main" xmlns:r="http://schemas.openxmlformats.org/officeDocument/2006/relationships" xmlns:p="http://schemas.openxmlformats.org/presentationml/2006/main">
-  <p:cSld>
-    <p:spTree>
-      <p:nvGrpSpPr>
-        <p:cNvPr id="1" name=""/>
-        <p:cNvGrpSpPr/>
-        <p:nvPr/>
-      </p:nvGrpSpPr>
-      <p:grpSpPr>
-        <a:xfrm>
-          <a:off x="0" y="0"/>
-          <a:ext cx="0" cy="0"/>
-          <a:chOff x="0" y="0"/>
-          <a:chExt cx="0" cy="0"/>
-        </a:xfrm>
-      </p:grpSpPr>
-      <p:sp>
-        <p:nvSpPr>
-          <p:cNvPr id="2" name="Title 1"/>
-          <p:cNvSpPr>
-            <a:spLocks noGrp="1"/>
-          </p:cNvSpPr>
-          <p:nvPr>
-            <p:ph type="title"/>
-          </p:nvPr>
-        </p:nvSpPr>
-        <p:spPr/>
-        <p:txBody>
-          <a:bodyPr/>
-          <a:lstStyle/>
-          <a:p>
-            <a:r>
-              <a:rPr lang="en-US" dirty="0" smtClean="0"/>
-              <a:t>Why </a:t>
-            </a:r>
-            <a:r>
-              <a:rPr lang="en-US" dirty="0" err="1" smtClean="0"/>
-              <a:t>Microservices</a:t>
-            </a:r>
-            <a:r>
-              <a:rPr lang="en-US" dirty="0" smtClean="0"/>
-              <a:t>?</a:t>
-            </a:r>
-            <a:endParaRPr lang="en-US" dirty="0"/>
-          </a:p>
-        </p:txBody>
-      </p:sp>
-      <p:sp>
-        <p:nvSpPr>
-          <p:cNvPr id="3" name="Content Placeholder 2"/>
-          <p:cNvSpPr>
-            <a:spLocks noGrp="1"/>
-          </p:cNvSpPr>
-          <p:nvPr>
-            <p:ph idx="1"/>
-          </p:nvPr>
-        </p:nvSpPr>
-        <p:spPr/>
-        <p:txBody>
-          <a:bodyPr/>
-          <a:lstStyle/>
-          <a:p>
-            <a:r>
-              <a:rPr lang="en-US" sz="2200" dirty="0" smtClean="0">
-                <a:hlinkClick r:id="rId2"/>
-              </a:rPr>
-              <a:t>https://martinfowler.com/articles/microservice-trade-offs.html</a:t>
-            </a:r>
-            <a:endParaRPr lang="en-US" sz="2200" dirty="0" smtClean="0"/>
-          </a:p>
-          <a:p>
-            <a:r>
-              <a:rPr lang="en-US" sz="2200" i="1" dirty="0" smtClean="0">
-                <a:solidFill>
-                  <a:srgbClr val="C00000"/>
-                </a:solidFill>
-              </a:rPr>
-              <a:t>Strong Module Boundaries</a:t>
-            </a:r>
-            <a:r>
-              <a:rPr lang="en-US" sz="2200" dirty="0" smtClean="0"/>
-              <a:t>: </a:t>
-            </a:r>
-            <a:r>
-              <a:rPr lang="en-US" sz="2200" dirty="0" err="1" smtClean="0"/>
-              <a:t>Microservices</a:t>
-            </a:r>
-            <a:r>
-              <a:rPr lang="en-US" sz="2200" dirty="0" smtClean="0"/>
-              <a:t> reinforce modular structure, which is particularly important for larger teams.</a:t>
-            </a:r>
-          </a:p>
-          <a:p>
-            <a:r>
-              <a:rPr lang="en-US" sz="2200" i="1" dirty="0" smtClean="0">
-                <a:solidFill>
-                  <a:srgbClr val="C00000"/>
-                </a:solidFill>
-              </a:rPr>
-              <a:t>Independent Deployment</a:t>
-            </a:r>
-            <a:r>
-              <a:rPr lang="en-US" sz="2200" dirty="0" smtClean="0"/>
-              <a:t>: Simple services are easier to deploy, and since they are autonomous, are less likely to cause system failures when they go wrong.</a:t>
-            </a:r>
-          </a:p>
-          <a:p>
-            <a:r>
-              <a:rPr lang="en-US" sz="2200" i="1" dirty="0" smtClean="0">
-                <a:solidFill>
-                  <a:srgbClr val="C00000"/>
-                </a:solidFill>
-              </a:rPr>
-              <a:t>Technology Diversity</a:t>
-            </a:r>
-            <a:r>
-              <a:rPr lang="en-US" sz="2200" dirty="0" smtClean="0"/>
-              <a:t>: With </a:t>
-            </a:r>
-            <a:r>
-              <a:rPr lang="en-US" sz="2200" dirty="0" err="1" smtClean="0"/>
-              <a:t>microservices</a:t>
-            </a:r>
-            <a:r>
-              <a:rPr lang="en-US" sz="2200" dirty="0" smtClean="0"/>
-              <a:t> you can mix multiple languages, development frameworks and data-storage technologies.</a:t>
-            </a:r>
-          </a:p>
-        </p:txBody>
-      </p:sp>
-    </p:spTree>
-  </p:cSld>
-  <p:clrMapOvr>
-    <a:masterClrMapping/>
-  </p:clrMapOvr>
-</p:sld>
-</file>
-
-<file path=ppt/slides/slide24.xml><?xml version="1.0" encoding="utf-8"?>
-<p:sld xmlns:a="http://schemas.openxmlformats.org/drawingml/2006/main" xmlns:r="http://schemas.openxmlformats.org/officeDocument/2006/relationships" xmlns:p="http://schemas.openxmlformats.org/presentationml/2006/main">
-  <p:cSld>
-    <p:spTree>
-      <p:nvGrpSpPr>
-        <p:cNvPr id="1" name=""/>
-        <p:cNvGrpSpPr/>
-        <p:nvPr/>
-      </p:nvGrpSpPr>
-      <p:grpSpPr>
-        <a:xfrm>
-          <a:off x="0" y="0"/>
-          <a:ext cx="0" cy="0"/>
-          <a:chOff x="0" y="0"/>
-          <a:chExt cx="0" cy="0"/>
-        </a:xfrm>
-      </p:grpSpPr>
-      <p:sp>
-        <p:nvSpPr>
-          <p:cNvPr id="2" name="Title 1"/>
-          <p:cNvSpPr>
-            <a:spLocks noGrp="1"/>
-          </p:cNvSpPr>
-          <p:nvPr>
-            <p:ph type="title"/>
-          </p:nvPr>
-        </p:nvSpPr>
-        <p:spPr/>
-        <p:txBody>
-          <a:bodyPr/>
-          <a:lstStyle/>
-          <a:p>
-            <a:r>
-              <a:rPr lang="en-US" sz="4200" dirty="0" smtClean="0"/>
-              <a:t>Why </a:t>
-            </a:r>
-            <a:r>
-              <a:rPr lang="en-US" sz="4200" dirty="0" err="1" smtClean="0"/>
-              <a:t>Microservices</a:t>
-            </a:r>
-            <a:r>
-              <a:rPr lang="en-US" sz="4200" dirty="0" smtClean="0"/>
-              <a:t>? (My Opinion)</a:t>
-            </a:r>
-            <a:endParaRPr lang="en-US" sz="4200" dirty="0"/>
-          </a:p>
-        </p:txBody>
-      </p:sp>
-      <p:sp>
-        <p:nvSpPr>
-          <p:cNvPr id="3" name="Content Placeholder 2"/>
-          <p:cNvSpPr>
-            <a:spLocks noGrp="1"/>
-          </p:cNvSpPr>
-          <p:nvPr>
-            <p:ph idx="1"/>
-          </p:nvPr>
-        </p:nvSpPr>
-        <p:spPr/>
-        <p:txBody>
-          <a:bodyPr/>
-          <a:lstStyle/>
-          <a:p>
-            <a:r>
-              <a:rPr lang="en-US" sz="1800" b="1" dirty="0" smtClean="0"/>
-              <a:t>Reason 1</a:t>
-            </a:r>
-            <a:r>
-              <a:rPr lang="en-US" sz="1800" dirty="0" smtClean="0"/>
-              <a:t>: You want to have several </a:t>
-            </a:r>
-            <a:r>
-              <a:rPr lang="en-US" sz="1800" b="1" dirty="0" smtClean="0"/>
-              <a:t>independent development teams</a:t>
-            </a:r>
-            <a:r>
-              <a:rPr lang="en-US" sz="1800" dirty="0" smtClean="0"/>
-              <a:t>.</a:t>
-            </a:r>
-          </a:p>
-          <a:p>
-            <a:r>
-              <a:rPr lang="en-US" sz="1800" b="1" dirty="0" smtClean="0"/>
-              <a:t>Reason 2</a:t>
-            </a:r>
-            <a:r>
-              <a:rPr lang="en-US" sz="1800" dirty="0" smtClean="0"/>
-              <a:t>: You want or your client wants to have </a:t>
-            </a:r>
-            <a:r>
-              <a:rPr lang="en-US" sz="1800" b="1" dirty="0" smtClean="0"/>
-              <a:t>a faster and modern UI (i.e. SPA)</a:t>
-            </a:r>
-            <a:r>
-              <a:rPr lang="en-US" sz="1800" dirty="0" smtClean="0"/>
-              <a:t> that is </a:t>
-            </a:r>
-            <a:r>
-              <a:rPr lang="en-US" sz="1800" u="sng" dirty="0" smtClean="0"/>
-              <a:t>totally decoupled</a:t>
-            </a:r>
-            <a:r>
-              <a:rPr lang="en-US" sz="1800" dirty="0" smtClean="0"/>
-              <a:t> from the other parts of the system.</a:t>
-            </a:r>
-          </a:p>
-          <a:p>
-            <a:r>
-              <a:rPr lang="en-US" sz="1800" b="1" dirty="0" smtClean="0"/>
-              <a:t>Reason 3</a:t>
-            </a:r>
-            <a:r>
-              <a:rPr lang="en-US" sz="1800" dirty="0" smtClean="0"/>
-              <a:t>: You want or your client wants that a part of your system (e.g. user store and authentication) can be </a:t>
-            </a:r>
-            <a:r>
-              <a:rPr lang="en-US" sz="1800" b="1" dirty="0" smtClean="0"/>
-              <a:t>shared among or reused by multiple different systems</a:t>
-            </a:r>
-            <a:r>
-              <a:rPr lang="en-US" sz="1800" dirty="0" smtClean="0"/>
-              <a:t>.</a:t>
-            </a:r>
-          </a:p>
-          <a:p>
-            <a:r>
-              <a:rPr lang="en-US" sz="1800" b="1" dirty="0" smtClean="0"/>
-              <a:t>Reason 4</a:t>
-            </a:r>
-            <a:r>
-              <a:rPr lang="en-US" sz="1800" dirty="0" smtClean="0"/>
-              <a:t>: You want or your client wants your system to be able to </a:t>
-            </a:r>
-            <a:r>
-              <a:rPr lang="en-US" sz="1800" b="1" dirty="0" smtClean="0"/>
-              <a:t>scale out easily </a:t>
-            </a:r>
-            <a:r>
-              <a:rPr lang="en-US" sz="1800" b="1" i="1" dirty="0" smtClean="0"/>
-              <a:t>later</a:t>
-            </a:r>
-            <a:r>
-              <a:rPr lang="en-US" sz="1800" dirty="0" smtClean="0"/>
-              <a:t>.</a:t>
-            </a:r>
-          </a:p>
-          <a:p>
-            <a:r>
-              <a:rPr lang="en-US" sz="1800" b="1" dirty="0" smtClean="0"/>
-              <a:t>Reason 5</a:t>
-            </a:r>
-            <a:r>
-              <a:rPr lang="en-US" sz="1800" dirty="0" smtClean="0"/>
-              <a:t>: You want or your client wants that some parts of your system can </a:t>
-            </a:r>
-            <a:r>
-              <a:rPr lang="en-US" sz="1800" b="1" dirty="0" smtClean="0"/>
-              <a:t>be revised or extended or replaced easily </a:t>
-            </a:r>
-            <a:r>
-              <a:rPr lang="en-US" sz="1800" b="1" i="1" dirty="0" smtClean="0"/>
-              <a:t>later</a:t>
-            </a:r>
-            <a:r>
-              <a:rPr lang="en-US" sz="1800" dirty="0" smtClean="0"/>
-              <a:t>.</a:t>
-            </a:r>
-          </a:p>
-        </p:txBody>
-      </p:sp>
-      <p:pic>
-        <p:nvPicPr>
-          <p:cNvPr id="4" name="Picture 4" descr="https://miro.medium.com/max/4000/0*eO07yV9XbK95zYKj.jpg"/>
-          <p:cNvPicPr>
-            <a:picLocks noChangeAspect="1" noChangeArrowheads="1"/>
-          </p:cNvPicPr>
-          <p:nvPr/>
-        </p:nvPicPr>
-        <p:blipFill>
-          <a:blip r:embed="rId2" cstate="print"/>
-          <a:srcRect/>
-          <a:stretch>
-            <a:fillRect/>
-          </a:stretch>
-        </p:blipFill>
-        <p:spPr bwMode="auto">
-          <a:xfrm>
-            <a:off x="3505200" y="4748645"/>
-            <a:ext cx="2208276" cy="1652155"/>
-          </a:xfrm>
-          <a:prstGeom prst="rect">
-            <a:avLst/>
-          </a:prstGeom>
-          <a:noFill/>
-        </p:spPr>
-      </p:pic>
-    </p:spTree>
-  </p:cSld>
-  <p:clrMapOvr>
-    <a:masterClrMapping/>
-  </p:clrMapOvr>
-</p:sld>
-</file>
-
-<file path=ppt/slides/slide25.xml><?xml version="1.0" encoding="utf-8"?>
-<p:sld xmlns:a="http://schemas.openxmlformats.org/drawingml/2006/main" xmlns:r="http://schemas.openxmlformats.org/officeDocument/2006/relationships" xmlns:p="http://schemas.openxmlformats.org/presentationml/2006/main">
-  <p:cSld>
-    <p:spTree>
-      <p:nvGrpSpPr>
-        <p:cNvPr id="1" name=""/>
-        <p:cNvGrpSpPr/>
-        <p:nvPr/>
-      </p:nvGrpSpPr>
-      <p:grpSpPr>
-        <a:xfrm>
-          <a:off x="0" y="0"/>
-          <a:ext cx="0" cy="0"/>
-          <a:chOff x="0" y="0"/>
-          <a:chExt cx="0" cy="0"/>
-        </a:xfrm>
-      </p:grpSpPr>
-      <p:sp>
-        <p:nvSpPr>
-          <p:cNvPr id="2" name="Title 1"/>
-          <p:cNvSpPr>
-            <a:spLocks noGrp="1"/>
-          </p:cNvSpPr>
-          <p:nvPr>
-            <p:ph type="title"/>
-          </p:nvPr>
-        </p:nvSpPr>
-        <p:spPr/>
-        <p:txBody>
-          <a:bodyPr/>
-          <a:lstStyle/>
-          <a:p>
-            <a:r>
-              <a:rPr lang="en-US" dirty="0" err="1" smtClean="0"/>
-              <a:t>Microservice</a:t>
-            </a:r>
-            <a:r>
-              <a:rPr lang="en-US" dirty="0" smtClean="0"/>
-              <a:t> Costs</a:t>
-            </a:r>
-            <a:endParaRPr lang="en-US" dirty="0"/>
-          </a:p>
-        </p:txBody>
-      </p:sp>
-      <p:sp>
-        <p:nvSpPr>
-          <p:cNvPr id="3" name="Content Placeholder 2"/>
-          <p:cNvSpPr>
-            <a:spLocks noGrp="1"/>
-          </p:cNvSpPr>
-          <p:nvPr>
-            <p:ph idx="1"/>
-          </p:nvPr>
-        </p:nvSpPr>
-        <p:spPr/>
-        <p:txBody>
-          <a:bodyPr/>
-          <a:lstStyle/>
-          <a:p>
-            <a:r>
-              <a:rPr lang="en-US" sz="2600" i="1" dirty="0" smtClean="0">
-                <a:solidFill>
-                  <a:srgbClr val="C00000"/>
-                </a:solidFill>
-              </a:rPr>
-              <a:t>Operational Complexity</a:t>
-            </a:r>
-            <a:r>
-              <a:rPr lang="en-US" sz="2600" dirty="0" smtClean="0"/>
-              <a:t>: You need a mature operations team to manage lots of services, which are being redeployed regularly.</a:t>
-            </a:r>
-          </a:p>
-          <a:p>
-            <a:r>
-              <a:rPr lang="en-US" sz="2600" i="1" dirty="0" smtClean="0">
-                <a:solidFill>
-                  <a:srgbClr val="C00000"/>
-                </a:solidFill>
-              </a:rPr>
-              <a:t>Distribution</a:t>
-            </a:r>
-            <a:r>
-              <a:rPr lang="en-US" sz="2600" dirty="0" smtClean="0"/>
-              <a:t>: Distributed systems are harder to program, since remote calls are slow and are always at risk of failure.</a:t>
-            </a:r>
-          </a:p>
-          <a:p>
-            <a:r>
-              <a:rPr lang="en-US" sz="2600" i="1" dirty="0" smtClean="0">
-                <a:solidFill>
-                  <a:srgbClr val="C00000"/>
-                </a:solidFill>
-              </a:rPr>
-              <a:t>Eventual Consistency</a:t>
-            </a:r>
-            <a:r>
-              <a:rPr lang="en-US" sz="2600" dirty="0" smtClean="0"/>
-              <a:t>: Maintaining </a:t>
-            </a:r>
-            <a:r>
-              <a:rPr lang="en-US" sz="2600" u="sng" dirty="0" smtClean="0"/>
-              <a:t>strong consistency is extremely difficult</a:t>
-            </a:r>
-            <a:r>
-              <a:rPr lang="en-US" sz="2600" dirty="0" smtClean="0"/>
-              <a:t> for a distributed system, which means everyone has to manage eventual consistency</a:t>
-            </a:r>
-            <a:r>
-              <a:rPr lang="en-US" sz="2600" dirty="0" smtClean="0"/>
-              <a:t>.</a:t>
-            </a:r>
-            <a:endParaRPr lang="en-US" sz="2600" dirty="0" smtClean="0"/>
-          </a:p>
-        </p:txBody>
-      </p:sp>
-    </p:spTree>
-  </p:cSld>
-  <p:clrMapOvr>
-    <a:masterClrMapping/>
-  </p:clrMapOvr>
-</p:sld>
-</file>
-
-<file path=ppt/slides/slide26.xml><?xml version="1.0" encoding="utf-8"?>
-<p:sld xmlns:a="http://schemas.openxmlformats.org/drawingml/2006/main" xmlns:r="http://schemas.openxmlformats.org/officeDocument/2006/relationships" xmlns:p="http://schemas.openxmlformats.org/presentationml/2006/main">
-  <p:cSld>
-    <p:spTree>
-      <p:nvGrpSpPr>
-        <p:cNvPr id="1" name=""/>
-        <p:cNvGrpSpPr/>
-        <p:nvPr/>
-      </p:nvGrpSpPr>
-      <p:grpSpPr>
-        <a:xfrm>
-          <a:off x="0" y="0"/>
-          <a:ext cx="0" cy="0"/>
-          <a:chOff x="0" y="0"/>
-          <a:chExt cx="0" cy="0"/>
-        </a:xfrm>
-      </p:grpSpPr>
-      <p:sp>
-        <p:nvSpPr>
-          <p:cNvPr id="2" name="Title 1"/>
-          <p:cNvSpPr>
-            <a:spLocks noGrp="1"/>
-          </p:cNvSpPr>
-          <p:nvPr>
-            <p:ph type="title"/>
-          </p:nvPr>
-        </p:nvSpPr>
-        <p:spPr/>
-        <p:txBody>
-          <a:bodyPr/>
-          <a:lstStyle/>
-          <a:p>
-            <a:r>
-              <a:rPr lang="en-US" dirty="0" smtClean="0"/>
-              <a:t>When to Use </a:t>
-            </a:r>
-            <a:r>
-              <a:rPr lang="en-US" dirty="0" err="1" smtClean="0"/>
-              <a:t>Microservices</a:t>
-            </a:r>
-            <a:endParaRPr lang="en-US" dirty="0"/>
-          </a:p>
-        </p:txBody>
-      </p:sp>
-      <p:sp>
-        <p:nvSpPr>
-          <p:cNvPr id="3" name="Content Placeholder 2"/>
-          <p:cNvSpPr>
-            <a:spLocks noGrp="1"/>
-          </p:cNvSpPr>
-          <p:nvPr>
-            <p:ph idx="1"/>
-          </p:nvPr>
-        </p:nvSpPr>
-        <p:spPr/>
-        <p:txBody>
-          <a:bodyPr/>
-          <a:lstStyle/>
-          <a:p>
-            <a:r>
-              <a:rPr lang="en-US" sz="2200" dirty="0" smtClean="0">
-                <a:hlinkClick r:id="rId2"/>
-              </a:rPr>
-              <a:t>https://martinfowler.com/bliki/MicroservicePremium.html</a:t>
-            </a:r>
-            <a:endParaRPr lang="en-US" sz="2200" dirty="0" smtClean="0"/>
-          </a:p>
-          <a:p>
-            <a:r>
-              <a:rPr lang="en-US" sz="2200" i="1" dirty="0" smtClean="0">
-                <a:solidFill>
-                  <a:srgbClr val="C00000"/>
-                </a:solidFill>
-              </a:rPr>
-              <a:t>Is a </a:t>
-            </a:r>
-            <a:r>
-              <a:rPr lang="en-US" sz="2200" i="1" dirty="0" err="1" smtClean="0">
-                <a:solidFill>
-                  <a:srgbClr val="C00000"/>
-                </a:solidFill>
-              </a:rPr>
-              <a:t>microservice</a:t>
-            </a:r>
-            <a:r>
-              <a:rPr lang="en-US" sz="2200" i="1" dirty="0" smtClean="0">
-                <a:solidFill>
-                  <a:srgbClr val="C00000"/>
-                </a:solidFill>
-              </a:rPr>
-              <a:t> architecture a good choice for the system you're working on?</a:t>
-            </a:r>
-          </a:p>
-          <a:p>
-            <a:r>
-              <a:rPr lang="en-US" sz="2200" b="1" dirty="0" smtClean="0"/>
-              <a:t>don't even consider </a:t>
-            </a:r>
-            <a:r>
-              <a:rPr lang="en-US" sz="2200" b="1" dirty="0" err="1" smtClean="0"/>
-              <a:t>microservices</a:t>
-            </a:r>
-            <a:r>
-              <a:rPr lang="en-US" sz="2200" b="1" dirty="0" smtClean="0"/>
-              <a:t> unless you have a system that's </a:t>
-            </a:r>
-            <a:r>
-              <a:rPr lang="en-US" sz="2200" b="1" u="sng" dirty="0" smtClean="0"/>
-              <a:t>too complex to manage as a monolith</a:t>
-            </a:r>
-            <a:r>
-              <a:rPr lang="en-US" sz="2200" dirty="0" smtClean="0"/>
-              <a:t>.</a:t>
-            </a:r>
-          </a:p>
-          <a:p>
-            <a:r>
-              <a:rPr lang="en-US" sz="2200" dirty="0" smtClean="0">
-                <a:hlinkClick r:id="rId3"/>
-              </a:rPr>
-              <a:t>https://martinfowler.com/bliki/MonolithFirst.html</a:t>
-            </a:r>
-            <a:endParaRPr lang="en-US" sz="2200" dirty="0" smtClean="0"/>
-          </a:p>
-          <a:p>
-            <a:r>
-              <a:rPr lang="en-US" sz="2200" dirty="0" smtClean="0"/>
-              <a:t>The complexity that drives us to </a:t>
-            </a:r>
-            <a:r>
-              <a:rPr lang="en-US" sz="2200" dirty="0" err="1" smtClean="0"/>
-              <a:t>microservices</a:t>
-            </a:r>
-            <a:r>
-              <a:rPr lang="en-US" sz="2200" dirty="0" smtClean="0"/>
-              <a:t> can come from many sources including dealing with large teams, multi-tenancy, supporting many user interaction models, allowing different business functions to evolve independently, and scaling.</a:t>
-            </a:r>
-          </a:p>
-          <a:p>
-            <a:r>
-              <a:rPr lang="en-US" sz="2200" dirty="0" smtClean="0"/>
-              <a:t>But the biggest factor is that of sheer size - people finding they have a monolith that's </a:t>
-            </a:r>
-            <a:r>
-              <a:rPr lang="en-US" sz="2200" i="1" dirty="0" smtClean="0">
-                <a:solidFill>
-                  <a:srgbClr val="C00000"/>
-                </a:solidFill>
-              </a:rPr>
-              <a:t>too big to modify and deploy</a:t>
-            </a:r>
-            <a:r>
-              <a:rPr lang="en-US" sz="2200" dirty="0" smtClean="0"/>
-              <a:t>.</a:t>
-            </a:r>
-          </a:p>
-        </p:txBody>
-      </p:sp>
-    </p:spTree>
-  </p:cSld>
-  <p:clrMapOvr>
-    <a:masterClrMapping/>
-  </p:clrMapOvr>
-</p:sld>
-</file>
-
-<file path=ppt/slides/slide27.xml><?xml version="1.0" encoding="utf-8"?>
-<p:sld xmlns:a="http://schemas.openxmlformats.org/drawingml/2006/main" xmlns:r="http://schemas.openxmlformats.org/officeDocument/2006/relationships" xmlns:p="http://schemas.openxmlformats.org/presentationml/2006/main">
-  <p:cSld>
-    <p:spTree>
-      <p:nvGrpSpPr>
-        <p:cNvPr id="1" name=""/>
-        <p:cNvGrpSpPr/>
-        <p:nvPr/>
-      </p:nvGrpSpPr>
-      <p:grpSpPr>
-        <a:xfrm>
-          <a:off x="0" y="0"/>
-          <a:ext cx="0" cy="0"/>
-          <a:chOff x="0" y="0"/>
-          <a:chExt cx="0" cy="0"/>
-        </a:xfrm>
-      </p:grpSpPr>
-      <p:sp>
-        <p:nvSpPr>
-          <p:cNvPr id="2" name="Title 1"/>
-          <p:cNvSpPr>
-            <a:spLocks noGrp="1"/>
-          </p:cNvSpPr>
-          <p:nvPr>
-            <p:ph type="title"/>
-          </p:nvPr>
-        </p:nvSpPr>
-        <p:spPr/>
-        <p:txBody>
-          <a:bodyPr/>
-          <a:lstStyle/>
-          <a:p>
-            <a:r>
-              <a:rPr lang="en-US" dirty="0" smtClean="0"/>
-              <a:t>When Not to Use </a:t>
-            </a:r>
-            <a:r>
-              <a:rPr lang="en-US" dirty="0" err="1" smtClean="0"/>
-              <a:t>Microservices</a:t>
-            </a:r>
-            <a:endParaRPr lang="en-US" dirty="0"/>
-          </a:p>
-        </p:txBody>
-      </p:sp>
-      <p:sp>
-        <p:nvSpPr>
-          <p:cNvPr id="3" name="Content Placeholder 2"/>
-          <p:cNvSpPr>
-            <a:spLocks noGrp="1"/>
-          </p:cNvSpPr>
-          <p:nvPr>
-            <p:ph idx="1"/>
-          </p:nvPr>
-        </p:nvSpPr>
-        <p:spPr/>
-        <p:txBody>
-          <a:bodyPr/>
-          <a:lstStyle/>
-          <a:p>
-            <a:r>
-              <a:rPr lang="en-US" sz="2000" dirty="0" smtClean="0">
-                <a:hlinkClick r:id="rId2"/>
-              </a:rPr>
-              <a:t>https://martinfowler.com/bliki/MicroservicePremium.html</a:t>
-            </a:r>
-            <a:endParaRPr lang="en-US" sz="2000" dirty="0" smtClean="0"/>
-          </a:p>
-          <a:p>
-            <a:r>
-              <a:rPr lang="en-US" sz="2000" dirty="0" smtClean="0"/>
-              <a:t>The </a:t>
-            </a:r>
-            <a:r>
-              <a:rPr lang="en-US" sz="2000" dirty="0" err="1" smtClean="0"/>
-              <a:t>microservices</a:t>
-            </a:r>
-            <a:r>
-              <a:rPr lang="en-US" sz="2000" dirty="0" smtClean="0"/>
-              <a:t> approach is all about handling a complex system, but in order to do so the approach introduces </a:t>
-            </a:r>
-            <a:r>
-              <a:rPr lang="en-US" sz="2000" i="1" dirty="0" smtClean="0">
-                <a:solidFill>
-                  <a:srgbClr val="C00000"/>
-                </a:solidFill>
-              </a:rPr>
-              <a:t>its own set of complexities</a:t>
-            </a:r>
-            <a:r>
-              <a:rPr lang="en-US" sz="2000" dirty="0" smtClean="0"/>
-              <a:t>.</a:t>
-            </a:r>
-          </a:p>
-          <a:p>
-            <a:r>
-              <a:rPr lang="en-US" sz="2000" dirty="0" smtClean="0"/>
-              <a:t>When you use </a:t>
-            </a:r>
-            <a:r>
-              <a:rPr lang="en-US" sz="2000" dirty="0" err="1" smtClean="0"/>
-              <a:t>microservices</a:t>
-            </a:r>
-            <a:r>
-              <a:rPr lang="en-US" sz="2000" dirty="0" smtClean="0"/>
-              <a:t> you have to work on automated deployment, monitoring, dealing with failure, eventual consistency, and other factors that a distributed system introduces. There are well-known ways to cope with all this, but it's </a:t>
-            </a:r>
-            <a:r>
-              <a:rPr lang="en-US" sz="2000" i="1" dirty="0" smtClean="0">
-                <a:solidFill>
-                  <a:srgbClr val="C00000"/>
-                </a:solidFill>
-              </a:rPr>
-              <a:t>extra effort</a:t>
-            </a:r>
-            <a:r>
-              <a:rPr lang="en-US" sz="2000" dirty="0" smtClean="0"/>
-              <a:t>.</a:t>
-            </a:r>
-          </a:p>
-          <a:p>
-            <a:r>
-              <a:rPr lang="en-US" sz="2000" dirty="0" smtClean="0">
-                <a:hlinkClick r:id="rId3"/>
-              </a:rPr>
-              <a:t>https://martinfowler.com/bliki/MonolithFirst.html</a:t>
-            </a:r>
-          </a:p>
-          <a:p>
-            <a:r>
-              <a:rPr lang="en-US" sz="2000" dirty="0" smtClean="0"/>
-              <a:t>The first reason for this is classic </a:t>
-            </a:r>
-            <a:r>
-              <a:rPr lang="en-US" sz="2000" i="1" dirty="0" err="1" smtClean="0">
-                <a:solidFill>
-                  <a:srgbClr val="C00000"/>
-                </a:solidFill>
-              </a:rPr>
-              <a:t>Yagni</a:t>
-            </a:r>
-            <a:r>
-              <a:rPr lang="en-US" sz="2000" dirty="0" smtClean="0"/>
-              <a:t>.</a:t>
-            </a:r>
-          </a:p>
-          <a:p>
-            <a:r>
-              <a:rPr lang="en-US" sz="2000" dirty="0" smtClean="0"/>
-              <a:t>The second issue with starting with </a:t>
-            </a:r>
-            <a:r>
-              <a:rPr lang="en-US" sz="2000" dirty="0" err="1" smtClean="0"/>
-              <a:t>microservices</a:t>
-            </a:r>
-            <a:r>
-              <a:rPr lang="en-US" sz="2000" dirty="0" smtClean="0"/>
-              <a:t> is that they only work well if you come up with good, </a:t>
-            </a:r>
-            <a:r>
-              <a:rPr lang="en-US" sz="2000" i="1" dirty="0" smtClean="0">
-                <a:solidFill>
-                  <a:srgbClr val="C00000"/>
-                </a:solidFill>
-              </a:rPr>
-              <a:t>stable boundaries between the services</a:t>
-            </a:r>
-            <a:r>
-              <a:rPr lang="en-US" sz="2000" dirty="0" smtClean="0"/>
-              <a:t>.</a:t>
-            </a:r>
-          </a:p>
-          <a:p>
-            <a:r>
-              <a:rPr lang="en-US" sz="2000" dirty="0" smtClean="0"/>
-              <a:t>Any refactoring of functionality between services is much harder than it is in a monolith. But even experienced architects working in familiar domains have great difficulty getting boundaries right at the beginning.</a:t>
-            </a:r>
-          </a:p>
-        </p:txBody>
-      </p:sp>
-    </p:spTree>
-  </p:cSld>
-  <p:clrMapOvr>
-    <a:masterClrMapping/>
-  </p:clrMapOvr>
-</p:sld>
-</file>
-
-<file path=ppt/slides/slide28.xml><?xml version="1.0" encoding="utf-8"?>
 <p:sld xmlns:a="http://schemas.openxmlformats.org/drawingml/2006/main" xmlns:r="http://schemas.openxmlformats.org/officeDocument/2006/relationships" xmlns:p="http://schemas.openxmlformats.org/presentationml/2006/main">
   <p:cSld>
     <p:spTree>
@@ -6709,6 +5832,934 @@
 </p:sld>
 </file>
 
+<file path=ppt/slides/slide23.xml><?xml version="1.0" encoding="utf-8"?>
+<p:sld xmlns:a="http://schemas.openxmlformats.org/drawingml/2006/main" xmlns:r="http://schemas.openxmlformats.org/officeDocument/2006/relationships" xmlns:p="http://schemas.openxmlformats.org/presentationml/2006/main">
+  <p:cSld>
+    <p:spTree>
+      <p:nvGrpSpPr>
+        <p:cNvPr id="1" name=""/>
+        <p:cNvGrpSpPr/>
+        <p:nvPr/>
+      </p:nvGrpSpPr>
+      <p:grpSpPr>
+        <a:xfrm>
+          <a:off x="0" y="0"/>
+          <a:ext cx="0" cy="0"/>
+          <a:chOff x="0" y="0"/>
+          <a:chExt cx="0" cy="0"/>
+        </a:xfrm>
+      </p:grpSpPr>
+      <p:sp>
+        <p:nvSpPr>
+          <p:cNvPr id="2" name="Title 1"/>
+          <p:cNvSpPr>
+            <a:spLocks noGrp="1"/>
+          </p:cNvSpPr>
+          <p:nvPr>
+            <p:ph type="title"/>
+          </p:nvPr>
+        </p:nvSpPr>
+        <p:spPr/>
+        <p:txBody>
+          <a:bodyPr/>
+          <a:lstStyle/>
+          <a:p>
+            <a:r>
+              <a:rPr lang="en-US" dirty="0" err="1" smtClean="0"/>
+              <a:t>Microservices</a:t>
+            </a:r>
+            <a:r>
+              <a:rPr lang="en-US" dirty="0" smtClean="0"/>
+              <a:t> Origin</a:t>
+            </a:r>
+            <a:endParaRPr lang="en-US" dirty="0"/>
+          </a:p>
+        </p:txBody>
+      </p:sp>
+      <p:sp>
+        <p:nvSpPr>
+          <p:cNvPr id="3" name="Content Placeholder 2"/>
+          <p:cNvSpPr>
+            <a:spLocks noGrp="1"/>
+          </p:cNvSpPr>
+          <p:nvPr>
+            <p:ph idx="1"/>
+          </p:nvPr>
+        </p:nvSpPr>
+        <p:spPr/>
+        <p:txBody>
+          <a:bodyPr/>
+          <a:lstStyle/>
+          <a:p>
+            <a:r>
+              <a:rPr lang="en-US" sz="2400" dirty="0" smtClean="0"/>
+              <a:t>Domain-driven design. Continuous delivery. On-demand virtualization. Infrastructure automation. Small autonomous teams. Systems at scale.</a:t>
+            </a:r>
+          </a:p>
+          <a:p>
+            <a:r>
+              <a:rPr lang="en-US" sz="2400" dirty="0" err="1" smtClean="0"/>
+              <a:t>Microservices</a:t>
+            </a:r>
+            <a:r>
+              <a:rPr lang="en-US" sz="2400" dirty="0" smtClean="0"/>
+              <a:t> have </a:t>
+            </a:r>
+            <a:r>
+              <a:rPr lang="en-US" sz="2400" i="1" dirty="0" smtClean="0">
+                <a:solidFill>
+                  <a:srgbClr val="C00000"/>
+                </a:solidFill>
+              </a:rPr>
+              <a:t>emerged</a:t>
+            </a:r>
+            <a:r>
+              <a:rPr lang="en-US" sz="2400" dirty="0" smtClean="0"/>
+              <a:t> from this world.</a:t>
+            </a:r>
+          </a:p>
+          <a:p>
+            <a:r>
+              <a:rPr lang="en-US" sz="2400" dirty="0" smtClean="0"/>
+              <a:t>They weren’t invented or described before the fact; they emerged as a trend, or a pattern, </a:t>
+            </a:r>
+            <a:r>
+              <a:rPr lang="en-US" sz="2400" i="1" dirty="0" smtClean="0">
+                <a:solidFill>
+                  <a:srgbClr val="C00000"/>
+                </a:solidFill>
+              </a:rPr>
+              <a:t>from real-world use</a:t>
+            </a:r>
+            <a:r>
+              <a:rPr lang="en-US" sz="2400" dirty="0" smtClean="0"/>
+              <a:t>.</a:t>
+            </a:r>
+          </a:p>
+        </p:txBody>
+      </p:sp>
+    </p:spTree>
+  </p:cSld>
+  <p:clrMapOvr>
+    <a:masterClrMapping/>
+  </p:clrMapOvr>
+</p:sld>
+</file>
+
+<file path=ppt/slides/slide24.xml><?xml version="1.0" encoding="utf-8"?>
+<p:sld xmlns:a="http://schemas.openxmlformats.org/drawingml/2006/main" xmlns:r="http://schemas.openxmlformats.org/officeDocument/2006/relationships" xmlns:p="http://schemas.openxmlformats.org/presentationml/2006/main">
+  <p:cSld>
+    <p:spTree>
+      <p:nvGrpSpPr>
+        <p:cNvPr id="1" name=""/>
+        <p:cNvGrpSpPr/>
+        <p:nvPr/>
+      </p:nvGrpSpPr>
+      <p:grpSpPr>
+        <a:xfrm>
+          <a:off x="0" y="0"/>
+          <a:ext cx="0" cy="0"/>
+          <a:chOff x="0" y="0"/>
+          <a:chExt cx="0" cy="0"/>
+        </a:xfrm>
+      </p:grpSpPr>
+      <p:sp>
+        <p:nvSpPr>
+          <p:cNvPr id="2" name="Title 1"/>
+          <p:cNvSpPr>
+            <a:spLocks noGrp="1"/>
+          </p:cNvSpPr>
+          <p:nvPr>
+            <p:ph type="title"/>
+          </p:nvPr>
+        </p:nvSpPr>
+        <p:spPr/>
+        <p:txBody>
+          <a:bodyPr/>
+          <a:lstStyle/>
+          <a:p>
+            <a:r>
+              <a:rPr lang="en-US" dirty="0" smtClean="0"/>
+              <a:t>Why </a:t>
+            </a:r>
+            <a:r>
+              <a:rPr lang="en-US" dirty="0" err="1" smtClean="0"/>
+              <a:t>Microservices</a:t>
+            </a:r>
+            <a:r>
+              <a:rPr lang="en-US" dirty="0" smtClean="0"/>
+              <a:t>?</a:t>
+            </a:r>
+            <a:endParaRPr lang="en-US" dirty="0"/>
+          </a:p>
+        </p:txBody>
+      </p:sp>
+      <p:sp>
+        <p:nvSpPr>
+          <p:cNvPr id="3" name="Content Placeholder 2"/>
+          <p:cNvSpPr>
+            <a:spLocks noGrp="1"/>
+          </p:cNvSpPr>
+          <p:nvPr>
+            <p:ph idx="1"/>
+          </p:nvPr>
+        </p:nvSpPr>
+        <p:spPr/>
+        <p:txBody>
+          <a:bodyPr/>
+          <a:lstStyle/>
+          <a:p>
+            <a:r>
+              <a:rPr lang="en-US" sz="2200" dirty="0" smtClean="0">
+                <a:hlinkClick r:id="rId2"/>
+              </a:rPr>
+              <a:t>https://martinfowler.com/articles/microservice-trade-offs.html</a:t>
+            </a:r>
+            <a:endParaRPr lang="en-US" sz="2200" dirty="0" smtClean="0"/>
+          </a:p>
+          <a:p>
+            <a:r>
+              <a:rPr lang="en-US" sz="2200" i="1" dirty="0" smtClean="0">
+                <a:solidFill>
+                  <a:srgbClr val="C00000"/>
+                </a:solidFill>
+              </a:rPr>
+              <a:t>Strong Module Boundaries</a:t>
+            </a:r>
+            <a:r>
+              <a:rPr lang="en-US" sz="2200" dirty="0" smtClean="0"/>
+              <a:t>: </a:t>
+            </a:r>
+            <a:r>
+              <a:rPr lang="en-US" sz="2200" dirty="0" err="1" smtClean="0"/>
+              <a:t>Microservices</a:t>
+            </a:r>
+            <a:r>
+              <a:rPr lang="en-US" sz="2200" dirty="0" smtClean="0"/>
+              <a:t> reinforce modular structure, which is particularly important for larger teams.</a:t>
+            </a:r>
+          </a:p>
+          <a:p>
+            <a:r>
+              <a:rPr lang="en-US" sz="2200" i="1" dirty="0" smtClean="0">
+                <a:solidFill>
+                  <a:srgbClr val="C00000"/>
+                </a:solidFill>
+              </a:rPr>
+              <a:t>Independent Deployment</a:t>
+            </a:r>
+            <a:r>
+              <a:rPr lang="en-US" sz="2200" dirty="0" smtClean="0"/>
+              <a:t>: Simple services are easier to deploy, and since they are autonomous, are less likely to cause system failures when they go wrong.</a:t>
+            </a:r>
+          </a:p>
+          <a:p>
+            <a:r>
+              <a:rPr lang="en-US" sz="2200" i="1" dirty="0" smtClean="0">
+                <a:solidFill>
+                  <a:srgbClr val="C00000"/>
+                </a:solidFill>
+              </a:rPr>
+              <a:t>Technology Diversity</a:t>
+            </a:r>
+            <a:r>
+              <a:rPr lang="en-US" sz="2200" dirty="0" smtClean="0"/>
+              <a:t>: With </a:t>
+            </a:r>
+            <a:r>
+              <a:rPr lang="en-US" sz="2200" dirty="0" err="1" smtClean="0"/>
+              <a:t>microservices</a:t>
+            </a:r>
+            <a:r>
+              <a:rPr lang="en-US" sz="2200" dirty="0" smtClean="0"/>
+              <a:t> you can mix multiple languages, development frameworks and data-storage technologies.</a:t>
+            </a:r>
+          </a:p>
+        </p:txBody>
+      </p:sp>
+    </p:spTree>
+  </p:cSld>
+  <p:clrMapOvr>
+    <a:masterClrMapping/>
+  </p:clrMapOvr>
+</p:sld>
+</file>
+
+<file path=ppt/slides/slide25.xml><?xml version="1.0" encoding="utf-8"?>
+<p:sld xmlns:a="http://schemas.openxmlformats.org/drawingml/2006/main" xmlns:r="http://schemas.openxmlformats.org/officeDocument/2006/relationships" xmlns:p="http://schemas.openxmlformats.org/presentationml/2006/main">
+  <p:cSld>
+    <p:spTree>
+      <p:nvGrpSpPr>
+        <p:cNvPr id="1" name=""/>
+        <p:cNvGrpSpPr/>
+        <p:nvPr/>
+      </p:nvGrpSpPr>
+      <p:grpSpPr>
+        <a:xfrm>
+          <a:off x="0" y="0"/>
+          <a:ext cx="0" cy="0"/>
+          <a:chOff x="0" y="0"/>
+          <a:chExt cx="0" cy="0"/>
+        </a:xfrm>
+      </p:grpSpPr>
+      <p:sp>
+        <p:nvSpPr>
+          <p:cNvPr id="2" name="Title 1"/>
+          <p:cNvSpPr>
+            <a:spLocks noGrp="1"/>
+          </p:cNvSpPr>
+          <p:nvPr>
+            <p:ph type="title"/>
+          </p:nvPr>
+        </p:nvSpPr>
+        <p:spPr/>
+        <p:txBody>
+          <a:bodyPr/>
+          <a:lstStyle/>
+          <a:p>
+            <a:r>
+              <a:rPr lang="en-US" sz="4200" dirty="0" smtClean="0"/>
+              <a:t>Why </a:t>
+            </a:r>
+            <a:r>
+              <a:rPr lang="en-US" sz="4200" dirty="0" err="1" smtClean="0"/>
+              <a:t>Microservices</a:t>
+            </a:r>
+            <a:r>
+              <a:rPr lang="en-US" sz="4200" dirty="0" smtClean="0"/>
+              <a:t>? (My Opinion)</a:t>
+            </a:r>
+            <a:endParaRPr lang="en-US" sz="4200" dirty="0"/>
+          </a:p>
+        </p:txBody>
+      </p:sp>
+      <p:sp>
+        <p:nvSpPr>
+          <p:cNvPr id="3" name="Content Placeholder 2"/>
+          <p:cNvSpPr>
+            <a:spLocks noGrp="1"/>
+          </p:cNvSpPr>
+          <p:nvPr>
+            <p:ph idx="1"/>
+          </p:nvPr>
+        </p:nvSpPr>
+        <p:spPr/>
+        <p:txBody>
+          <a:bodyPr/>
+          <a:lstStyle/>
+          <a:p>
+            <a:r>
+              <a:rPr lang="en-US" sz="1800" b="1" dirty="0" smtClean="0"/>
+              <a:t>Reason 1</a:t>
+            </a:r>
+            <a:r>
+              <a:rPr lang="en-US" sz="1800" dirty="0" smtClean="0"/>
+              <a:t>: You want to have several </a:t>
+            </a:r>
+            <a:r>
+              <a:rPr lang="en-US" sz="1800" b="1" dirty="0" smtClean="0"/>
+              <a:t>independent development teams</a:t>
+            </a:r>
+            <a:r>
+              <a:rPr lang="en-US" sz="1800" dirty="0" smtClean="0"/>
+              <a:t>.</a:t>
+            </a:r>
+          </a:p>
+          <a:p>
+            <a:r>
+              <a:rPr lang="en-US" sz="1800" b="1" dirty="0" smtClean="0"/>
+              <a:t>Reason 2</a:t>
+            </a:r>
+            <a:r>
+              <a:rPr lang="en-US" sz="1800" dirty="0" smtClean="0"/>
+              <a:t>: You want or your client wants to have </a:t>
+            </a:r>
+            <a:r>
+              <a:rPr lang="en-US" sz="1800" b="1" dirty="0" smtClean="0"/>
+              <a:t>a faster and modern UI (i.e. SPA)</a:t>
+            </a:r>
+            <a:r>
+              <a:rPr lang="en-US" sz="1800" dirty="0" smtClean="0"/>
+              <a:t> that is </a:t>
+            </a:r>
+            <a:r>
+              <a:rPr lang="en-US" sz="1800" u="sng" dirty="0" smtClean="0"/>
+              <a:t>totally decoupled</a:t>
+            </a:r>
+            <a:r>
+              <a:rPr lang="en-US" sz="1800" dirty="0" smtClean="0"/>
+              <a:t> from the other parts of the system.</a:t>
+            </a:r>
+          </a:p>
+          <a:p>
+            <a:r>
+              <a:rPr lang="en-US" sz="1800" b="1" dirty="0" smtClean="0"/>
+              <a:t>Reason 3</a:t>
+            </a:r>
+            <a:r>
+              <a:rPr lang="en-US" sz="1800" dirty="0" smtClean="0"/>
+              <a:t>: You want or your client wants that a part of your system (e.g. user store and authentication) can be </a:t>
+            </a:r>
+            <a:r>
+              <a:rPr lang="en-US" sz="1800" b="1" dirty="0" smtClean="0"/>
+              <a:t>shared among or reused by multiple different systems</a:t>
+            </a:r>
+            <a:r>
+              <a:rPr lang="en-US" sz="1800" dirty="0" smtClean="0"/>
+              <a:t>.</a:t>
+            </a:r>
+          </a:p>
+          <a:p>
+            <a:r>
+              <a:rPr lang="en-US" sz="1800" b="1" dirty="0" smtClean="0"/>
+              <a:t>Reason 4</a:t>
+            </a:r>
+            <a:r>
+              <a:rPr lang="en-US" sz="1800" dirty="0" smtClean="0"/>
+              <a:t>: You want or your client wants your system to be able to </a:t>
+            </a:r>
+            <a:r>
+              <a:rPr lang="en-US" sz="1800" b="1" dirty="0" smtClean="0"/>
+              <a:t>scale out easily </a:t>
+            </a:r>
+            <a:r>
+              <a:rPr lang="en-US" sz="1800" b="1" i="1" dirty="0" smtClean="0"/>
+              <a:t>later</a:t>
+            </a:r>
+            <a:r>
+              <a:rPr lang="en-US" sz="1800" dirty="0" smtClean="0"/>
+              <a:t>.</a:t>
+            </a:r>
+          </a:p>
+          <a:p>
+            <a:r>
+              <a:rPr lang="en-US" sz="1800" b="1" dirty="0" smtClean="0"/>
+              <a:t>Reason 5</a:t>
+            </a:r>
+            <a:r>
+              <a:rPr lang="en-US" sz="1800" dirty="0" smtClean="0"/>
+              <a:t>: You want or your client wants that some parts of your system can </a:t>
+            </a:r>
+            <a:r>
+              <a:rPr lang="en-US" sz="1800" b="1" dirty="0" smtClean="0"/>
+              <a:t>be revised or extended or replaced easily </a:t>
+            </a:r>
+            <a:r>
+              <a:rPr lang="en-US" sz="1800" b="1" i="1" dirty="0" smtClean="0"/>
+              <a:t>later</a:t>
+            </a:r>
+            <a:r>
+              <a:rPr lang="en-US" sz="1800" dirty="0" smtClean="0"/>
+              <a:t>.</a:t>
+            </a:r>
+          </a:p>
+        </p:txBody>
+      </p:sp>
+      <p:pic>
+        <p:nvPicPr>
+          <p:cNvPr id="4" name="Picture 4" descr="https://miro.medium.com/max/4000/0*eO07yV9XbK95zYKj.jpg"/>
+          <p:cNvPicPr>
+            <a:picLocks noChangeAspect="1" noChangeArrowheads="1"/>
+          </p:cNvPicPr>
+          <p:nvPr/>
+        </p:nvPicPr>
+        <p:blipFill>
+          <a:blip r:embed="rId2" cstate="print"/>
+          <a:srcRect/>
+          <a:stretch>
+            <a:fillRect/>
+          </a:stretch>
+        </p:blipFill>
+        <p:spPr bwMode="auto">
+          <a:xfrm>
+            <a:off x="3505200" y="4748645"/>
+            <a:ext cx="2208276" cy="1652155"/>
+          </a:xfrm>
+          <a:prstGeom prst="rect">
+            <a:avLst/>
+          </a:prstGeom>
+          <a:noFill/>
+        </p:spPr>
+      </p:pic>
+    </p:spTree>
+  </p:cSld>
+  <p:clrMapOvr>
+    <a:masterClrMapping/>
+  </p:clrMapOvr>
+</p:sld>
+</file>
+
+<file path=ppt/slides/slide26.xml><?xml version="1.0" encoding="utf-8"?>
+<p:sld xmlns:a="http://schemas.openxmlformats.org/drawingml/2006/main" xmlns:r="http://schemas.openxmlformats.org/officeDocument/2006/relationships" xmlns:p="http://schemas.openxmlformats.org/presentationml/2006/main">
+  <p:cSld>
+    <p:spTree>
+      <p:nvGrpSpPr>
+        <p:cNvPr id="1" name=""/>
+        <p:cNvGrpSpPr/>
+        <p:nvPr/>
+      </p:nvGrpSpPr>
+      <p:grpSpPr>
+        <a:xfrm>
+          <a:off x="0" y="0"/>
+          <a:ext cx="0" cy="0"/>
+          <a:chOff x="0" y="0"/>
+          <a:chExt cx="0" cy="0"/>
+        </a:xfrm>
+      </p:grpSpPr>
+      <p:sp>
+        <p:nvSpPr>
+          <p:cNvPr id="2" name="Title 1"/>
+          <p:cNvSpPr>
+            <a:spLocks noGrp="1"/>
+          </p:cNvSpPr>
+          <p:nvPr>
+            <p:ph type="title"/>
+          </p:nvPr>
+        </p:nvSpPr>
+        <p:spPr/>
+        <p:txBody>
+          <a:bodyPr/>
+          <a:lstStyle/>
+          <a:p>
+            <a:r>
+              <a:rPr lang="en-US" dirty="0" err="1" smtClean="0"/>
+              <a:t>Microservice</a:t>
+            </a:r>
+            <a:r>
+              <a:rPr lang="en-US" dirty="0" smtClean="0"/>
+              <a:t> Costs</a:t>
+            </a:r>
+            <a:endParaRPr lang="en-US" dirty="0"/>
+          </a:p>
+        </p:txBody>
+      </p:sp>
+      <p:sp>
+        <p:nvSpPr>
+          <p:cNvPr id="3" name="Content Placeholder 2"/>
+          <p:cNvSpPr>
+            <a:spLocks noGrp="1"/>
+          </p:cNvSpPr>
+          <p:nvPr>
+            <p:ph idx="1"/>
+          </p:nvPr>
+        </p:nvSpPr>
+        <p:spPr/>
+        <p:txBody>
+          <a:bodyPr/>
+          <a:lstStyle/>
+          <a:p>
+            <a:r>
+              <a:rPr lang="en-US" sz="2600" i="1" dirty="0" smtClean="0">
+                <a:solidFill>
+                  <a:srgbClr val="C00000"/>
+                </a:solidFill>
+              </a:rPr>
+              <a:t>Operational Complexity</a:t>
+            </a:r>
+            <a:r>
+              <a:rPr lang="en-US" sz="2600" dirty="0" smtClean="0"/>
+              <a:t>: You need a mature operations team to manage lots of services, which are being redeployed regularly.</a:t>
+            </a:r>
+          </a:p>
+          <a:p>
+            <a:r>
+              <a:rPr lang="en-US" sz="2600" i="1" dirty="0" smtClean="0">
+                <a:solidFill>
+                  <a:srgbClr val="C00000"/>
+                </a:solidFill>
+              </a:rPr>
+              <a:t>Distribution</a:t>
+            </a:r>
+            <a:r>
+              <a:rPr lang="en-US" sz="2600" dirty="0" smtClean="0"/>
+              <a:t>: Distributed systems are harder to program, since remote calls are slow and are always at risk of failure.</a:t>
+            </a:r>
+          </a:p>
+          <a:p>
+            <a:r>
+              <a:rPr lang="en-US" sz="2600" i="1" dirty="0" smtClean="0">
+                <a:solidFill>
+                  <a:srgbClr val="C00000"/>
+                </a:solidFill>
+              </a:rPr>
+              <a:t>Eventual Consistency</a:t>
+            </a:r>
+            <a:r>
+              <a:rPr lang="en-US" sz="2600" dirty="0" smtClean="0"/>
+              <a:t>: Maintaining </a:t>
+            </a:r>
+            <a:r>
+              <a:rPr lang="en-US" sz="2600" u="sng" dirty="0" smtClean="0"/>
+              <a:t>strong consistency is extremely difficult</a:t>
+            </a:r>
+            <a:r>
+              <a:rPr lang="en-US" sz="2600" dirty="0" smtClean="0"/>
+              <a:t> for a distributed system, which means everyone has to manage eventual consistency.</a:t>
+            </a:r>
+          </a:p>
+        </p:txBody>
+      </p:sp>
+    </p:spTree>
+  </p:cSld>
+  <p:clrMapOvr>
+    <a:masterClrMapping/>
+  </p:clrMapOvr>
+</p:sld>
+</file>
+
+<file path=ppt/slides/slide27.xml><?xml version="1.0" encoding="utf-8"?>
+<p:sld xmlns:a="http://schemas.openxmlformats.org/drawingml/2006/main" xmlns:r="http://schemas.openxmlformats.org/officeDocument/2006/relationships" xmlns:p="http://schemas.openxmlformats.org/presentationml/2006/main">
+  <p:cSld>
+    <p:spTree>
+      <p:nvGrpSpPr>
+        <p:cNvPr id="1" name=""/>
+        <p:cNvGrpSpPr/>
+        <p:nvPr/>
+      </p:nvGrpSpPr>
+      <p:grpSpPr>
+        <a:xfrm>
+          <a:off x="0" y="0"/>
+          <a:ext cx="0" cy="0"/>
+          <a:chOff x="0" y="0"/>
+          <a:chExt cx="0" cy="0"/>
+        </a:xfrm>
+      </p:grpSpPr>
+      <p:sp>
+        <p:nvSpPr>
+          <p:cNvPr id="2" name="Title 1"/>
+          <p:cNvSpPr>
+            <a:spLocks noGrp="1"/>
+          </p:cNvSpPr>
+          <p:nvPr>
+            <p:ph type="title"/>
+          </p:nvPr>
+        </p:nvSpPr>
+        <p:spPr/>
+        <p:txBody>
+          <a:bodyPr/>
+          <a:lstStyle/>
+          <a:p>
+            <a:r>
+              <a:rPr lang="en-US" dirty="0" smtClean="0"/>
+              <a:t>When to Use </a:t>
+            </a:r>
+            <a:r>
+              <a:rPr lang="en-US" dirty="0" err="1" smtClean="0"/>
+              <a:t>Microservices</a:t>
+            </a:r>
+            <a:endParaRPr lang="en-US" dirty="0"/>
+          </a:p>
+        </p:txBody>
+      </p:sp>
+      <p:sp>
+        <p:nvSpPr>
+          <p:cNvPr id="3" name="Content Placeholder 2"/>
+          <p:cNvSpPr>
+            <a:spLocks noGrp="1"/>
+          </p:cNvSpPr>
+          <p:nvPr>
+            <p:ph idx="1"/>
+          </p:nvPr>
+        </p:nvSpPr>
+        <p:spPr/>
+        <p:txBody>
+          <a:bodyPr/>
+          <a:lstStyle/>
+          <a:p>
+            <a:r>
+              <a:rPr lang="en-US" sz="2200" dirty="0" smtClean="0">
+                <a:hlinkClick r:id="rId2"/>
+              </a:rPr>
+              <a:t>https://martinfowler.com/bliki/MicroservicePremium.html</a:t>
+            </a:r>
+            <a:endParaRPr lang="en-US" sz="2200" dirty="0" smtClean="0"/>
+          </a:p>
+          <a:p>
+            <a:r>
+              <a:rPr lang="en-US" sz="2200" i="1" dirty="0" smtClean="0">
+                <a:solidFill>
+                  <a:srgbClr val="C00000"/>
+                </a:solidFill>
+              </a:rPr>
+              <a:t>Is a </a:t>
+            </a:r>
+            <a:r>
+              <a:rPr lang="en-US" sz="2200" i="1" dirty="0" err="1" smtClean="0">
+                <a:solidFill>
+                  <a:srgbClr val="C00000"/>
+                </a:solidFill>
+              </a:rPr>
+              <a:t>microservice</a:t>
+            </a:r>
+            <a:r>
+              <a:rPr lang="en-US" sz="2200" i="1" dirty="0" smtClean="0">
+                <a:solidFill>
+                  <a:srgbClr val="C00000"/>
+                </a:solidFill>
+              </a:rPr>
+              <a:t> architecture a good choice for the system you're working on?</a:t>
+            </a:r>
+          </a:p>
+          <a:p>
+            <a:r>
+              <a:rPr lang="en-US" sz="2200" b="1" dirty="0" smtClean="0"/>
+              <a:t>don't even consider </a:t>
+            </a:r>
+            <a:r>
+              <a:rPr lang="en-US" sz="2200" b="1" dirty="0" err="1" smtClean="0"/>
+              <a:t>microservices</a:t>
+            </a:r>
+            <a:r>
+              <a:rPr lang="en-US" sz="2200" b="1" dirty="0" smtClean="0"/>
+              <a:t> unless you have a system that's </a:t>
+            </a:r>
+            <a:r>
+              <a:rPr lang="en-US" sz="2200" b="1" u="sng" dirty="0" smtClean="0"/>
+              <a:t>too complex to manage as a monolith</a:t>
+            </a:r>
+            <a:r>
+              <a:rPr lang="en-US" sz="2200" dirty="0" smtClean="0"/>
+              <a:t>.</a:t>
+            </a:r>
+          </a:p>
+          <a:p>
+            <a:r>
+              <a:rPr lang="en-US" sz="2200" dirty="0" smtClean="0">
+                <a:hlinkClick r:id="rId3"/>
+              </a:rPr>
+              <a:t>https://martinfowler.com/bliki/MonolithFirst.html</a:t>
+            </a:r>
+            <a:endParaRPr lang="en-US" sz="2200" dirty="0" smtClean="0"/>
+          </a:p>
+          <a:p>
+            <a:r>
+              <a:rPr lang="en-US" sz="2200" dirty="0" smtClean="0"/>
+              <a:t>The complexity that drives us to </a:t>
+            </a:r>
+            <a:r>
+              <a:rPr lang="en-US" sz="2200" dirty="0" err="1" smtClean="0"/>
+              <a:t>microservices</a:t>
+            </a:r>
+            <a:r>
+              <a:rPr lang="en-US" sz="2200" dirty="0" smtClean="0"/>
+              <a:t> can come from many sources including dealing with large teams, multi-tenancy, supporting many user interaction models, allowing different business functions to evolve independently, and scaling.</a:t>
+            </a:r>
+          </a:p>
+          <a:p>
+            <a:r>
+              <a:rPr lang="en-US" sz="2200" dirty="0" smtClean="0"/>
+              <a:t>But the biggest factor is that of sheer size - people finding they have a monolith that's </a:t>
+            </a:r>
+            <a:r>
+              <a:rPr lang="en-US" sz="2200" i="1" dirty="0" smtClean="0">
+                <a:solidFill>
+                  <a:srgbClr val="C00000"/>
+                </a:solidFill>
+              </a:rPr>
+              <a:t>too big to modify and deploy</a:t>
+            </a:r>
+            <a:r>
+              <a:rPr lang="en-US" sz="2200" dirty="0" smtClean="0"/>
+              <a:t>.</a:t>
+            </a:r>
+          </a:p>
+        </p:txBody>
+      </p:sp>
+    </p:spTree>
+  </p:cSld>
+  <p:clrMapOvr>
+    <a:masterClrMapping/>
+  </p:clrMapOvr>
+</p:sld>
+</file>
+
+<file path=ppt/slides/slide28.xml><?xml version="1.0" encoding="utf-8"?>
+<p:sld xmlns:a="http://schemas.openxmlformats.org/drawingml/2006/main" xmlns:r="http://schemas.openxmlformats.org/officeDocument/2006/relationships" xmlns:p="http://schemas.openxmlformats.org/presentationml/2006/main">
+  <p:cSld>
+    <p:spTree>
+      <p:nvGrpSpPr>
+        <p:cNvPr id="1" name=""/>
+        <p:cNvGrpSpPr/>
+        <p:nvPr/>
+      </p:nvGrpSpPr>
+      <p:grpSpPr>
+        <a:xfrm>
+          <a:off x="0" y="0"/>
+          <a:ext cx="0" cy="0"/>
+          <a:chOff x="0" y="0"/>
+          <a:chExt cx="0" cy="0"/>
+        </a:xfrm>
+      </p:grpSpPr>
+      <p:sp>
+        <p:nvSpPr>
+          <p:cNvPr id="2" name="Title 1"/>
+          <p:cNvSpPr>
+            <a:spLocks noGrp="1"/>
+          </p:cNvSpPr>
+          <p:nvPr>
+            <p:ph type="title"/>
+          </p:nvPr>
+        </p:nvSpPr>
+        <p:spPr/>
+        <p:txBody>
+          <a:bodyPr/>
+          <a:lstStyle/>
+          <a:p>
+            <a:r>
+              <a:rPr lang="en-US" dirty="0" smtClean="0"/>
+              <a:t>When Not to Use </a:t>
+            </a:r>
+            <a:r>
+              <a:rPr lang="en-US" dirty="0" err="1" smtClean="0"/>
+              <a:t>Microservices</a:t>
+            </a:r>
+            <a:endParaRPr lang="en-US" dirty="0"/>
+          </a:p>
+        </p:txBody>
+      </p:sp>
+      <p:sp>
+        <p:nvSpPr>
+          <p:cNvPr id="3" name="Content Placeholder 2"/>
+          <p:cNvSpPr>
+            <a:spLocks noGrp="1"/>
+          </p:cNvSpPr>
+          <p:nvPr>
+            <p:ph idx="1"/>
+          </p:nvPr>
+        </p:nvSpPr>
+        <p:spPr/>
+        <p:txBody>
+          <a:bodyPr/>
+          <a:lstStyle/>
+          <a:p>
+            <a:r>
+              <a:rPr lang="en-US" sz="2000" dirty="0" smtClean="0">
+                <a:hlinkClick r:id="rId2"/>
+              </a:rPr>
+              <a:t>https://martinfowler.com/bliki/MicroservicePremium.html</a:t>
+            </a:r>
+            <a:endParaRPr lang="en-US" sz="2000" dirty="0" smtClean="0"/>
+          </a:p>
+          <a:p>
+            <a:r>
+              <a:rPr lang="en-US" sz="2000" dirty="0" smtClean="0"/>
+              <a:t>The </a:t>
+            </a:r>
+            <a:r>
+              <a:rPr lang="en-US" sz="2000" dirty="0" err="1" smtClean="0"/>
+              <a:t>microservices</a:t>
+            </a:r>
+            <a:r>
+              <a:rPr lang="en-US" sz="2000" dirty="0" smtClean="0"/>
+              <a:t> approach is all about handling a complex system, but in order to do so the approach introduces </a:t>
+            </a:r>
+            <a:r>
+              <a:rPr lang="en-US" sz="2000" i="1" dirty="0" smtClean="0">
+                <a:solidFill>
+                  <a:srgbClr val="C00000"/>
+                </a:solidFill>
+              </a:rPr>
+              <a:t>its own set of complexities</a:t>
+            </a:r>
+            <a:r>
+              <a:rPr lang="en-US" sz="2000" dirty="0" smtClean="0"/>
+              <a:t>.</a:t>
+            </a:r>
+          </a:p>
+          <a:p>
+            <a:r>
+              <a:rPr lang="en-US" sz="2000" dirty="0" smtClean="0"/>
+              <a:t>When you use </a:t>
+            </a:r>
+            <a:r>
+              <a:rPr lang="en-US" sz="2000" dirty="0" err="1" smtClean="0"/>
+              <a:t>microservices</a:t>
+            </a:r>
+            <a:r>
+              <a:rPr lang="en-US" sz="2000" dirty="0" smtClean="0"/>
+              <a:t> you have to work on automated deployment, monitoring, dealing with failure, eventual consistency, and other factors that a distributed system introduces. There are well-known ways to cope with all this, but it's </a:t>
+            </a:r>
+            <a:r>
+              <a:rPr lang="en-US" sz="2000" i="1" dirty="0" smtClean="0">
+                <a:solidFill>
+                  <a:srgbClr val="C00000"/>
+                </a:solidFill>
+              </a:rPr>
+              <a:t>extra effort</a:t>
+            </a:r>
+            <a:r>
+              <a:rPr lang="en-US" sz="2000" dirty="0" smtClean="0"/>
+              <a:t>.</a:t>
+            </a:r>
+          </a:p>
+          <a:p>
+            <a:r>
+              <a:rPr lang="en-US" sz="2000" dirty="0" smtClean="0">
+                <a:hlinkClick r:id="rId3"/>
+              </a:rPr>
+              <a:t>https://martinfowler.com/bliki/MonolithFirst.html</a:t>
+            </a:r>
+          </a:p>
+          <a:p>
+            <a:r>
+              <a:rPr lang="en-US" sz="2000" dirty="0" smtClean="0"/>
+              <a:t>The first reason for this is classic </a:t>
+            </a:r>
+            <a:r>
+              <a:rPr lang="en-US" sz="2000" i="1" dirty="0" err="1" smtClean="0">
+                <a:solidFill>
+                  <a:srgbClr val="C00000"/>
+                </a:solidFill>
+              </a:rPr>
+              <a:t>Yagni</a:t>
+            </a:r>
+            <a:r>
+              <a:rPr lang="en-US" sz="2000" dirty="0" smtClean="0"/>
+              <a:t>.</a:t>
+            </a:r>
+          </a:p>
+          <a:p>
+            <a:r>
+              <a:rPr lang="en-US" sz="2000" dirty="0" smtClean="0"/>
+              <a:t>The second issue with starting with </a:t>
+            </a:r>
+            <a:r>
+              <a:rPr lang="en-US" sz="2000" dirty="0" err="1" smtClean="0"/>
+              <a:t>microservices</a:t>
+            </a:r>
+            <a:r>
+              <a:rPr lang="en-US" sz="2000" dirty="0" smtClean="0"/>
+              <a:t> is that they only work well if you come up with good, </a:t>
+            </a:r>
+            <a:r>
+              <a:rPr lang="en-US" sz="2000" i="1" dirty="0" smtClean="0">
+                <a:solidFill>
+                  <a:srgbClr val="C00000"/>
+                </a:solidFill>
+              </a:rPr>
+              <a:t>stable boundaries between the services</a:t>
+            </a:r>
+            <a:r>
+              <a:rPr lang="en-US" sz="2000" dirty="0" smtClean="0"/>
+              <a:t>.</a:t>
+            </a:r>
+          </a:p>
+          <a:p>
+            <a:r>
+              <a:rPr lang="en-US" sz="2000" dirty="0" smtClean="0"/>
+              <a:t>Any refactoring of functionality between services is much harder than it is in a monolith. But even experienced architects working in familiar domains have great difficulty getting boundaries right at the beginning.</a:t>
+            </a:r>
+          </a:p>
+        </p:txBody>
+      </p:sp>
+    </p:spTree>
+  </p:cSld>
+  <p:clrMapOvr>
+    <a:masterClrMapping/>
+  </p:clrMapOvr>
+</p:sld>
+</file>
+
 <file path=ppt/slides/slide29.xml><?xml version="1.0" encoding="utf-8"?>
 <p:sld xmlns:a="http://schemas.openxmlformats.org/drawingml/2006/main" xmlns:r="http://schemas.openxmlformats.org/officeDocument/2006/relationships" xmlns:p="http://schemas.openxmlformats.org/presentationml/2006/main">
   <p:cSld>
@@ -6726,112 +6777,32 @@
           <a:chExt cx="0" cy="0"/>
         </a:xfrm>
       </p:grpSpPr>
-      <p:sp>
-        <p:nvSpPr>
-          <p:cNvPr id="2" name="Title 1"/>
-          <p:cNvSpPr>
-            <a:spLocks noGrp="1"/>
-          </p:cNvSpPr>
-          <p:nvPr>
-            <p:ph type="title"/>
-          </p:nvPr>
-        </p:nvSpPr>
-        <p:spPr/>
-        <p:txBody>
-          <a:bodyPr/>
-          <a:lstStyle/>
-          <a:p>
-            <a:r>
-              <a:rPr lang="en-US" dirty="0" smtClean="0"/>
-              <a:t>Why </a:t>
-            </a:r>
-            <a:r>
-              <a:rPr lang="en-US" dirty="0" err="1" smtClean="0"/>
-              <a:t>Microservices</a:t>
-            </a:r>
-            <a:r>
-              <a:rPr lang="en-US" smtClean="0"/>
-              <a:t>: </a:t>
-            </a:r>
-            <a:r>
-              <a:rPr lang="en-US" dirty="0" smtClean="0"/>
-              <a:t>Example</a:t>
-            </a:r>
-            <a:endParaRPr lang="en-US" dirty="0"/>
-          </a:p>
-        </p:txBody>
-      </p:sp>
-      <p:sp>
-        <p:nvSpPr>
-          <p:cNvPr id="3" name="Content Placeholder 2"/>
-          <p:cNvSpPr>
-            <a:spLocks noGrp="1"/>
-          </p:cNvSpPr>
-          <p:nvPr>
-            <p:ph idx="1"/>
-          </p:nvPr>
-        </p:nvSpPr>
-        <p:spPr/>
-        <p:txBody>
-          <a:bodyPr/>
-          <a:lstStyle/>
-          <a:p>
-            <a:r>
-              <a:rPr lang="en-US" sz="1800" u="sng" dirty="0" smtClean="0">
-                <a:hlinkClick r:id="rId2"/>
-              </a:rPr>
-              <a:t>http://philcalcado.com/2015/09/08/how_we_ended_up_with_microservices.html</a:t>
-            </a:r>
-            <a:endParaRPr lang="en-US" sz="1800" dirty="0" smtClean="0"/>
-          </a:p>
-          <a:p>
-            <a:r>
-              <a:rPr lang="en-US" sz="2600" dirty="0" smtClean="0"/>
-              <a:t>If you were to ask anybody from any of the teams about how our </a:t>
-            </a:r>
-            <a:r>
-              <a:rPr lang="en-US" sz="2600" i="1" dirty="0" smtClean="0">
-                <a:solidFill>
-                  <a:srgbClr val="C00000"/>
-                </a:solidFill>
-              </a:rPr>
-              <a:t>development process</a:t>
-            </a:r>
-            <a:r>
-              <a:rPr lang="en-US" sz="2600" dirty="0" smtClean="0"/>
-              <a:t> worked, they would describe something like this:</a:t>
-            </a:r>
-          </a:p>
-          <a:p>
-            <a:pPr lvl="1"/>
-            <a:r>
-              <a:rPr lang="en-US" sz="2200" dirty="0" smtClean="0"/>
-              <a:t>Somebody has an idea for a feature, they write a couple of paragraphs and draw some mockups. We then discuss it as a team.</a:t>
-            </a:r>
-          </a:p>
-          <a:p>
-            <a:pPr lvl="1"/>
-            <a:r>
-              <a:rPr lang="en-US" sz="2200" dirty="0" smtClean="0"/>
-              <a:t>Designers shape up the user experience.</a:t>
-            </a:r>
-          </a:p>
-          <a:p>
-            <a:pPr lvl="1"/>
-            <a:r>
-              <a:rPr lang="en-US" sz="2200" dirty="0" smtClean="0"/>
-              <a:t>We write the code.</a:t>
-            </a:r>
-          </a:p>
-          <a:p>
-            <a:pPr lvl="1"/>
-            <a:r>
-              <a:rPr lang="en-US" sz="2200" dirty="0" smtClean="0"/>
-              <a:t>After a little testing, we deploy.</a:t>
-            </a:r>
-          </a:p>
-        </p:txBody>
-      </p:sp>
+      <p:pic>
+        <p:nvPicPr>
+          <p:cNvPr id="4" name="Picture 2" descr="https://lh3.ggpht.com/1IfZLL2QDSjZ0wS7sUhaMlsAOS8BBzdR3wZ1WawgRn7KZAM8nEVZYMOUM-lqQb0ikIzp=w300"/>
+          <p:cNvPicPr>
+            <a:picLocks noChangeAspect="1" noChangeArrowheads="1"/>
+          </p:cNvPicPr>
+          <p:nvPr/>
+        </p:nvPicPr>
+        <p:blipFill>
+          <a:blip r:embed="rId2" cstate="print"/>
+          <a:srcRect/>
+          <a:stretch>
+            <a:fillRect/>
+          </a:stretch>
+        </p:blipFill>
+        <p:spPr bwMode="auto">
+          <a:xfrm>
+            <a:off x="3276600" y="1905000"/>
+            <a:ext cx="2857500" cy="2857500"/>
+          </a:xfrm>
+          <a:prstGeom prst="rect">
+            <a:avLst/>
+          </a:prstGeom>
+          <a:noFill/>
+        </p:spPr>
+      </p:pic>
     </p:spTree>
   </p:cSld>
   <p:clrMapOvr>
@@ -7030,6 +7001,137 @@
           <a:p>
             <a:r>
               <a:rPr lang="en-US" dirty="0" smtClean="0"/>
+              <a:t>Why </a:t>
+            </a:r>
+            <a:r>
+              <a:rPr lang="en-US" dirty="0" err="1" smtClean="0"/>
+              <a:t>Microservices</a:t>
+            </a:r>
+            <a:r>
+              <a:rPr lang="en-US" smtClean="0"/>
+              <a:t>: </a:t>
+            </a:r>
+            <a:r>
+              <a:rPr lang="en-US" dirty="0" smtClean="0"/>
+              <a:t>Example</a:t>
+            </a:r>
+            <a:endParaRPr lang="en-US" dirty="0"/>
+          </a:p>
+        </p:txBody>
+      </p:sp>
+      <p:sp>
+        <p:nvSpPr>
+          <p:cNvPr id="3" name="Content Placeholder 2"/>
+          <p:cNvSpPr>
+            <a:spLocks noGrp="1"/>
+          </p:cNvSpPr>
+          <p:nvPr>
+            <p:ph idx="1"/>
+          </p:nvPr>
+        </p:nvSpPr>
+        <p:spPr/>
+        <p:txBody>
+          <a:bodyPr/>
+          <a:lstStyle/>
+          <a:p>
+            <a:r>
+              <a:rPr lang="en-US" sz="1800" u="sng" dirty="0" smtClean="0">
+                <a:hlinkClick r:id="rId2"/>
+              </a:rPr>
+              <a:t>http://philcalcado.com/2015/09/08/how_we_ended_up_with_microservices.html</a:t>
+            </a:r>
+            <a:endParaRPr lang="en-US" sz="1800" dirty="0" smtClean="0"/>
+          </a:p>
+          <a:p>
+            <a:r>
+              <a:rPr lang="en-US" sz="2600" dirty="0" smtClean="0"/>
+              <a:t>If you were to ask anybody from any of the teams about how our </a:t>
+            </a:r>
+            <a:r>
+              <a:rPr lang="en-US" sz="2600" i="1" dirty="0" smtClean="0">
+                <a:solidFill>
+                  <a:srgbClr val="C00000"/>
+                </a:solidFill>
+              </a:rPr>
+              <a:t>development process</a:t>
+            </a:r>
+            <a:r>
+              <a:rPr lang="en-US" sz="2600" dirty="0" smtClean="0"/>
+              <a:t> worked, they would describe something like this:</a:t>
+            </a:r>
+          </a:p>
+          <a:p>
+            <a:pPr lvl="1"/>
+            <a:r>
+              <a:rPr lang="en-US" sz="2200" dirty="0" smtClean="0"/>
+              <a:t>Somebody has an idea for a feature, they write a couple of paragraphs and draw some mockups. We then discuss it as a team.</a:t>
+            </a:r>
+          </a:p>
+          <a:p>
+            <a:pPr lvl="1"/>
+            <a:r>
+              <a:rPr lang="en-US" sz="2200" dirty="0" smtClean="0"/>
+              <a:t>Designers shape up the user experience.</a:t>
+            </a:r>
+          </a:p>
+          <a:p>
+            <a:pPr lvl="1"/>
+            <a:r>
+              <a:rPr lang="en-US" sz="2200" dirty="0" smtClean="0"/>
+              <a:t>We write the code.</a:t>
+            </a:r>
+          </a:p>
+          <a:p>
+            <a:pPr lvl="1"/>
+            <a:r>
+              <a:rPr lang="en-US" sz="2200" dirty="0" smtClean="0"/>
+              <a:t>After a little testing, we deploy.</a:t>
+            </a:r>
+          </a:p>
+        </p:txBody>
+      </p:sp>
+    </p:spTree>
+  </p:cSld>
+  <p:clrMapOvr>
+    <a:masterClrMapping/>
+  </p:clrMapOvr>
+</p:sld>
+</file>
+
+<file path=ppt/slides/slide31.xml><?xml version="1.0" encoding="utf-8"?>
+<p:sld xmlns:a="http://schemas.openxmlformats.org/drawingml/2006/main" xmlns:r="http://schemas.openxmlformats.org/officeDocument/2006/relationships" xmlns:p="http://schemas.openxmlformats.org/presentationml/2006/main">
+  <p:cSld>
+    <p:spTree>
+      <p:nvGrpSpPr>
+        <p:cNvPr id="1" name=""/>
+        <p:cNvGrpSpPr/>
+        <p:nvPr/>
+      </p:nvGrpSpPr>
+      <p:grpSpPr>
+        <a:xfrm>
+          <a:off x="0" y="0"/>
+          <a:ext cx="0" cy="0"/>
+          <a:chOff x="0" y="0"/>
+          <a:chExt cx="0" cy="0"/>
+        </a:xfrm>
+      </p:grpSpPr>
+      <p:sp>
+        <p:nvSpPr>
+          <p:cNvPr id="2" name="Title 1"/>
+          <p:cNvSpPr>
+            <a:spLocks noGrp="1"/>
+          </p:cNvSpPr>
+          <p:nvPr>
+            <p:ph type="title"/>
+          </p:nvPr>
+        </p:nvSpPr>
+        <p:spPr/>
+        <p:txBody>
+          <a:bodyPr/>
+          <a:lstStyle/>
+          <a:p>
+            <a:r>
+              <a:rPr lang="en-US" dirty="0" smtClean="0"/>
               <a:t>Value Stream Map</a:t>
             </a:r>
             <a:endParaRPr lang="en-US" dirty="0"/>
@@ -7128,7 +7230,7 @@
 </p:sld>
 </file>
 
-<file path=ppt/slides/slide31.xml><?xml version="1.0" encoding="utf-8"?>
+<file path=ppt/slides/slide32.xml><?xml version="1.0" encoding="utf-8"?>
 <p:sld xmlns:a="http://schemas.openxmlformats.org/drawingml/2006/main" xmlns:r="http://schemas.openxmlformats.org/officeDocument/2006/relationships" xmlns:p="http://schemas.openxmlformats.org/presentationml/2006/main">
   <p:cSld>
     <p:spTree>
@@ -7249,7 +7351,7 @@
 </p:sld>
 </file>
 
-<file path=ppt/slides/slide32.xml><?xml version="1.0" encoding="utf-8"?>
+<file path=ppt/slides/slide33.xml><?xml version="1.0" encoding="utf-8"?>
 <p:sld xmlns:a="http://schemas.openxmlformats.org/drawingml/2006/main" xmlns:r="http://schemas.openxmlformats.org/officeDocument/2006/relationships" xmlns:p="http://schemas.openxmlformats.org/presentationml/2006/main">
   <p:cSld>
     <p:spTree>
@@ -7360,7 +7462,7 @@
 </p:sld>
 </file>
 
-<file path=ppt/slides/slide33.xml><?xml version="1.0" encoding="utf-8"?>
+<file path=ppt/slides/slide34.xml><?xml version="1.0" encoding="utf-8"?>
 <p:sld xmlns:a="http://schemas.openxmlformats.org/drawingml/2006/main" xmlns:r="http://schemas.openxmlformats.org/officeDocument/2006/relationships" xmlns:p="http://schemas.openxmlformats.org/presentationml/2006/main">
   <p:cSld>
     <p:spTree>
@@ -7460,7 +7562,7 @@
 </p:sld>
 </file>
 
-<file path=ppt/slides/slide34.xml><?xml version="1.0" encoding="utf-8"?>
+<file path=ppt/slides/slide35.xml><?xml version="1.0" encoding="utf-8"?>
 <p:sld xmlns:a="http://schemas.openxmlformats.org/drawingml/2006/main" xmlns:r="http://schemas.openxmlformats.org/officeDocument/2006/relationships" xmlns:p="http://schemas.openxmlformats.org/presentationml/2006/main">
   <p:cSld>
     <p:spTree>
@@ -7572,7 +7674,7 @@
 </p:sld>
 </file>
 
-<file path=ppt/slides/slide35.xml><?xml version="1.0" encoding="utf-8"?>
+<file path=ppt/slides/slide36.xml><?xml version="1.0" encoding="utf-8"?>
 <p:sld xmlns:a="http://schemas.openxmlformats.org/drawingml/2006/main" xmlns:r="http://schemas.openxmlformats.org/officeDocument/2006/relationships" xmlns:p="http://schemas.openxmlformats.org/presentationml/2006/main">
   <p:cSld>
     <p:spTree>
@@ -7680,7 +7782,7 @@
 </p:sld>
 </file>
 
-<file path=ppt/slides/slide36.xml><?xml version="1.0" encoding="utf-8"?>
+<file path=ppt/slides/slide37.xml><?xml version="1.0" encoding="utf-8"?>
 <p:sld xmlns:a="http://schemas.openxmlformats.org/drawingml/2006/main" xmlns:r="http://schemas.openxmlformats.org/officeDocument/2006/relationships" xmlns:p="http://schemas.openxmlformats.org/presentationml/2006/main">
   <p:cSld>
     <p:spTree>
@@ -7754,7 +7856,7 @@
 </p:sld>
 </file>
 
-<file path=ppt/slides/slide37.xml><?xml version="1.0" encoding="utf-8"?>
+<file path=ppt/slides/slide38.xml><?xml version="1.0" encoding="utf-8"?>
 <p:sld xmlns:a="http://schemas.openxmlformats.org/drawingml/2006/main" xmlns:r="http://schemas.openxmlformats.org/officeDocument/2006/relationships" xmlns:p="http://schemas.openxmlformats.org/presentationml/2006/main">
   <p:cSld>
     <p:spTree>
@@ -7805,280 +7907,6 @@
 </p:sld>
 </file>
 
-<file path=ppt/slides/slide38.xml><?xml version="1.0" encoding="utf-8"?>
-<p:sld xmlns:a="http://schemas.openxmlformats.org/drawingml/2006/main" xmlns:r="http://schemas.openxmlformats.org/officeDocument/2006/relationships" xmlns:p="http://schemas.openxmlformats.org/presentationml/2006/main">
-  <p:cSld>
-    <p:spTree>
-      <p:nvGrpSpPr>
-        <p:cNvPr id="1" name=""/>
-        <p:cNvGrpSpPr/>
-        <p:nvPr/>
-      </p:nvGrpSpPr>
-      <p:grpSpPr>
-        <a:xfrm>
-          <a:off x="0" y="0"/>
-          <a:ext cx="0" cy="0"/>
-          <a:chOff x="0" y="0"/>
-          <a:chExt cx="0" cy="0"/>
-        </a:xfrm>
-      </p:grpSpPr>
-      <p:sp>
-        <p:nvSpPr>
-          <p:cNvPr id="2" name="Title 1"/>
-          <p:cNvSpPr>
-            <a:spLocks noGrp="1"/>
-          </p:cNvSpPr>
-          <p:nvPr>
-            <p:ph type="title"/>
-          </p:nvPr>
-        </p:nvSpPr>
-        <p:spPr/>
-        <p:txBody>
-          <a:bodyPr/>
-          <a:lstStyle/>
-          <a:p>
-            <a:r>
-              <a:rPr lang="en-US" dirty="0" err="1" smtClean="0"/>
-              <a:t>DeathStarBench</a:t>
-            </a:r>
-            <a:endParaRPr lang="en-US" dirty="0"/>
-          </a:p>
-        </p:txBody>
-      </p:sp>
-      <p:sp>
-        <p:nvSpPr>
-          <p:cNvPr id="3" name="Content Placeholder 2"/>
-          <p:cNvSpPr>
-            <a:spLocks noGrp="1"/>
-          </p:cNvSpPr>
-          <p:nvPr>
-            <p:ph idx="1"/>
-          </p:nvPr>
-        </p:nvSpPr>
-        <p:spPr/>
-        <p:txBody>
-          <a:bodyPr/>
-          <a:lstStyle/>
-          <a:p>
-            <a:r>
-              <a:rPr lang="en-US" sz="2200" b="1" dirty="0" smtClean="0"/>
-              <a:t>Yu </a:t>
-            </a:r>
-            <a:r>
-              <a:rPr lang="en-US" sz="2200" b="1" dirty="0" err="1" smtClean="0"/>
-              <a:t>Gan</a:t>
-            </a:r>
-            <a:r>
-              <a:rPr lang="en-US" sz="2200" b="1" dirty="0" smtClean="0"/>
-              <a:t> et al. (2019). An Open-Source Benchmark Suite for </a:t>
-            </a:r>
-            <a:r>
-              <a:rPr lang="en-US" sz="2200" b="1" dirty="0" err="1" smtClean="0"/>
-              <a:t>Microservices</a:t>
-            </a:r>
-            <a:r>
-              <a:rPr lang="en-US" sz="2200" b="1" dirty="0" smtClean="0"/>
-              <a:t> and Their Hardware-Software Implications for Cloud &amp; Edge Systems.</a:t>
-            </a:r>
-          </a:p>
-          <a:p>
-            <a:r>
-              <a:rPr lang="en-US" sz="2200" dirty="0" smtClean="0">
-                <a:hlinkClick r:id="rId2"/>
-              </a:rPr>
-              <a:t>https://</a:t>
-            </a:r>
-            <a:r>
-              <a:rPr lang="en-US" sz="2200" dirty="0" smtClean="0">
-                <a:hlinkClick r:id="rId2"/>
-              </a:rPr>
-              <a:t>github.com/delimitrou/DeathStarBench</a:t>
-            </a:r>
-            <a:endParaRPr lang="en-US" sz="2200" dirty="0" smtClean="0"/>
-          </a:p>
-          <a:p>
-            <a:r>
-              <a:rPr lang="en-US" sz="2200" b="1" dirty="0" smtClean="0"/>
-              <a:t>Social </a:t>
-            </a:r>
-            <a:r>
-              <a:rPr lang="en-US" sz="2200" b="1" dirty="0" smtClean="0"/>
-              <a:t>Network</a:t>
-            </a:r>
-            <a:r>
-              <a:rPr lang="en-US" sz="2200" dirty="0" smtClean="0"/>
-              <a:t>: C</a:t>
-            </a:r>
-            <a:r>
-              <a:rPr lang="en-US" sz="2200" dirty="0" smtClean="0"/>
-              <a:t>++, </a:t>
-            </a:r>
-            <a:r>
-              <a:rPr lang="en-US" sz="2200" dirty="0" smtClean="0"/>
-              <a:t>Apache Thrift RPC, </a:t>
-            </a:r>
-            <a:r>
-              <a:rPr lang="en-US" sz="2200" dirty="0" err="1" smtClean="0"/>
-              <a:t>Lua</a:t>
-            </a:r>
-            <a:r>
-              <a:rPr lang="en-US" sz="2200" dirty="0" smtClean="0"/>
-              <a:t>/</a:t>
-            </a:r>
-            <a:r>
-              <a:rPr lang="en-US" sz="2200" dirty="0" err="1" smtClean="0"/>
-              <a:t>OpenResty</a:t>
-            </a:r>
-            <a:r>
-              <a:rPr lang="en-US" sz="2200" dirty="0" smtClean="0"/>
-              <a:t> frontend, </a:t>
-            </a:r>
-            <a:r>
-              <a:rPr lang="en-US" sz="2200" dirty="0" err="1" smtClean="0"/>
-              <a:t>MongoDB</a:t>
-            </a:r>
-            <a:r>
-              <a:rPr lang="en-US" sz="2200" dirty="0" smtClean="0"/>
-              <a:t>, </a:t>
-            </a:r>
-            <a:r>
-              <a:rPr lang="en-US" sz="2200" dirty="0" err="1" smtClean="0"/>
-              <a:t>Redis</a:t>
-            </a:r>
-            <a:r>
-              <a:rPr lang="en-US" sz="2200" dirty="0" smtClean="0"/>
-              <a:t>, </a:t>
-            </a:r>
-            <a:r>
-              <a:rPr lang="en-US" sz="2200" dirty="0" err="1" smtClean="0"/>
-              <a:t>Memcached</a:t>
-            </a:r>
-            <a:r>
-              <a:rPr lang="en-US" sz="2200" dirty="0" smtClean="0"/>
-              <a:t>, </a:t>
-            </a:r>
-            <a:r>
-              <a:rPr lang="en-US" sz="2200" dirty="0" err="1" smtClean="0"/>
-              <a:t>RabbitMQ</a:t>
-            </a:r>
-            <a:r>
-              <a:rPr lang="en-US" sz="2200" dirty="0" smtClean="0"/>
-              <a:t>, </a:t>
-            </a:r>
-            <a:r>
-              <a:rPr lang="en-US" sz="2200" dirty="0" err="1" smtClean="0"/>
-              <a:t>Docker</a:t>
-            </a:r>
-            <a:r>
-              <a:rPr lang="en-US" sz="2200" dirty="0" smtClean="0"/>
-              <a:t> Compose, </a:t>
-            </a:r>
-            <a:r>
-              <a:rPr lang="en-US" sz="2200" dirty="0" err="1" smtClean="0"/>
-              <a:t>Docker</a:t>
-            </a:r>
-            <a:r>
-              <a:rPr lang="en-US" sz="2200" dirty="0" smtClean="0"/>
-              <a:t> </a:t>
-            </a:r>
-            <a:r>
-              <a:rPr lang="en-US" sz="2200" dirty="0" smtClean="0"/>
-              <a:t>Swarm, Jaeger, Python init scripts.</a:t>
-            </a:r>
-          </a:p>
-          <a:p>
-            <a:r>
-              <a:rPr lang="en-US" sz="2200" b="1" dirty="0" smtClean="0"/>
-              <a:t>Hotel </a:t>
-            </a:r>
-            <a:r>
-              <a:rPr lang="en-US" sz="2200" b="1" dirty="0" smtClean="0"/>
-              <a:t>Reservation: </a:t>
-            </a:r>
-            <a:r>
-              <a:rPr lang="en-US" sz="2200" dirty="0" smtClean="0"/>
-              <a:t>Go, </a:t>
-            </a:r>
-            <a:r>
-              <a:rPr lang="en-US" sz="2200" dirty="0" err="1" smtClean="0"/>
-              <a:t>gRPC</a:t>
-            </a:r>
-            <a:r>
-              <a:rPr lang="en-US" sz="2200" dirty="0" smtClean="0"/>
-              <a:t>, </a:t>
-            </a:r>
-            <a:r>
-              <a:rPr lang="en-US" sz="2200" dirty="0" err="1" smtClean="0"/>
-              <a:t>MongoDB</a:t>
-            </a:r>
-            <a:r>
-              <a:rPr lang="en-US" sz="2200" dirty="0" smtClean="0"/>
-              <a:t>, </a:t>
-            </a:r>
-            <a:r>
-              <a:rPr lang="en-US" sz="2200" dirty="0" err="1" smtClean="0"/>
-              <a:t>Memcached</a:t>
-            </a:r>
-            <a:r>
-              <a:rPr lang="en-US" sz="2200" dirty="0" smtClean="0"/>
-              <a:t>, </a:t>
-            </a:r>
-            <a:r>
-              <a:rPr lang="en-US" sz="2200" dirty="0" err="1" smtClean="0"/>
-              <a:t>Docker</a:t>
-            </a:r>
-            <a:r>
-              <a:rPr lang="en-US" sz="2200" dirty="0" smtClean="0"/>
-              <a:t>, </a:t>
-            </a:r>
-            <a:r>
-              <a:rPr lang="en-US" sz="2200" dirty="0" err="1" smtClean="0"/>
-              <a:t>Kubernetes</a:t>
-            </a:r>
-            <a:r>
-              <a:rPr lang="en-US" sz="2200" dirty="0" smtClean="0"/>
-              <a:t>, </a:t>
-            </a:r>
-            <a:r>
-              <a:rPr lang="en-US" sz="2200" dirty="0" err="1" smtClean="0"/>
-              <a:t>OpenShift</a:t>
-            </a:r>
-            <a:r>
-              <a:rPr lang="en-US" sz="2200" dirty="0" smtClean="0"/>
-              <a:t>, </a:t>
-            </a:r>
-            <a:r>
-              <a:rPr lang="en-US" sz="2200" dirty="0" smtClean="0"/>
-              <a:t>Helm</a:t>
-            </a:r>
-            <a:r>
-              <a:rPr lang="en-US" sz="2200" dirty="0" smtClean="0"/>
-              <a:t>, Consul, </a:t>
-            </a:r>
-            <a:r>
-              <a:rPr lang="en-US" sz="2200" dirty="0" err="1" smtClean="0"/>
-              <a:t>OpenTracing</a:t>
-            </a:r>
-            <a:r>
-              <a:rPr lang="en-US" sz="2200" dirty="0" smtClean="0"/>
-              <a:t>, </a:t>
-            </a:r>
-            <a:r>
-              <a:rPr lang="en-US" sz="2200" dirty="0" smtClean="0"/>
-              <a:t>Jaeger.</a:t>
-            </a:r>
-            <a:endParaRPr lang="en-US" sz="2200" b="1" dirty="0"/>
-          </a:p>
-        </p:txBody>
-      </p:sp>
-    </p:spTree>
-  </p:cSld>
-  <p:clrMapOvr>
-    <a:masterClrMapping/>
-  </p:clrMapOvr>
-</p:sld>
-</file>
-
 <file path=ppt/slides/slide39.xml><?xml version="1.0" encoding="utf-8"?>
 <p:sld xmlns:a="http://schemas.openxmlformats.org/drawingml/2006/main" xmlns:r="http://schemas.openxmlformats.org/officeDocument/2006/relationships" xmlns:p="http://schemas.openxmlformats.org/presentationml/2006/main">
   <p:cSld>
@@ -8112,8 +7940,8 @@
           <a:lstStyle/>
           <a:p>
             <a:r>
-              <a:rPr lang="en-US" dirty="0" smtClean="0"/>
-              <a:t>Online Boutique</a:t>
+              <a:rPr lang="en-US" dirty="0" err="1" smtClean="0"/>
+              <a:t>DeathStarBench</a:t>
             </a:r>
             <a:endParaRPr lang="en-US" dirty="0"/>
           </a:p>
@@ -8135,83 +7963,175 @@
           <a:lstStyle/>
           <a:p>
             <a:r>
-              <a:rPr lang="en-US" sz="2400" dirty="0" smtClean="0">
+              <a:rPr lang="en-US" sz="2200" b="1" dirty="0" smtClean="0"/>
+              <a:t>Yu </a:t>
+            </a:r>
+            <a:r>
+              <a:rPr lang="en-US" sz="2200" b="1" dirty="0" err="1" smtClean="0"/>
+              <a:t>Gan</a:t>
+            </a:r>
+            <a:r>
+              <a:rPr lang="en-US" sz="2200" b="1" dirty="0" smtClean="0"/>
+              <a:t> et al. (2019). An Open-Source Benchmark Suite for </a:t>
+            </a:r>
+            <a:r>
+              <a:rPr lang="en-US" sz="2200" b="1" dirty="0" err="1" smtClean="0"/>
+              <a:t>Microservices</a:t>
+            </a:r>
+            <a:r>
+              <a:rPr lang="en-US" sz="2200" b="1" dirty="0" smtClean="0"/>
+              <a:t> and Their Hardware-Software Implications for Cloud &amp; Edge Systems.</a:t>
+            </a:r>
+          </a:p>
+          <a:p>
+            <a:r>
+              <a:rPr lang="en-US" sz="2200" dirty="0" smtClean="0">
                 <a:hlinkClick r:id="rId2"/>
               </a:rPr>
-              <a:t>https://github.com/googlecloudplatform/microservices-demo</a:t>
-            </a:r>
-            <a:endParaRPr lang="en-US" sz="2400" dirty="0" smtClean="0"/>
-          </a:p>
-          <a:p>
-            <a:r>
-              <a:rPr lang="en-US" sz="2400" dirty="0" smtClean="0"/>
-              <a:t>Go, Python, C#, Node.js, </a:t>
-            </a:r>
-            <a:r>
-              <a:rPr lang="en-US" sz="2400" dirty="0" err="1" smtClean="0"/>
+              <a:t>https://github.com/delimitrou/DeathStarBench</a:t>
+            </a:r>
+            <a:endParaRPr lang="en-US" sz="2200" dirty="0" smtClean="0"/>
+          </a:p>
+          <a:p>
+            <a:r>
+              <a:rPr lang="en-US" sz="2200" b="1" dirty="0" smtClean="0"/>
+              <a:t>Social Network</a:t>
+            </a:r>
+            <a:r>
+              <a:rPr lang="en-US" sz="2200" dirty="0" smtClean="0"/>
+              <a:t>: C++, Apache Thrift RPC, </a:t>
+            </a:r>
+            <a:r>
+              <a:rPr lang="en-US" sz="2200" dirty="0" err="1" smtClean="0"/>
+              <a:t>Lua</a:t>
+            </a:r>
+            <a:r>
+              <a:rPr lang="en-US" sz="2200" dirty="0" smtClean="0"/>
+              <a:t>/</a:t>
+            </a:r>
+            <a:r>
+              <a:rPr lang="en-US" sz="2200" dirty="0" err="1" smtClean="0"/>
+              <a:t>OpenResty</a:t>
+            </a:r>
+            <a:r>
+              <a:rPr lang="en-US" sz="2200" dirty="0" smtClean="0"/>
+              <a:t> frontend, </a:t>
+            </a:r>
+            <a:r>
+              <a:rPr lang="en-US" sz="2200" dirty="0" err="1" smtClean="0"/>
+              <a:t>MongoDB</a:t>
+            </a:r>
+            <a:r>
+              <a:rPr lang="en-US" sz="2200" dirty="0" smtClean="0"/>
+              <a:t>, </a:t>
+            </a:r>
+            <a:r>
+              <a:rPr lang="en-US" sz="2200" dirty="0" err="1" smtClean="0"/>
+              <a:t>Redis</a:t>
+            </a:r>
+            <a:r>
+              <a:rPr lang="en-US" sz="2200" dirty="0" smtClean="0"/>
+              <a:t>, </a:t>
+            </a:r>
+            <a:r>
+              <a:rPr lang="en-US" sz="2200" dirty="0" err="1" smtClean="0"/>
+              <a:t>Memcached</a:t>
+            </a:r>
+            <a:r>
+              <a:rPr lang="en-US" sz="2200" dirty="0" smtClean="0"/>
+              <a:t>, </a:t>
+            </a:r>
+            <a:r>
+              <a:rPr lang="en-US" sz="2200" dirty="0" err="1" smtClean="0"/>
+              <a:t>RabbitMQ</a:t>
+            </a:r>
+            <a:r>
+              <a:rPr lang="en-US" sz="2200" dirty="0" smtClean="0"/>
+              <a:t>, </a:t>
+            </a:r>
+            <a:r>
+              <a:rPr lang="en-US" sz="2200" dirty="0" err="1" smtClean="0"/>
+              <a:t>Docker</a:t>
+            </a:r>
+            <a:r>
+              <a:rPr lang="en-US" sz="2200" dirty="0" smtClean="0"/>
+              <a:t> Compose, </a:t>
+            </a:r>
+            <a:r>
+              <a:rPr lang="en-US" sz="2200" dirty="0" err="1" smtClean="0"/>
+              <a:t>Docker</a:t>
+            </a:r>
+            <a:r>
+              <a:rPr lang="en-US" sz="2200" dirty="0" smtClean="0"/>
+              <a:t> Swarm, Jaeger, Python init scripts.</a:t>
+            </a:r>
+          </a:p>
+          <a:p>
+            <a:r>
+              <a:rPr lang="en-US" sz="2200" b="1" dirty="0" smtClean="0"/>
+              <a:t>Hotel Reservation: </a:t>
+            </a:r>
+            <a:r>
+              <a:rPr lang="en-US" sz="2200" dirty="0" smtClean="0"/>
+              <a:t>Go, </a:t>
+            </a:r>
+            <a:r>
+              <a:rPr lang="en-US" sz="2200" dirty="0" err="1" smtClean="0"/>
               <a:t>gRPC</a:t>
             </a:r>
             <a:r>
-              <a:rPr lang="en-US" sz="2400" dirty="0" smtClean="0"/>
+              <a:rPr lang="en-US" sz="2200" dirty="0" smtClean="0"/>
               <a:t>, </a:t>
             </a:r>
             <a:r>
-              <a:rPr lang="en-US" sz="2400" dirty="0" err="1" smtClean="0"/>
+              <a:rPr lang="en-US" sz="2200" dirty="0" err="1" smtClean="0"/>
+              <a:t>MongoDB</a:t>
+            </a:r>
+            <a:r>
+              <a:rPr lang="en-US" sz="2200" dirty="0" smtClean="0"/>
+              <a:t>, </a:t>
+            </a:r>
+            <a:r>
+              <a:rPr lang="en-US" sz="2200" dirty="0" err="1" smtClean="0"/>
+              <a:t>Memcached</a:t>
+            </a:r>
+            <a:r>
+              <a:rPr lang="en-US" sz="2200" dirty="0" smtClean="0"/>
+              <a:t>, </a:t>
+            </a:r>
+            <a:r>
+              <a:rPr lang="en-US" sz="2200" dirty="0" err="1" smtClean="0"/>
               <a:t>Docker</a:t>
             </a:r>
             <a:r>
-              <a:rPr lang="en-US" sz="2400" dirty="0" smtClean="0"/>
+              <a:rPr lang="en-US" sz="2200" dirty="0" smtClean="0"/>
               <a:t>, </a:t>
             </a:r>
             <a:r>
-              <a:rPr lang="en-US" sz="2400" dirty="0" err="1" smtClean="0"/>
+              <a:rPr lang="en-US" sz="2200" dirty="0" err="1" smtClean="0"/>
               <a:t>Kubernetes</a:t>
             </a:r>
             <a:r>
-              <a:rPr lang="en-US" sz="2400" dirty="0" smtClean="0"/>
+              <a:rPr lang="en-US" sz="2200" dirty="0" smtClean="0"/>
               <a:t>, </a:t>
             </a:r>
             <a:r>
-              <a:rPr lang="en-US" sz="2400" dirty="0" err="1" smtClean="0"/>
-              <a:t>Skaffold</a:t>
-            </a:r>
-            <a:r>
-              <a:rPr lang="en-US" sz="2400" dirty="0" smtClean="0"/>
-              <a:t>, </a:t>
-            </a:r>
-            <a:r>
-              <a:rPr lang="en-US" sz="2400" dirty="0" err="1" smtClean="0"/>
-              <a:t>Kustomize</a:t>
-            </a:r>
-            <a:r>
-              <a:rPr lang="en-US" sz="2400" dirty="0" smtClean="0"/>
-              <a:t>, Helm, </a:t>
-            </a:r>
-            <a:r>
-              <a:rPr lang="en-US" sz="2400" dirty="0" err="1" smtClean="0"/>
-              <a:t>Terraform</a:t>
-            </a:r>
-            <a:r>
-              <a:rPr lang="en-US" sz="2400" dirty="0" smtClean="0"/>
-              <a:t>, GKE, </a:t>
-            </a:r>
-            <a:r>
-              <a:rPr lang="en-US" sz="2400" dirty="0" err="1" smtClean="0"/>
-              <a:t>Istio</a:t>
-            </a:r>
-            <a:r>
-              <a:rPr lang="en-US" sz="2400" dirty="0" smtClean="0"/>
-              <a:t>, and </a:t>
-            </a:r>
-            <a:r>
-              <a:rPr lang="en-US" sz="2400" dirty="0" err="1" smtClean="0"/>
-              <a:t>Redis</a:t>
-            </a:r>
-            <a:r>
-              <a:rPr lang="en-US" sz="2400" dirty="0" smtClean="0"/>
-              <a:t>.</a:t>
-            </a:r>
-            <a:endParaRPr lang="en-US" sz="2400" dirty="0"/>
+              <a:rPr lang="en-US" sz="2200" dirty="0" err="1" smtClean="0"/>
+              <a:t>OpenShift</a:t>
+            </a:r>
+            <a:r>
+              <a:rPr lang="en-US" sz="2200" dirty="0" smtClean="0"/>
+              <a:t>, Helm, Consul, </a:t>
+            </a:r>
+            <a:r>
+              <a:rPr lang="en-US" sz="2200" dirty="0" err="1" smtClean="0"/>
+              <a:t>OpenTracing</a:t>
+            </a:r>
+            <a:r>
+              <a:rPr lang="en-US" sz="2200" dirty="0" smtClean="0"/>
+              <a:t>, Jaeger.</a:t>
+            </a:r>
+            <a:endParaRPr lang="en-US" sz="2200" b="1" dirty="0"/>
           </a:p>
         </p:txBody>
       </p:sp>
@@ -8431,8 +8351,8 @@
           <a:lstStyle/>
           <a:p>
             <a:r>
-              <a:rPr lang="en-US" dirty="0" err="1" smtClean="0"/>
-              <a:t>TeaStore</a:t>
+              <a:rPr lang="en-US" dirty="0" smtClean="0"/>
+              <a:t>Online Boutique</a:t>
             </a:r>
             <a:endParaRPr lang="en-US" dirty="0"/>
           </a:p>
@@ -8452,52 +8372,28 @@
         <p:txBody>
           <a:bodyPr/>
           <a:lstStyle/>
-          <a:p>
-            <a:r>
-              <a:rPr lang="en-US" sz="2400" dirty="0" smtClean="0"/>
-              <a:t>(2018). </a:t>
-            </a:r>
-            <a:r>
-              <a:rPr lang="en-US" sz="2400" dirty="0" err="1" smtClean="0"/>
-              <a:t>TeaStore</a:t>
-            </a:r>
-            <a:r>
-              <a:rPr lang="en-US" sz="2400" dirty="0" smtClean="0"/>
-              <a:t>.</a:t>
-            </a:r>
-          </a:p>
           <a:p>
             <a:r>
               <a:rPr lang="en-US" sz="2400" dirty="0" smtClean="0">
                 <a:hlinkClick r:id="rId2"/>
               </a:rPr>
-              <a:t>https://github.com/descartesresearch/teastore</a:t>
+              <a:t>https://github.com/googlecloudplatform/microservices-demo</a:t>
             </a:r>
             <a:endParaRPr lang="en-US" sz="2400" dirty="0" smtClean="0"/>
           </a:p>
           <a:p>
             <a:r>
               <a:rPr lang="en-US" sz="2400" dirty="0" smtClean="0"/>
-              <a:t>Java, Maven, </a:t>
-            </a:r>
-            <a:r>
-              <a:rPr lang="en-US" sz="2400" dirty="0" smtClean="0"/>
-              <a:t>Netflix </a:t>
-            </a:r>
-            <a:r>
-              <a:rPr lang="en-US" sz="2400" dirty="0" smtClean="0"/>
-              <a:t>Ribbon, </a:t>
+              <a:t>Go, Python, C#, Node.js, </a:t>
             </a:r>
             <a:r>
               <a:rPr lang="en-US" sz="2400" dirty="0" err="1" smtClean="0"/>
-              <a:t>MariaDB</a:t>
-            </a:r>
-            <a:r>
-              <a:rPr lang="en-US" sz="2400" dirty="0" smtClean="0"/>
-              <a:t>.</a:t>
-            </a:r>
-          </a:p>
-          <a:p>
+              <a:t>gRPC</a:t>
+            </a:r>
+            <a:r>
+              <a:rPr lang="en-US" sz="2400" dirty="0" smtClean="0"/>
+              <a:t>, </a:t>
+            </a:r>
             <a:r>
               <a:rPr lang="en-US" sz="2400" dirty="0" err="1" smtClean="0"/>
               <a:t>Docker</a:t>
@@ -8508,15 +8404,23 @@
             </a:r>
             <a:r>
               <a:rPr lang="en-US" sz="2400" dirty="0" err="1" smtClean="0"/>
-              <a:t>Docker</a:t>
-            </a:r>
-            <a:r>
-              <a:rPr lang="en-US" sz="2400" dirty="0" smtClean="0"/>
-              <a:t> Compose, </a:t>
+              <a:t>Kubernetes</a:t>
+            </a:r>
+            <a:r>
+              <a:rPr lang="en-US" sz="2400" dirty="0" smtClean="0"/>
+              <a:t>, </a:t>
             </a:r>
             <a:r>
               <a:rPr lang="en-US" sz="2400" dirty="0" err="1" smtClean="0"/>
-              <a:t>Kubernetes</a:t>
+              <a:t>Skaffold</a:t>
+            </a:r>
+            <a:r>
+              <a:rPr lang="en-US" sz="2400" dirty="0" smtClean="0"/>
+              <a:t>, </a:t>
+            </a:r>
+            <a:r>
+              <a:rPr lang="en-US" sz="2400" dirty="0" err="1" smtClean="0"/>
+              <a:t>Kustomize</a:t>
             </a:r>
             <a:r>
               <a:rPr lang="en-US" sz="2400" dirty="0" smtClean="0"/>
@@ -8524,19 +8428,11 @@
             </a:r>
             <a:r>
               <a:rPr lang="en-US" sz="2400" dirty="0" err="1" smtClean="0"/>
-              <a:t>Kieker</a:t>
-            </a:r>
-            <a:r>
-              <a:rPr lang="en-US" sz="2400" dirty="0" smtClean="0"/>
-              <a:t>, </a:t>
-            </a:r>
-            <a:r>
-              <a:rPr lang="en-US" sz="2400" dirty="0" err="1" smtClean="0"/>
-              <a:t>OpenTracing</a:t>
-            </a:r>
-            <a:r>
-              <a:rPr lang="en-US" sz="2400" dirty="0" smtClean="0"/>
-              <a:t>, </a:t>
+              <a:t>Terraform</a:t>
+            </a:r>
+            <a:r>
+              <a:rPr lang="en-US" sz="2400" dirty="0" smtClean="0"/>
+              <a:t>, GKE, </a:t>
             </a:r>
             <a:r>
               <a:rPr lang="en-US" sz="2400" dirty="0" err="1" smtClean="0"/>
@@ -8544,29 +8440,15 @@
             </a:r>
             <a:r>
               <a:rPr lang="en-US" sz="2400" dirty="0" smtClean="0"/>
-              <a:t>, </a:t>
+              <a:t>, and </a:t>
             </a:r>
             <a:r>
               <a:rPr lang="en-US" sz="2400" dirty="0" err="1" smtClean="0"/>
-              <a:t>RabbitMQ</a:t>
-            </a:r>
-            <a:r>
-              <a:rPr lang="en-US" sz="2400" dirty="0" smtClean="0"/>
-              <a:t>, LIMBO.</a:t>
-            </a:r>
-          </a:p>
-          <a:p>
-            <a:r>
-              <a:rPr lang="en-US" sz="2400" dirty="0" err="1" smtClean="0"/>
-              <a:t>JMeter</a:t>
-            </a:r>
-            <a:r>
-              <a:rPr lang="en-US" sz="2400" dirty="0" smtClean="0"/>
-              <a:t> and </a:t>
-            </a:r>
-            <a:r>
-              <a:rPr lang="en-US" sz="2400" dirty="0" smtClean="0"/>
-              <a:t>Locust.</a:t>
+              <a:t>Redis</a:t>
+            </a:r>
+            <a:r>
+              <a:rPr lang="en-US" sz="2400" dirty="0" smtClean="0"/>
+              <a:t>.</a:t>
             </a:r>
             <a:endParaRPr lang="en-US" sz="2400" dirty="0"/>
           </a:p>
@@ -8614,7 +8496,7 @@
           <a:p>
             <a:r>
               <a:rPr lang="en-US" dirty="0" err="1" smtClean="0"/>
-              <a:t>Bookinfo</a:t>
+              <a:t>TeaStore</a:t>
             </a:r>
             <a:endParaRPr lang="en-US" dirty="0"/>
           </a:p>
@@ -8634,41 +8516,83 @@
         <p:txBody>
           <a:bodyPr/>
           <a:lstStyle/>
+          <a:p>
+            <a:r>
+              <a:rPr lang="en-US" sz="2400" dirty="0" smtClean="0"/>
+              <a:t>(2018). </a:t>
+            </a:r>
+            <a:r>
+              <a:rPr lang="en-US" sz="2400" dirty="0" err="1" smtClean="0"/>
+              <a:t>TeaStore</a:t>
+            </a:r>
+            <a:r>
+              <a:rPr lang="en-US" sz="2400" dirty="0" smtClean="0"/>
+              <a:t>.</a:t>
+            </a:r>
+          </a:p>
           <a:p>
             <a:r>
               <a:rPr lang="en-US" sz="2400" dirty="0" smtClean="0">
                 <a:hlinkClick r:id="rId2"/>
               </a:rPr>
-              <a:t>https://istio.io/latest/docs/examples/bookinfo</a:t>
-            </a:r>
-            <a:r>
-              <a:rPr lang="en-US" sz="2400" dirty="0" smtClean="0">
-                <a:hlinkClick r:id="rId2"/>
-              </a:rPr>
-              <a:t>/</a:t>
+              <a:t>https://github.com/descartesresearch/teastore</a:t>
             </a:r>
             <a:endParaRPr lang="en-US" sz="2400" dirty="0" smtClean="0"/>
           </a:p>
           <a:p>
             <a:r>
               <a:rPr lang="en-US" sz="2400" dirty="0" smtClean="0"/>
-              <a:t>Python, Ruby, Java.</a:t>
-            </a:r>
-          </a:p>
-          <a:p>
-            <a:r>
-              <a:rPr lang="en-US" sz="2400" dirty="0" smtClean="0"/>
-              <a:t>Node.js.</a:t>
-            </a:r>
-          </a:p>
-          <a:p>
+              <a:t>Java, Maven, Netflix Ribbon, </a:t>
+            </a:r>
+            <a:r>
+              <a:rPr lang="en-US" sz="2400" dirty="0" err="1" smtClean="0"/>
+              <a:t>MariaDB</a:t>
+            </a:r>
+            <a:r>
+              <a:rPr lang="en-US" sz="2400" dirty="0" smtClean="0"/>
+              <a:t>.</a:t>
+            </a:r>
+          </a:p>
+          <a:p>
+            <a:r>
+              <a:rPr lang="en-US" sz="2400" dirty="0" err="1" smtClean="0"/>
+              <a:t>Docker</a:t>
+            </a:r>
+            <a:r>
+              <a:rPr lang="en-US" sz="2400" dirty="0" smtClean="0"/>
+              <a:t>, </a:t>
+            </a:r>
+            <a:r>
+              <a:rPr lang="en-US" sz="2400" dirty="0" err="1" smtClean="0"/>
+              <a:t>Docker</a:t>
+            </a:r>
+            <a:r>
+              <a:rPr lang="en-US" sz="2400" dirty="0" smtClean="0"/>
+              <a:t> Compose, </a:t>
+            </a:r>
             <a:r>
               <a:rPr lang="en-US" sz="2400" dirty="0" err="1" smtClean="0"/>
               <a:t>Kubernetes</a:t>
             </a:r>
             <a:r>
               <a:rPr lang="en-US" sz="2400" dirty="0" smtClean="0"/>
-              <a:t> and </a:t>
+              <a:t>, Helm, </a:t>
+            </a:r>
+            <a:r>
+              <a:rPr lang="en-US" sz="2400" dirty="0" err="1" smtClean="0"/>
+              <a:t>Kieker</a:t>
+            </a:r>
+            <a:r>
+              <a:rPr lang="en-US" sz="2400" dirty="0" smtClean="0"/>
+              <a:t>, </a:t>
+            </a:r>
+            <a:r>
+              <a:rPr lang="en-US" sz="2400" dirty="0" err="1" smtClean="0"/>
+              <a:t>OpenTracing</a:t>
+            </a:r>
+            <a:r>
+              <a:rPr lang="en-US" sz="2400" dirty="0" smtClean="0"/>
+              <a:t>, </a:t>
             </a:r>
             <a:r>
               <a:rPr lang="en-US" sz="2400" dirty="0" err="1" smtClean="0"/>
@@ -8676,9 +8600,27 @@
             </a:r>
             <a:r>
               <a:rPr lang="en-US" sz="2400" dirty="0" smtClean="0"/>
-              <a:t>.</a:t>
-            </a:r>
-            <a:endParaRPr lang="en-US" sz="2400" dirty="0" smtClean="0"/>
+              <a:t>, </a:t>
+            </a:r>
+            <a:r>
+              <a:rPr lang="en-US" sz="2400" dirty="0" err="1" smtClean="0"/>
+              <a:t>RabbitMQ</a:t>
+            </a:r>
+            <a:r>
+              <a:rPr lang="en-US" sz="2400" dirty="0" smtClean="0"/>
+              <a:t>, LIMBO.</a:t>
+            </a:r>
+          </a:p>
+          <a:p>
+            <a:r>
+              <a:rPr lang="en-US" sz="2400" dirty="0" err="1" smtClean="0"/>
+              <a:t>JMeter</a:t>
+            </a:r>
+            <a:r>
+              <a:rPr lang="en-US" sz="2400" dirty="0" smtClean="0"/>
+              <a:t> and Locust.</a:t>
+            </a:r>
+            <a:endParaRPr lang="en-US" sz="2400" dirty="0"/>
           </a:p>
         </p:txBody>
       </p:sp>
@@ -8724,7 +8666,7 @@
           <a:p>
             <a:r>
               <a:rPr lang="en-US" dirty="0" err="1" smtClean="0"/>
-              <a:t>JPetStore</a:t>
+              <a:t>Bookinfo</a:t>
             </a:r>
             <a:endParaRPr lang="en-US" dirty="0"/>
           </a:p>
@@ -8749,12 +8691,39 @@
               <a:rPr lang="en-US" sz="2400" dirty="0" smtClean="0">
                 <a:hlinkClick r:id="rId2"/>
               </a:rPr>
-              <a:t>https://github.com/mybatis/jpetstore-6</a:t>
+              <a:t>https://istio.io/latest/docs/examples/bookinfo/</a:t>
             </a:r>
             <a:endParaRPr lang="en-US" sz="2400" dirty="0" smtClean="0"/>
           </a:p>
           <a:p>
-            <a:endParaRPr lang="en-US" sz="2400" dirty="0" smtClean="0"/>
+            <a:r>
+              <a:rPr lang="en-US" sz="2400" dirty="0" smtClean="0"/>
+              <a:t>Python, Ruby, Java.</a:t>
+            </a:r>
+          </a:p>
+          <a:p>
+            <a:r>
+              <a:rPr lang="en-US" sz="2400" dirty="0" smtClean="0"/>
+              <a:t>Node.js.</a:t>
+            </a:r>
+          </a:p>
+          <a:p>
+            <a:r>
+              <a:rPr lang="en-US" sz="2400" dirty="0" err="1" smtClean="0"/>
+              <a:t>Kubernetes</a:t>
+            </a:r>
+            <a:r>
+              <a:rPr lang="en-US" sz="2400" dirty="0" smtClean="0"/>
+              <a:t> and </a:t>
+            </a:r>
+            <a:r>
+              <a:rPr lang="en-US" sz="2400" dirty="0" err="1" smtClean="0"/>
+              <a:t>Istio</a:t>
+            </a:r>
+            <a:r>
+              <a:rPr lang="en-US" sz="2400" dirty="0" smtClean="0"/>
+              <a:t>.</a:t>
+            </a:r>
           </a:p>
         </p:txBody>
       </p:sp>
@@ -8800,6 +8769,14 @@
           <a:p>
             <a:r>
               <a:rPr lang="en-US" dirty="0" err="1" smtClean="0"/>
+              <a:t>JPetStore</a:t>
+            </a:r>
+            <a:r>
+              <a:rPr lang="en-US" dirty="0" smtClean="0"/>
+              <a:t> and </a:t>
+            </a:r>
+            <a:r>
+              <a:rPr lang="en-US" dirty="0" err="1" smtClean="0"/>
               <a:t>PetClinic</a:t>
             </a:r>
             <a:endParaRPr lang="en-US" dirty="0"/>
@@ -8825,11 +8802,164 @@
               <a:rPr lang="en-US" sz="2400" dirty="0" smtClean="0">
                 <a:hlinkClick r:id="rId2"/>
               </a:rPr>
-              <a:t>https://github.com/spring-petclinic/spring-petclinic-microservices</a:t>
+              <a:t>https://github.com/mybatis/jpetstore-6</a:t>
             </a:r>
             <a:endParaRPr lang="en-US" sz="2400" dirty="0" smtClean="0"/>
           </a:p>
           <a:p>
+            <a:r>
+              <a:rPr lang="en-US" sz="2400" dirty="0" smtClean="0"/>
+              <a:t>A Java, Maven, WAR-based </a:t>
+            </a:r>
+            <a:r>
+              <a:rPr lang="en-US" sz="2400" b="1" dirty="0" smtClean="0"/>
+              <a:t>monolithic</a:t>
+            </a:r>
+            <a:r>
+              <a:rPr lang="en-US" sz="2400" dirty="0" smtClean="0"/>
+              <a:t> web application using </a:t>
+            </a:r>
+            <a:r>
+              <a:rPr lang="en-US" sz="2400" dirty="0" err="1" smtClean="0"/>
+              <a:t>MyBatis</a:t>
+            </a:r>
+            <a:r>
+              <a:rPr lang="en-US" sz="2400" dirty="0" smtClean="0"/>
+              <a:t> 3, Spring, Stripes, JSP, HSQLDB, SQL, XML configuration, </a:t>
+            </a:r>
+            <a:r>
+              <a:rPr lang="en-US" sz="2400" dirty="0" err="1" smtClean="0"/>
+              <a:t>Docker</a:t>
+            </a:r>
+            <a:r>
+              <a:rPr lang="en-US" sz="2400" dirty="0" smtClean="0"/>
+              <a:t>, </a:t>
+            </a:r>
+            <a:r>
+              <a:rPr lang="en-US" sz="2400" dirty="0" err="1" smtClean="0"/>
+              <a:t>Docker</a:t>
+            </a:r>
+            <a:r>
+              <a:rPr lang="en-US" sz="2400" dirty="0" smtClean="0"/>
+              <a:t> Compose, and </a:t>
+            </a:r>
+            <a:r>
+              <a:rPr lang="en-US" sz="2400" dirty="0" err="1" smtClean="0"/>
+              <a:t>GitHub</a:t>
+            </a:r>
+            <a:r>
+              <a:rPr lang="en-US" sz="2400" dirty="0" smtClean="0"/>
+              <a:t> Actions.</a:t>
+            </a:r>
+          </a:p>
+          <a:p>
+            <a:r>
+              <a:rPr lang="en-US" sz="2400" dirty="0" smtClean="0">
+                <a:hlinkClick r:id="rId3"/>
+              </a:rPr>
+              <a:t>https</a:t>
+            </a:r>
+            <a:r>
+              <a:rPr lang="en-US" sz="2400" dirty="0" smtClean="0">
+                <a:hlinkClick r:id="rId3"/>
+              </a:rPr>
+              <a:t>://github.com/spring-petclinic/spring-petclinic-microservices</a:t>
+            </a:r>
+            <a:endParaRPr lang="en-US" sz="2400" dirty="0" smtClean="0"/>
+          </a:p>
+          <a:p>
+            <a:r>
+              <a:rPr lang="en-US" sz="2400" dirty="0" smtClean="0"/>
+              <a:t>Java Spring </a:t>
+            </a:r>
+            <a:r>
+              <a:rPr lang="en-US" sz="2400" dirty="0" smtClean="0"/>
+              <a:t>Boot, </a:t>
+            </a:r>
+            <a:r>
+              <a:rPr lang="en-US" sz="2400" dirty="0" smtClean="0"/>
+              <a:t>Spring Cloud Gateway, Eureka, Spring Cloud </a:t>
+            </a:r>
+            <a:r>
+              <a:rPr lang="en-US" sz="2400" dirty="0" err="1" smtClean="0"/>
+              <a:t>Config</a:t>
+            </a:r>
+            <a:r>
+              <a:rPr lang="en-US" sz="2400" dirty="0" smtClean="0"/>
+              <a:t>, Resilience4j, Micrometer, </a:t>
+            </a:r>
+            <a:r>
+              <a:rPr lang="en-US" sz="2400" dirty="0" err="1" smtClean="0"/>
+              <a:t>OpenTelemetry</a:t>
+            </a:r>
+            <a:r>
+              <a:rPr lang="en-US" sz="2400" dirty="0" smtClean="0"/>
+              <a:t>, </a:t>
+            </a:r>
+            <a:r>
+              <a:rPr lang="en-US" sz="2400" dirty="0" err="1" smtClean="0"/>
+              <a:t>Zipkin</a:t>
+            </a:r>
+            <a:r>
+              <a:rPr lang="en-US" sz="2400" dirty="0" smtClean="0"/>
+              <a:t>, Prometheus, </a:t>
+            </a:r>
+            <a:r>
+              <a:rPr lang="en-US" sz="2400" dirty="0" err="1" smtClean="0"/>
+              <a:t>Grafana</a:t>
+            </a:r>
+            <a:r>
+              <a:rPr lang="en-US" sz="2400" dirty="0" smtClean="0"/>
+              <a:t>, </a:t>
+            </a:r>
+            <a:r>
+              <a:rPr lang="en-US" sz="2400" dirty="0" err="1" smtClean="0"/>
+              <a:t>AngularJS</a:t>
+            </a:r>
+            <a:r>
+              <a:rPr lang="en-US" sz="2400" dirty="0" smtClean="0"/>
+              <a:t>, HSQLDB/</a:t>
+            </a:r>
+            <a:r>
+              <a:rPr lang="en-US" sz="2400" dirty="0" err="1" smtClean="0"/>
+              <a:t>MySQL</a:t>
+            </a:r>
+            <a:r>
+              <a:rPr lang="en-US" sz="2400" dirty="0" smtClean="0"/>
+              <a:t>, Maven, </a:t>
+            </a:r>
+            <a:r>
+              <a:rPr lang="en-US" sz="2400" dirty="0" err="1" smtClean="0"/>
+              <a:t>Docker</a:t>
+            </a:r>
+            <a:r>
+              <a:rPr lang="en-US" sz="2400" dirty="0" smtClean="0"/>
+              <a:t>/</a:t>
+            </a:r>
+            <a:r>
+              <a:rPr lang="en-US" sz="2400" dirty="0" err="1" smtClean="0"/>
+              <a:t>Podman</a:t>
+            </a:r>
+            <a:r>
+              <a:rPr lang="en-US" sz="2400" dirty="0" smtClean="0"/>
+              <a:t>, </a:t>
+            </a:r>
+            <a:r>
+              <a:rPr lang="en-US" sz="2400" dirty="0" err="1" smtClean="0"/>
+              <a:t>Docker</a:t>
+            </a:r>
+            <a:r>
+              <a:rPr lang="en-US" sz="2400" dirty="0" smtClean="0"/>
+              <a:t> Compose, and </a:t>
+            </a:r>
+            <a:r>
+              <a:rPr lang="en-US" sz="2400" dirty="0" err="1" smtClean="0"/>
+              <a:t>JMeter</a:t>
+            </a:r>
+            <a:r>
+              <a:rPr lang="en-US" sz="2400" dirty="0" smtClean="0"/>
+              <a:t>.</a:t>
+            </a:r>
             <a:endParaRPr lang="en-US" sz="2400" dirty="0" smtClean="0"/>
           </a:p>
         </p:txBody>
@@ -8908,11 +9038,7 @@
           <a:p>
             <a:r>
               <a:rPr lang="en-US" sz="2400" dirty="0" smtClean="0"/>
-              <a:t>Spring Boot, </a:t>
-            </a:r>
-            <a:r>
-              <a:rPr lang="en-US" sz="2400" dirty="0" smtClean="0"/>
-              <a:t>Go, Node.js, </a:t>
+              <a:t>Spring Boot, Go, Node.js, </a:t>
             </a:r>
             <a:r>
               <a:rPr lang="en-US" sz="2400" dirty="0" err="1" smtClean="0"/>
@@ -8946,7 +9072,6 @@
               <a:rPr lang="en-US" sz="2400" dirty="0" smtClean="0"/>
               <a:t>.</a:t>
             </a:r>
-            <a:endParaRPr lang="en-US" sz="2400" dirty="0" smtClean="0"/>
           </a:p>
         </p:txBody>
       </p:sp>
@@ -9022,6 +9147,34 @@
             <a:endParaRPr lang="en-US" sz="2400" dirty="0" smtClean="0"/>
           </a:p>
           <a:p>
+            <a:r>
+              <a:rPr lang="en-US" sz="2400" dirty="0" smtClean="0"/>
+              <a:t>A </a:t>
+            </a:r>
+            <a:r>
+              <a:rPr lang="en-US" sz="2400" dirty="0" err="1" smtClean="0"/>
+              <a:t>microservice</a:t>
+            </a:r>
+            <a:r>
+              <a:rPr lang="en-US" sz="2400" dirty="0" smtClean="0"/>
+              <a:t> benchmark factory: it generates configurable dummy </a:t>
+            </a:r>
+            <a:r>
+              <a:rPr lang="en-US" sz="2400" dirty="0" err="1" smtClean="0"/>
+              <a:t>microservice</a:t>
+            </a:r>
+            <a:r>
+              <a:rPr lang="en-US" sz="2400" dirty="0" smtClean="0"/>
+              <a:t> applications and deploys them on </a:t>
+            </a:r>
+            <a:r>
+              <a:rPr lang="en-US" sz="2400" dirty="0" err="1" smtClean="0"/>
+              <a:t>Kubernetes</a:t>
+            </a:r>
+            <a:r>
+              <a:rPr lang="en-US" sz="2400" dirty="0" smtClean="0"/>
+              <a:t>.</a:t>
+            </a:r>
             <a:endParaRPr lang="en-US" sz="2400" dirty="0" smtClean="0"/>
           </a:p>
         </p:txBody>

--- a/Microservices/01.1. Introduction To Microservices.pptx
+++ b/Microservices/01.1. Introduction To Microservices.pptx
@@ -5757,11 +5757,7 @@
           <a:p>
             <a:r>
               <a:rPr lang="en-US" dirty="0" smtClean="0"/>
-              <a:t>One front-end. (Possible multiple micro-frontends</a:t>
-            </a:r>
-            <a:r>
-              <a:rPr lang="en-US" dirty="0" smtClean="0"/>
-              <a:t>.)</a:t>
+              <a:t>One front-end. (Possible multiple micro-frontends.)</a:t>
             </a:r>
           </a:p>
           <a:p>
@@ -5769,7 +5765,6 @@
               <a:rPr lang="en-US" dirty="0" smtClean="0"/>
               <a:t>Possible API gateways.</a:t>
             </a:r>
-            <a:endParaRPr lang="en-US" dirty="0" smtClean="0"/>
           </a:p>
         </p:txBody>
       </p:sp>
@@ -8374,83 +8369,221 @@
           <a:lstStyle/>
           <a:p>
             <a:r>
-              <a:rPr lang="en-US" sz="2400" dirty="0" smtClean="0">
+              <a:rPr lang="en-US" sz="2200" dirty="0" smtClean="0">
                 <a:hlinkClick r:id="rId2"/>
               </a:rPr>
               <a:t>https://github.com/googlecloudplatform/microservices-demo</a:t>
             </a:r>
-            <a:endParaRPr lang="en-US" sz="2400" dirty="0" smtClean="0"/>
-          </a:p>
-          <a:p>
-            <a:r>
-              <a:rPr lang="en-US" sz="2400" dirty="0" smtClean="0"/>
+            <a:endParaRPr lang="en-US" sz="2200" dirty="0" smtClean="0"/>
+          </a:p>
+          <a:p>
+            <a:r>
+              <a:rPr lang="en-US" sz="2200" dirty="0" smtClean="0"/>
               <a:t>Go, Python, C#, Node.js, </a:t>
             </a:r>
             <a:r>
-              <a:rPr lang="en-US" sz="2400" dirty="0" err="1" smtClean="0"/>
+              <a:rPr lang="en-US" sz="2200" dirty="0" err="1" smtClean="0"/>
               <a:t>gRPC</a:t>
             </a:r>
             <a:r>
-              <a:rPr lang="en-US" sz="2400" dirty="0" smtClean="0"/>
+              <a:rPr lang="en-US" sz="2200" dirty="0" smtClean="0"/>
               <a:t>, </a:t>
             </a:r>
             <a:r>
-              <a:rPr lang="en-US" sz="2400" dirty="0" err="1" smtClean="0"/>
+              <a:rPr lang="en-US" sz="2200" dirty="0" err="1" smtClean="0"/>
               <a:t>Docker</a:t>
             </a:r>
             <a:r>
-              <a:rPr lang="en-US" sz="2400" dirty="0" smtClean="0"/>
+              <a:rPr lang="en-US" sz="2200" dirty="0" smtClean="0"/>
               <a:t>, </a:t>
             </a:r>
             <a:r>
-              <a:rPr lang="en-US" sz="2400" dirty="0" err="1" smtClean="0"/>
+              <a:rPr lang="en-US" sz="2200" dirty="0" err="1" smtClean="0"/>
               <a:t>Kubernetes</a:t>
             </a:r>
             <a:r>
-              <a:rPr lang="en-US" sz="2400" dirty="0" smtClean="0"/>
+              <a:rPr lang="en-US" sz="2200" dirty="0" smtClean="0"/>
               <a:t>, </a:t>
             </a:r>
             <a:r>
-              <a:rPr lang="en-US" sz="2400" dirty="0" err="1" smtClean="0"/>
+              <a:rPr lang="en-US" sz="2200" dirty="0" err="1" smtClean="0"/>
               <a:t>Skaffold</a:t>
             </a:r>
             <a:r>
-              <a:rPr lang="en-US" sz="2400" dirty="0" smtClean="0"/>
+              <a:rPr lang="en-US" sz="2200" dirty="0" smtClean="0"/>
               <a:t>, </a:t>
             </a:r>
             <a:r>
-              <a:rPr lang="en-US" sz="2400" dirty="0" err="1" smtClean="0"/>
+              <a:rPr lang="en-US" sz="2200" dirty="0" err="1" smtClean="0"/>
               <a:t>Kustomize</a:t>
             </a:r>
             <a:r>
-              <a:rPr lang="en-US" sz="2400" dirty="0" smtClean="0"/>
+              <a:rPr lang="en-US" sz="2200" dirty="0" smtClean="0"/>
               <a:t>, Helm, </a:t>
             </a:r>
             <a:r>
-              <a:rPr lang="en-US" sz="2400" dirty="0" err="1" smtClean="0"/>
+              <a:rPr lang="en-US" sz="2200" dirty="0" err="1" smtClean="0"/>
               <a:t>Terraform</a:t>
             </a:r>
             <a:r>
-              <a:rPr lang="en-US" sz="2400" dirty="0" smtClean="0"/>
+              <a:rPr lang="en-US" sz="2200" dirty="0" smtClean="0"/>
               <a:t>, GKE, </a:t>
             </a:r>
             <a:r>
-              <a:rPr lang="en-US" sz="2400" dirty="0" err="1" smtClean="0"/>
+              <a:rPr lang="en-US" sz="2200" dirty="0" err="1" smtClean="0"/>
               <a:t>Istio</a:t>
             </a:r>
             <a:r>
-              <a:rPr lang="en-US" sz="2400" dirty="0" smtClean="0"/>
+              <a:rPr lang="en-US" sz="2200" dirty="0" smtClean="0"/>
               <a:t>, and </a:t>
             </a:r>
             <a:r>
-              <a:rPr lang="en-US" sz="2400" dirty="0" err="1" smtClean="0"/>
+              <a:rPr lang="en-US" sz="2200" dirty="0" err="1" smtClean="0"/>
               <a:t>Redis</a:t>
             </a:r>
             <a:r>
-              <a:rPr lang="en-US" sz="2400" dirty="0" smtClean="0"/>
+              <a:rPr lang="en-US" sz="2200" dirty="0" smtClean="0"/>
               <a:t>.</a:t>
             </a:r>
-            <a:endParaRPr lang="en-US" sz="2400" dirty="0"/>
+          </a:p>
+          <a:p>
+            <a:r>
+              <a:rPr lang="en-US" sz="2200" dirty="0" smtClean="0">
+                <a:hlinkClick r:id="rId3"/>
+              </a:rPr>
+              <a:t>https://</a:t>
+            </a:r>
+            <a:r>
+              <a:rPr lang="en-US" sz="2200" dirty="0" smtClean="0">
+                <a:hlinkClick r:id="rId3"/>
+              </a:rPr>
+              <a:t>github.com/GoogleCloudPlatform/microservices-demo/blob/main/docs/development-guide.md</a:t>
+            </a:r>
+            <a:endParaRPr lang="en-US" sz="2200" dirty="0" smtClean="0"/>
+          </a:p>
+          <a:p>
+            <a:r>
+              <a:rPr lang="en-US" sz="2200" dirty="0" err="1" smtClean="0"/>
+              <a:t>git</a:t>
+            </a:r>
+            <a:r>
+              <a:rPr lang="en-US" sz="2200" dirty="0" smtClean="0"/>
+              <a:t> clone </a:t>
+            </a:r>
+            <a:r>
+              <a:rPr lang="en-US" sz="2200" dirty="0" smtClean="0">
+                <a:hlinkClick r:id="rId4"/>
+              </a:rPr>
+              <a:t>https://</a:t>
+            </a:r>
+            <a:r>
+              <a:rPr lang="en-US" sz="2200" dirty="0" smtClean="0">
+                <a:hlinkClick r:id="rId4"/>
+              </a:rPr>
+              <a:t>github.com/GoogleCloudPlatform/microservices-demo</a:t>
+            </a:r>
+            <a:endParaRPr lang="en-US" sz="2200" dirty="0" smtClean="0"/>
+          </a:p>
+          <a:p>
+            <a:r>
+              <a:rPr lang="en-US" sz="2200" dirty="0" err="1" smtClean="0"/>
+              <a:t>cd</a:t>
+            </a:r>
+            <a:r>
+              <a:rPr lang="en-US" sz="2200" dirty="0" smtClean="0"/>
+              <a:t> </a:t>
+            </a:r>
+            <a:r>
+              <a:rPr lang="en-US" sz="2200" dirty="0" err="1" smtClean="0"/>
+              <a:t>microservices</a:t>
+            </a:r>
+            <a:r>
+              <a:rPr lang="en-US" sz="2200" dirty="0" smtClean="0"/>
+              <a:t>-demo</a:t>
+            </a:r>
+            <a:r>
+              <a:rPr lang="en-US" sz="2200" dirty="0" smtClean="0"/>
+              <a:t>/</a:t>
+            </a:r>
+          </a:p>
+          <a:p>
+            <a:r>
+              <a:rPr lang="en-US" sz="2200" dirty="0" smtClean="0"/>
+              <a:t>Start </a:t>
+            </a:r>
+            <a:r>
+              <a:rPr lang="en-US" sz="2200" dirty="0" err="1" smtClean="0"/>
+              <a:t>Docker</a:t>
+            </a:r>
+            <a:r>
+              <a:rPr lang="en-US" sz="2200" dirty="0" smtClean="0"/>
+              <a:t>.</a:t>
+            </a:r>
+          </a:p>
+          <a:p>
+            <a:r>
+              <a:rPr lang="en-US" sz="2200" dirty="0" err="1" smtClean="0"/>
+              <a:t>minikube</a:t>
+            </a:r>
+            <a:r>
+              <a:rPr lang="en-US" sz="2200" dirty="0" smtClean="0"/>
+              <a:t> start --</a:t>
+            </a:r>
+            <a:r>
+              <a:rPr lang="en-US" sz="2200" dirty="0" err="1" smtClean="0"/>
+              <a:t>cpus</a:t>
+            </a:r>
+            <a:r>
+              <a:rPr lang="en-US" sz="2200" dirty="0" smtClean="0"/>
+              <a:t>=4 --memory 4096 --disk-size </a:t>
+            </a:r>
+            <a:r>
+              <a:rPr lang="en-US" sz="2200" dirty="0" smtClean="0"/>
+              <a:t>32g</a:t>
+            </a:r>
+          </a:p>
+          <a:p>
+            <a:r>
+              <a:rPr lang="en-US" sz="2200" dirty="0" err="1" smtClean="0"/>
+              <a:t>kubectl</a:t>
+            </a:r>
+            <a:r>
+              <a:rPr lang="en-US" sz="2200" dirty="0" smtClean="0"/>
+              <a:t> get </a:t>
+            </a:r>
+            <a:r>
+              <a:rPr lang="en-US" sz="2200" dirty="0" smtClean="0"/>
+              <a:t>nodes</a:t>
+            </a:r>
+          </a:p>
+          <a:p>
+            <a:r>
+              <a:rPr lang="en-US" sz="2200" dirty="0" err="1" smtClean="0"/>
+              <a:t>skaffold</a:t>
+            </a:r>
+            <a:r>
+              <a:rPr lang="en-US" sz="2200" dirty="0" smtClean="0"/>
+              <a:t> run # </a:t>
+            </a:r>
+            <a:r>
+              <a:rPr lang="en-US" sz="2200" dirty="0" smtClean="0">
+                <a:hlinkClick r:id="rId5"/>
+              </a:rPr>
+              <a:t>https://</a:t>
+            </a:r>
+            <a:r>
+              <a:rPr lang="en-US" sz="2200" smtClean="0">
+                <a:hlinkClick r:id="rId5"/>
+              </a:rPr>
+              <a:t>skaffold.dev/docs/references/cli</a:t>
+            </a:r>
+            <a:r>
+              <a:rPr lang="en-US" sz="2200" smtClean="0">
+                <a:hlinkClick r:id="rId5"/>
+              </a:rPr>
+              <a:t>/</a:t>
+            </a:r>
+            <a:endParaRPr lang="en-US" sz="2200" dirty="0" smtClean="0"/>
           </a:p>
         </p:txBody>
       </p:sp>
@@ -8857,28 +8990,14 @@
               <a:rPr lang="en-US" sz="2400" dirty="0" smtClean="0">
                 <a:hlinkClick r:id="rId3"/>
               </a:rPr>
-              <a:t>https</a:t>
-            </a:r>
-            <a:r>
-              <a:rPr lang="en-US" sz="2400" dirty="0" smtClean="0">
-                <a:hlinkClick r:id="rId3"/>
-              </a:rPr>
-              <a:t>://github.com/spring-petclinic/spring-petclinic-microservices</a:t>
+              <a:t>https://github.com/spring-petclinic/spring-petclinic-microservices</a:t>
             </a:r>
             <a:endParaRPr lang="en-US" sz="2400" dirty="0" smtClean="0"/>
           </a:p>
           <a:p>
             <a:r>
               <a:rPr lang="en-US" sz="2400" dirty="0" smtClean="0"/>
-              <a:t>Java Spring </a:t>
-            </a:r>
-            <a:r>
-              <a:rPr lang="en-US" sz="2400" dirty="0" smtClean="0"/>
-              <a:t>Boot, </a:t>
-            </a:r>
-            <a:r>
-              <a:rPr lang="en-US" sz="2400" dirty="0" smtClean="0"/>
-              <a:t>Spring Cloud Gateway, Eureka, Spring Cloud </a:t>
+              <a:t>Java Spring Boot, Spring Cloud Gateway, Eureka, Spring Cloud </a:t>
             </a:r>
             <a:r>
               <a:rPr lang="en-US" sz="2400" dirty="0" err="1" smtClean="0"/>
@@ -8960,7 +9079,6 @@
               <a:rPr lang="en-US" sz="2400" dirty="0" smtClean="0"/>
               <a:t>.</a:t>
             </a:r>
-            <a:endParaRPr lang="en-US" sz="2400" dirty="0" smtClean="0"/>
           </a:p>
         </p:txBody>
       </p:sp>
@@ -9175,7 +9293,6 @@
               <a:rPr lang="en-US" sz="2400" dirty="0" smtClean="0"/>
               <a:t>.</a:t>
             </a:r>
-            <a:endParaRPr lang="en-US" sz="2400" dirty="0" smtClean="0"/>
           </a:p>
         </p:txBody>
       </p:sp>

--- a/Microservices/01.1. Introduction To Microservices.pptx
+++ b/Microservices/01.1. Introduction To Microservices.pptx
@@ -8451,13 +8451,7 @@
               <a:rPr lang="en-US" sz="2200" dirty="0" smtClean="0">
                 <a:hlinkClick r:id="rId3"/>
               </a:rPr>
-              <a:t>https://</a:t>
-            </a:r>
-            <a:r>
-              <a:rPr lang="en-US" sz="2200" dirty="0" smtClean="0">
-                <a:hlinkClick r:id="rId3"/>
-              </a:rPr>
-              <a:t>github.com/GoogleCloudPlatform/microservices-demo/blob/main/docs/development-guide.md</a:t>
+              <a:t>https://github.com/GoogleCloudPlatform/microservices-demo/blob/main/docs/development-guide.md</a:t>
             </a:r>
             <a:endParaRPr lang="en-US" sz="2200" dirty="0" smtClean="0"/>
           </a:p>
@@ -8474,13 +8468,7 @@
               <a:rPr lang="en-US" sz="2200" dirty="0" smtClean="0">
                 <a:hlinkClick r:id="rId4"/>
               </a:rPr>
-              <a:t>https://</a:t>
-            </a:r>
-            <a:r>
-              <a:rPr lang="en-US" sz="2200" dirty="0" smtClean="0">
-                <a:hlinkClick r:id="rId4"/>
-              </a:rPr>
-              <a:t>github.com/GoogleCloudPlatform/microservices-demo</a:t>
+              <a:t>https://github.com/GoogleCloudPlatform/microservices-demo</a:t>
             </a:r>
             <a:endParaRPr lang="en-US" sz="2200" dirty="0" smtClean="0"/>
           </a:p>
@@ -8499,11 +8487,7 @@
             </a:r>
             <a:r>
               <a:rPr lang="en-US" sz="2200" dirty="0" smtClean="0"/>
-              <a:t>-demo</a:t>
-            </a:r>
-            <a:r>
-              <a:rPr lang="en-US" sz="2200" dirty="0" smtClean="0"/>
-              <a:t>/</a:t>
+              <a:t>-demo/</a:t>
             </a:r>
           </a:p>
           <a:p>
@@ -8535,11 +8519,7 @@
             </a:r>
             <a:r>
               <a:rPr lang="en-US" sz="2200" dirty="0" smtClean="0"/>
-              <a:t>=4 --memory 4096 --disk-size </a:t>
-            </a:r>
-            <a:r>
-              <a:rPr lang="en-US" sz="2200" dirty="0" smtClean="0"/>
-              <a:t>32g</a:t>
+              <a:t>=4 --memory 4096 --disk-size 32g</a:t>
             </a:r>
           </a:p>
           <a:p>
@@ -8549,11 +8529,7 @@
             </a:r>
             <a:r>
               <a:rPr lang="en-US" sz="2200" dirty="0" smtClean="0"/>
-              <a:t> get </a:t>
-            </a:r>
-            <a:r>
-              <a:rPr lang="en-US" sz="2200" dirty="0" smtClean="0"/>
-              <a:t>nodes</a:t>
+              <a:t> get nodes</a:t>
             </a:r>
           </a:p>
           <a:p>
@@ -8569,19 +8545,7 @@
               <a:rPr lang="en-US" sz="2200" dirty="0" smtClean="0">
                 <a:hlinkClick r:id="rId5"/>
               </a:rPr>
-              <a:t>https://</a:t>
-            </a:r>
-            <a:r>
-              <a:rPr lang="en-US" sz="2200" smtClean="0">
-                <a:hlinkClick r:id="rId5"/>
-              </a:rPr>
-              <a:t>skaffold.dev/docs/references/cli</a:t>
-            </a:r>
-            <a:r>
-              <a:rPr lang="en-US" sz="2200" smtClean="0">
-                <a:hlinkClick r:id="rId5"/>
-              </a:rPr>
-              <a:t>/</a:t>
+              <a:t>https://skaffold.dev/docs/references/cli/</a:t>
             </a:r>
             <a:endParaRPr lang="en-US" sz="2200" dirty="0" smtClean="0"/>
           </a:p>

--- a/Microservices/01.1. Introduction To Microservices.pptx
+++ b/Microservices/01.1. Introduction To Microservices.pptx
@@ -48,8 +48,8 @@
     <p:sldId id="684" r:id="rId39"/>
     <p:sldId id="685" r:id="rId40"/>
     <p:sldId id="686" r:id="rId41"/>
-    <p:sldId id="688" r:id="rId42"/>
-    <p:sldId id="689" r:id="rId43"/>
+    <p:sldId id="689" r:id="rId42"/>
+    <p:sldId id="688" r:id="rId43"/>
     <p:sldId id="692" r:id="rId44"/>
     <p:sldId id="694" r:id="rId45"/>
     <p:sldId id="693" r:id="rId46"/>
@@ -268,7 +268,7 @@
             <a:fld id="{2F0940CE-BE1D-4C40-AF8B-3898A4D1F5EC}" type="datetimeFigureOut">
               <a:rPr lang="en-US" smtClean="0"/>
               <a:pPr/>
-              <a:t>7/7/2026</a:t>
+              <a:t>7/8/2026</a:t>
             </a:fld>
             <a:endParaRPr lang="en-US"/>
           </a:p>
@@ -889,7 +889,7 @@
               <a:pPr>
                 <a:defRPr/>
               </a:pPr>
-              <a:t>7/7/2026</a:t>
+              <a:t>7/8/2026</a:t>
             </a:fld>
             <a:endParaRPr lang="en-US"/>
           </a:p>
@@ -1081,7 +1081,7 @@
               <a:pPr>
                 <a:defRPr/>
               </a:pPr>
-              <a:t>7/7/2026</a:t>
+              <a:t>7/8/2026</a:t>
             </a:fld>
             <a:endParaRPr lang="en-US"/>
           </a:p>
@@ -1283,7 +1283,7 @@
               <a:pPr>
                 <a:defRPr/>
               </a:pPr>
-              <a:t>7/7/2026</a:t>
+              <a:t>7/8/2026</a:t>
             </a:fld>
             <a:endParaRPr lang="en-US"/>
           </a:p>
@@ -1475,7 +1475,7 @@
               <a:pPr>
                 <a:defRPr/>
               </a:pPr>
-              <a:t>7/7/2026</a:t>
+              <a:t>7/8/2026</a:t>
             </a:fld>
             <a:endParaRPr lang="en-US"/>
           </a:p>
@@ -1743,7 +1743,7 @@
               <a:pPr>
                 <a:defRPr/>
               </a:pPr>
-              <a:t>7/7/2026</a:t>
+              <a:t>7/8/2026</a:t>
             </a:fld>
             <a:endParaRPr lang="en-US"/>
           </a:p>
@@ -2053,7 +2053,7 @@
               <a:pPr>
                 <a:defRPr/>
               </a:pPr>
-              <a:t>7/7/2026</a:t>
+              <a:t>7/8/2026</a:t>
             </a:fld>
             <a:endParaRPr lang="en-US"/>
           </a:p>
@@ -2497,7 +2497,7 @@
               <a:pPr>
                 <a:defRPr/>
               </a:pPr>
-              <a:t>7/7/2026</a:t>
+              <a:t>7/8/2026</a:t>
             </a:fld>
             <a:endParaRPr lang="en-US"/>
           </a:p>
@@ -2637,7 +2637,7 @@
               <a:pPr>
                 <a:defRPr/>
               </a:pPr>
-              <a:t>7/7/2026</a:t>
+              <a:t>7/8/2026</a:t>
             </a:fld>
             <a:endParaRPr lang="en-US"/>
           </a:p>
@@ -2754,7 +2754,7 @@
               <a:pPr>
                 <a:defRPr/>
               </a:pPr>
-              <a:t>7/7/2026</a:t>
+              <a:t>7/8/2026</a:t>
             </a:fld>
             <a:endParaRPr lang="en-US"/>
           </a:p>
@@ -3053,7 +3053,7 @@
               <a:pPr>
                 <a:defRPr/>
               </a:pPr>
-              <a:t>7/7/2026</a:t>
+              <a:t>7/8/2026</a:t>
             </a:fld>
             <a:endParaRPr lang="en-US"/>
           </a:p>
@@ -3331,7 +3331,7 @@
               <a:pPr>
                 <a:defRPr/>
               </a:pPr>
-              <a:t>7/7/2026</a:t>
+              <a:t>7/8/2026</a:t>
             </a:fld>
             <a:endParaRPr lang="en-US"/>
           </a:p>
@@ -3579,7 +3579,7 @@
               <a:pPr>
                 <a:defRPr/>
               </a:pPr>
-              <a:t>7/7/2026</a:t>
+              <a:t>7/8/2026</a:t>
             </a:fld>
             <a:endParaRPr lang="en-US"/>
           </a:p>
@@ -8369,185 +8369,195 @@
           <a:lstStyle/>
           <a:p>
             <a:r>
-              <a:rPr lang="en-US" sz="2200" dirty="0" smtClean="0">
+              <a:rPr lang="en-US" sz="2000" dirty="0" smtClean="0">
                 <a:hlinkClick r:id="rId2"/>
               </a:rPr>
               <a:t>https://github.com/googlecloudplatform/microservices-demo</a:t>
             </a:r>
-            <a:endParaRPr lang="en-US" sz="2200" dirty="0" smtClean="0"/>
-          </a:p>
-          <a:p>
-            <a:r>
-              <a:rPr lang="en-US" sz="2200" dirty="0" smtClean="0"/>
+            <a:endParaRPr lang="en-US" sz="2000" dirty="0" smtClean="0"/>
+          </a:p>
+          <a:p>
+            <a:r>
+              <a:rPr lang="en-US" sz="2000" dirty="0" smtClean="0"/>
               <a:t>Go, Python, C#, Node.js, </a:t>
             </a:r>
             <a:r>
-              <a:rPr lang="en-US" sz="2200" dirty="0" err="1" smtClean="0"/>
+              <a:rPr lang="en-US" sz="2000" dirty="0" err="1" smtClean="0"/>
               <a:t>gRPC</a:t>
             </a:r>
             <a:r>
-              <a:rPr lang="en-US" sz="2200" dirty="0" smtClean="0"/>
+              <a:rPr lang="en-US" sz="2000" dirty="0" smtClean="0"/>
               <a:t>, </a:t>
             </a:r>
             <a:r>
-              <a:rPr lang="en-US" sz="2200" dirty="0" err="1" smtClean="0"/>
+              <a:rPr lang="en-US" sz="2000" dirty="0" err="1" smtClean="0"/>
               <a:t>Docker</a:t>
             </a:r>
             <a:r>
-              <a:rPr lang="en-US" sz="2200" dirty="0" smtClean="0"/>
+              <a:rPr lang="en-US" sz="2000" dirty="0" smtClean="0"/>
               <a:t>, </a:t>
             </a:r>
             <a:r>
-              <a:rPr lang="en-US" sz="2200" dirty="0" err="1" smtClean="0"/>
+              <a:rPr lang="en-US" sz="2000" dirty="0" err="1" smtClean="0"/>
               <a:t>Kubernetes</a:t>
             </a:r>
             <a:r>
-              <a:rPr lang="en-US" sz="2200" dirty="0" smtClean="0"/>
+              <a:rPr lang="en-US" sz="2000" dirty="0" smtClean="0"/>
               <a:t>, </a:t>
             </a:r>
             <a:r>
-              <a:rPr lang="en-US" sz="2200" dirty="0" err="1" smtClean="0"/>
+              <a:rPr lang="en-US" sz="2000" dirty="0" err="1" smtClean="0"/>
               <a:t>Skaffold</a:t>
             </a:r>
             <a:r>
-              <a:rPr lang="en-US" sz="2200" dirty="0" smtClean="0"/>
+              <a:rPr lang="en-US" sz="2000" dirty="0" smtClean="0"/>
               <a:t>, </a:t>
             </a:r>
             <a:r>
-              <a:rPr lang="en-US" sz="2200" dirty="0" err="1" smtClean="0"/>
+              <a:rPr lang="en-US" sz="2000" dirty="0" err="1" smtClean="0"/>
               <a:t>Kustomize</a:t>
             </a:r>
             <a:r>
-              <a:rPr lang="en-US" sz="2200" dirty="0" smtClean="0"/>
+              <a:rPr lang="en-US" sz="2000" dirty="0" smtClean="0"/>
               <a:t>, Helm, </a:t>
             </a:r>
             <a:r>
-              <a:rPr lang="en-US" sz="2200" dirty="0" err="1" smtClean="0"/>
+              <a:rPr lang="en-US" sz="2000" dirty="0" err="1" smtClean="0"/>
               <a:t>Terraform</a:t>
             </a:r>
             <a:r>
-              <a:rPr lang="en-US" sz="2200" dirty="0" smtClean="0"/>
+              <a:rPr lang="en-US" sz="2000" dirty="0" smtClean="0"/>
               <a:t>, GKE, </a:t>
             </a:r>
             <a:r>
-              <a:rPr lang="en-US" sz="2200" dirty="0" err="1" smtClean="0"/>
+              <a:rPr lang="en-US" sz="2000" dirty="0" err="1" smtClean="0"/>
               <a:t>Istio</a:t>
             </a:r>
             <a:r>
-              <a:rPr lang="en-US" sz="2200" dirty="0" smtClean="0"/>
+              <a:rPr lang="en-US" sz="2000" dirty="0" smtClean="0"/>
               <a:t>, and </a:t>
             </a:r>
             <a:r>
-              <a:rPr lang="en-US" sz="2200" dirty="0" err="1" smtClean="0"/>
+              <a:rPr lang="en-US" sz="2000" dirty="0" err="1" smtClean="0"/>
               <a:t>Redis</a:t>
             </a:r>
             <a:r>
-              <a:rPr lang="en-US" sz="2200" dirty="0" smtClean="0"/>
+              <a:rPr lang="en-US" sz="2000" dirty="0" smtClean="0"/>
               <a:t>.</a:t>
             </a:r>
           </a:p>
           <a:p>
             <a:r>
-              <a:rPr lang="en-US" sz="2200" dirty="0" smtClean="0">
+              <a:rPr lang="en-US" sz="2000" dirty="0" smtClean="0">
                 <a:hlinkClick r:id="rId3"/>
               </a:rPr>
               <a:t>https://github.com/GoogleCloudPlatform/microservices-demo/blob/main/docs/development-guide.md</a:t>
             </a:r>
-            <a:endParaRPr lang="en-US" sz="2200" dirty="0" smtClean="0"/>
-          </a:p>
-          <a:p>
-            <a:r>
-              <a:rPr lang="en-US" sz="2200" dirty="0" err="1" smtClean="0"/>
+            <a:endParaRPr lang="en-US" sz="2000" dirty="0" smtClean="0"/>
+          </a:p>
+          <a:p>
+            <a:r>
+              <a:rPr lang="en-US" sz="2000" dirty="0" err="1" smtClean="0"/>
               <a:t>git</a:t>
             </a:r>
             <a:r>
-              <a:rPr lang="en-US" sz="2200" dirty="0" smtClean="0"/>
+              <a:rPr lang="en-US" sz="2000" dirty="0" smtClean="0"/>
               <a:t> clone </a:t>
             </a:r>
             <a:r>
-              <a:rPr lang="en-US" sz="2200" dirty="0" smtClean="0">
+              <a:rPr lang="en-US" sz="2000" dirty="0" smtClean="0">
                 <a:hlinkClick r:id="rId4"/>
               </a:rPr>
               <a:t>https://github.com/GoogleCloudPlatform/microservices-demo</a:t>
             </a:r>
-            <a:endParaRPr lang="en-US" sz="2200" dirty="0" smtClean="0"/>
-          </a:p>
-          <a:p>
-            <a:r>
-              <a:rPr lang="en-US" sz="2200" dirty="0" err="1" smtClean="0"/>
+            <a:endParaRPr lang="en-US" sz="2000" dirty="0" smtClean="0"/>
+          </a:p>
+          <a:p>
+            <a:r>
+              <a:rPr lang="en-US" sz="2000" dirty="0" err="1" smtClean="0"/>
               <a:t>cd</a:t>
             </a:r>
             <a:r>
-              <a:rPr lang="en-US" sz="2200" dirty="0" smtClean="0"/>
+              <a:rPr lang="en-US" sz="2000" dirty="0" smtClean="0"/>
               <a:t> </a:t>
             </a:r>
             <a:r>
-              <a:rPr lang="en-US" sz="2200" dirty="0" err="1" smtClean="0"/>
+              <a:rPr lang="en-US" sz="2000" dirty="0" err="1" smtClean="0"/>
               <a:t>microservices</a:t>
             </a:r>
             <a:r>
-              <a:rPr lang="en-US" sz="2200" dirty="0" smtClean="0"/>
+              <a:rPr lang="en-US" sz="2000" dirty="0" smtClean="0"/>
               <a:t>-demo/</a:t>
             </a:r>
           </a:p>
           <a:p>
             <a:r>
-              <a:rPr lang="en-US" sz="2200" dirty="0" smtClean="0"/>
+              <a:rPr lang="en-US" sz="2000" dirty="0" smtClean="0"/>
               <a:t>Start </a:t>
             </a:r>
             <a:r>
-              <a:rPr lang="en-US" sz="2200" dirty="0" err="1" smtClean="0"/>
+              <a:rPr lang="en-US" sz="2000" dirty="0" err="1" smtClean="0"/>
               <a:t>Docker</a:t>
             </a:r>
             <a:r>
-              <a:rPr lang="en-US" sz="2200" dirty="0" smtClean="0"/>
+              <a:rPr lang="en-US" sz="2000" dirty="0" smtClean="0"/>
               <a:t>.</a:t>
             </a:r>
           </a:p>
           <a:p>
             <a:r>
-              <a:rPr lang="en-US" sz="2200" dirty="0" err="1" smtClean="0"/>
+              <a:rPr lang="en-US" sz="2000" dirty="0" err="1" smtClean="0"/>
               <a:t>minikube</a:t>
             </a:r>
             <a:r>
-              <a:rPr lang="en-US" sz="2200" dirty="0" smtClean="0"/>
+              <a:rPr lang="en-US" sz="2000" dirty="0" smtClean="0"/>
               <a:t> start --</a:t>
             </a:r>
             <a:r>
-              <a:rPr lang="en-US" sz="2200" dirty="0" err="1" smtClean="0"/>
+              <a:rPr lang="en-US" sz="2000" dirty="0" err="1" smtClean="0"/>
               <a:t>cpus</a:t>
             </a:r>
             <a:r>
-              <a:rPr lang="en-US" sz="2200" dirty="0" smtClean="0"/>
+              <a:rPr lang="en-US" sz="2000" dirty="0" smtClean="0"/>
               <a:t>=4 --memory 4096 --disk-size 32g</a:t>
             </a:r>
           </a:p>
           <a:p>
             <a:r>
-              <a:rPr lang="en-US" sz="2200" dirty="0" err="1" smtClean="0"/>
+              <a:rPr lang="en-US" sz="2000" dirty="0" err="1" smtClean="0"/>
               <a:t>kubectl</a:t>
             </a:r>
             <a:r>
-              <a:rPr lang="en-US" sz="2200" dirty="0" smtClean="0"/>
+              <a:rPr lang="en-US" sz="2000" dirty="0" smtClean="0"/>
               <a:t> get nodes</a:t>
             </a:r>
           </a:p>
           <a:p>
             <a:r>
-              <a:rPr lang="en-US" sz="2200" dirty="0" err="1" smtClean="0"/>
+              <a:rPr lang="en-US" sz="2000" dirty="0" err="1" smtClean="0"/>
               <a:t>skaffold</a:t>
             </a:r>
             <a:r>
-              <a:rPr lang="en-US" sz="2200" dirty="0" smtClean="0"/>
+              <a:rPr lang="en-US" sz="2000" dirty="0" smtClean="0"/>
               <a:t> run # </a:t>
             </a:r>
             <a:r>
-              <a:rPr lang="en-US" sz="2200" dirty="0" smtClean="0">
+              <a:rPr lang="en-US" sz="2000" dirty="0" smtClean="0">
                 <a:hlinkClick r:id="rId5"/>
               </a:rPr>
               <a:t>https://skaffold.dev/docs/references/cli/</a:t>
             </a:r>
-            <a:endParaRPr lang="en-US" sz="2200" dirty="0" smtClean="0"/>
+            <a:endParaRPr lang="en-US" sz="2000" dirty="0" smtClean="0"/>
+          </a:p>
+          <a:p>
+            <a:r>
+              <a:rPr lang="en-US" sz="2000" dirty="0" err="1" smtClean="0"/>
+              <a:t>kubectl</a:t>
+            </a:r>
+            <a:r>
+              <a:rPr lang="en-US" sz="2000" dirty="0" smtClean="0"/>
+              <a:t> port-forward --address 0.0.0.0 deploy/frontend 8080:8080</a:t>
+            </a:r>
           </a:p>
         </p:txBody>
       </p:sp>
@@ -8593,7 +8603,7 @@
           <a:p>
             <a:r>
               <a:rPr lang="en-US" dirty="0" err="1" smtClean="0"/>
-              <a:t>TeaStore</a:t>
+              <a:t>Bookinfo</a:t>
             </a:r>
             <a:endParaRPr lang="en-US" dirty="0"/>
           </a:p>
@@ -8613,37 +8623,39 @@
         <p:txBody>
           <a:bodyPr/>
           <a:lstStyle/>
-          <a:p>
-            <a:r>
-              <a:rPr lang="en-US" sz="2400" dirty="0" smtClean="0"/>
-              <a:t>(2018). </a:t>
-            </a:r>
-            <a:r>
-              <a:rPr lang="en-US" sz="2400" dirty="0" err="1" smtClean="0"/>
-              <a:t>TeaStore</a:t>
-            </a:r>
-            <a:r>
-              <a:rPr lang="en-US" sz="2400" dirty="0" smtClean="0"/>
-              <a:t>.</a:t>
-            </a:r>
-          </a:p>
           <a:p>
             <a:r>
               <a:rPr lang="en-US" sz="2400" dirty="0" smtClean="0">
                 <a:hlinkClick r:id="rId2"/>
               </a:rPr>
-              <a:t>https://github.com/descartesresearch/teastore</a:t>
+              <a:t>https://istio.io/latest/docs/examples/bookinfo/</a:t>
             </a:r>
             <a:endParaRPr lang="en-US" sz="2400" dirty="0" smtClean="0"/>
           </a:p>
           <a:p>
             <a:r>
               <a:rPr lang="en-US" sz="2400" dirty="0" smtClean="0"/>
-              <a:t>Java, Maven, Netflix Ribbon, </a:t>
-            </a:r>
+              <a:t>Python, Ruby, Java.</a:t>
+            </a:r>
+          </a:p>
+          <a:p>
+            <a:r>
+              <a:rPr lang="en-US" sz="2400" dirty="0" smtClean="0"/>
+              <a:t>Node.js.</a:t>
+            </a:r>
+          </a:p>
+          <a:p>
             <a:r>
               <a:rPr lang="en-US" sz="2400" dirty="0" err="1" smtClean="0"/>
-              <a:t>MariaDB</a:t>
+              <a:t>Kubernetes</a:t>
+            </a:r>
+            <a:r>
+              <a:rPr lang="en-US" sz="2400" dirty="0" smtClean="0"/>
+              <a:t> and </a:t>
+            </a:r>
+            <a:r>
+              <a:rPr lang="en-US" sz="2400" dirty="0" err="1" smtClean="0"/>
+              <a:t>Istio</a:t>
             </a:r>
             <a:r>
               <a:rPr lang="en-US" sz="2400" dirty="0" smtClean="0"/>
@@ -8652,72 +8664,27 @@
           </a:p>
           <a:p>
             <a:r>
-              <a:rPr lang="en-US" sz="2400" dirty="0" err="1" smtClean="0"/>
-              <a:t>Docker</a:t>
-            </a:r>
-            <a:r>
-              <a:rPr lang="en-US" sz="2400" dirty="0" smtClean="0"/>
-              <a:t>, </a:t>
-            </a:r>
-            <a:r>
-              <a:rPr lang="en-US" sz="2400" dirty="0" err="1" smtClean="0"/>
-              <a:t>Docker</a:t>
-            </a:r>
-            <a:r>
-              <a:rPr lang="en-US" sz="2400" dirty="0" smtClean="0"/>
-              <a:t> Compose, </a:t>
-            </a:r>
-            <a:r>
-              <a:rPr lang="en-US" sz="2400" dirty="0" err="1" smtClean="0"/>
-              <a:t>Kubernetes</a:t>
-            </a:r>
-            <a:r>
-              <a:rPr lang="en-US" sz="2400" dirty="0" smtClean="0"/>
-              <a:t>, Helm, </a:t>
-            </a:r>
-            <a:r>
-              <a:rPr lang="en-US" sz="2400" dirty="0" err="1" smtClean="0"/>
-              <a:t>Kieker</a:t>
-            </a:r>
-            <a:r>
-              <a:rPr lang="en-US" sz="2400" dirty="0" smtClean="0"/>
-              <a:t>, </a:t>
-            </a:r>
-            <a:r>
-              <a:rPr lang="en-US" sz="2400" dirty="0" err="1" smtClean="0"/>
-              <a:t>OpenTracing</a:t>
-            </a:r>
-            <a:r>
-              <a:rPr lang="en-US" sz="2400" dirty="0" smtClean="0"/>
-              <a:t>, </a:t>
-            </a:r>
-            <a:r>
-              <a:rPr lang="en-US" sz="2400" dirty="0" err="1" smtClean="0"/>
-              <a:t>Istio</a:t>
-            </a:r>
-            <a:r>
-              <a:rPr lang="en-US" sz="2400" dirty="0" smtClean="0"/>
-              <a:t>, </a:t>
-            </a:r>
-            <a:r>
-              <a:rPr lang="en-US" sz="2400" dirty="0" err="1" smtClean="0"/>
-              <a:t>RabbitMQ</a:t>
-            </a:r>
-            <a:r>
-              <a:rPr lang="en-US" sz="2400" dirty="0" smtClean="0"/>
-              <a:t>, LIMBO.</a:t>
-            </a:r>
-          </a:p>
-          <a:p>
-            <a:r>
-              <a:rPr lang="en-US" sz="2400" dirty="0" err="1" smtClean="0"/>
-              <a:t>JMeter</a:t>
-            </a:r>
-            <a:r>
-              <a:rPr lang="en-US" sz="2400" dirty="0" smtClean="0"/>
-              <a:t> and Locust.</a:t>
-            </a:r>
-            <a:endParaRPr lang="en-US" sz="2400" dirty="0"/>
+              <a:rPr lang="en-US" sz="2400" smtClean="0">
+                <a:hlinkClick r:id="rId3"/>
+              </a:rPr>
+              <a:t>https://</a:t>
+            </a:r>
+            <a:r>
+              <a:rPr lang="en-US" sz="2400" smtClean="0">
+                <a:hlinkClick r:id="rId3"/>
+              </a:rPr>
+              <a:t>istio.io/latest/docs/setup/getting-started</a:t>
+            </a:r>
+            <a:r>
+              <a:rPr lang="en-US" sz="2400" smtClean="0">
+                <a:hlinkClick r:id="rId3"/>
+              </a:rPr>
+              <a:t>/</a:t>
+            </a:r>
+            <a:endParaRPr lang="en-US" sz="2400" smtClean="0"/>
+          </a:p>
+          <a:p>
+            <a:endParaRPr lang="en-US" sz="2400" dirty="0" smtClean="0"/>
           </a:p>
         </p:txBody>
       </p:sp>
@@ -8763,7 +8730,7 @@
           <a:p>
             <a:r>
               <a:rPr lang="en-US" dirty="0" err="1" smtClean="0"/>
-              <a:t>Bookinfo</a:t>
+              <a:t>TeaStore</a:t>
             </a:r>
             <a:endParaRPr lang="en-US" dirty="0"/>
           </a:p>
@@ -8783,35 +8750,83 @@
         <p:txBody>
           <a:bodyPr/>
           <a:lstStyle/>
+          <a:p>
+            <a:r>
+              <a:rPr lang="en-US" sz="2400" dirty="0" smtClean="0"/>
+              <a:t>(2018). </a:t>
+            </a:r>
+            <a:r>
+              <a:rPr lang="en-US" sz="2400" dirty="0" err="1" smtClean="0"/>
+              <a:t>TeaStore</a:t>
+            </a:r>
+            <a:r>
+              <a:rPr lang="en-US" sz="2400" dirty="0" smtClean="0"/>
+              <a:t>.</a:t>
+            </a:r>
+          </a:p>
           <a:p>
             <a:r>
               <a:rPr lang="en-US" sz="2400" dirty="0" smtClean="0">
                 <a:hlinkClick r:id="rId2"/>
               </a:rPr>
-              <a:t>https://istio.io/latest/docs/examples/bookinfo/</a:t>
+              <a:t>https://github.com/descartesresearch/teastore</a:t>
             </a:r>
             <a:endParaRPr lang="en-US" sz="2400" dirty="0" smtClean="0"/>
           </a:p>
           <a:p>
             <a:r>
               <a:rPr lang="en-US" sz="2400" dirty="0" smtClean="0"/>
-              <a:t>Python, Ruby, Java.</a:t>
-            </a:r>
-          </a:p>
-          <a:p>
+              <a:t>Java, Maven, Netflix Ribbon, </a:t>
+            </a:r>
+            <a:r>
+              <a:rPr lang="en-US" sz="2400" dirty="0" err="1" smtClean="0"/>
+              <a:t>MariaDB</a:t>
+            </a:r>
             <a:r>
               <a:rPr lang="en-US" sz="2400" dirty="0" smtClean="0"/>
-              <a:t>Node.js.</a:t>
-            </a:r>
-          </a:p>
-          <a:p>
+              <a:t>.</a:t>
+            </a:r>
+          </a:p>
+          <a:p>
+            <a:r>
+              <a:rPr lang="en-US" sz="2400" dirty="0" err="1" smtClean="0"/>
+              <a:t>Docker</a:t>
+            </a:r>
+            <a:r>
+              <a:rPr lang="en-US" sz="2400" dirty="0" smtClean="0"/>
+              <a:t>, </a:t>
+            </a:r>
+            <a:r>
+              <a:rPr lang="en-US" sz="2400" dirty="0" err="1" smtClean="0"/>
+              <a:t>Docker</a:t>
+            </a:r>
+            <a:r>
+              <a:rPr lang="en-US" sz="2400" dirty="0" smtClean="0"/>
+              <a:t> Compose, </a:t>
+            </a:r>
             <a:r>
               <a:rPr lang="en-US" sz="2400" dirty="0" err="1" smtClean="0"/>
               <a:t>Kubernetes</a:t>
             </a:r>
             <a:r>
               <a:rPr lang="en-US" sz="2400" dirty="0" smtClean="0"/>
-              <a:t> and </a:t>
+              <a:t>, Helm, </a:t>
+            </a:r>
+            <a:r>
+              <a:rPr lang="en-US" sz="2400" dirty="0" err="1" smtClean="0"/>
+              <a:t>Kieker</a:t>
+            </a:r>
+            <a:r>
+              <a:rPr lang="en-US" sz="2400" dirty="0" smtClean="0"/>
+              <a:t>, </a:t>
+            </a:r>
+            <a:r>
+              <a:rPr lang="en-US" sz="2400" dirty="0" err="1" smtClean="0"/>
+              <a:t>OpenTracing</a:t>
+            </a:r>
+            <a:r>
+              <a:rPr lang="en-US" sz="2400" dirty="0" smtClean="0"/>
+              <a:t>, </a:t>
             </a:r>
             <a:r>
               <a:rPr lang="en-US" sz="2400" dirty="0" err="1" smtClean="0"/>
@@ -8819,8 +8834,27 @@
             </a:r>
             <a:r>
               <a:rPr lang="en-US" sz="2400" dirty="0" smtClean="0"/>
-              <a:t>.</a:t>
-            </a:r>
+              <a:t>, </a:t>
+            </a:r>
+            <a:r>
+              <a:rPr lang="en-US" sz="2400" dirty="0" err="1" smtClean="0"/>
+              <a:t>RabbitMQ</a:t>
+            </a:r>
+            <a:r>
+              <a:rPr lang="en-US" sz="2400" dirty="0" smtClean="0"/>
+              <a:t>, LIMBO.</a:t>
+            </a:r>
+          </a:p>
+          <a:p>
+            <a:r>
+              <a:rPr lang="en-US" sz="2400" dirty="0" err="1" smtClean="0"/>
+              <a:t>JMeter</a:t>
+            </a:r>
+            <a:r>
+              <a:rPr lang="en-US" sz="2400" dirty="0" smtClean="0"/>
+              <a:t> and Locust.</a:t>
+            </a:r>
+            <a:endParaRPr lang="en-US" sz="2400" dirty="0"/>
           </a:p>
         </p:txBody>
       </p:sp>
